--- a/topic07-TDD-and-JUnit/unit-07a-lectures/talk-1-tdd-intro/a-prog-fund-2-TDD-intro.pptx
+++ b/topic07-TDD-and-JUnit/unit-07a-lectures/talk-1-tdd-intro/a-prog-fund-2-TDD-intro.pptx
@@ -228,7 +228,7 @@
           <a:p>
             <a:fld id="{56BC3C30-7F3D-4B20-9974-47C57B22CA6E}" type="datetimeFigureOut">
               <a:rPr lang="en-IE" smtClean="0"/>
-              <a:t>03/03/2026</a:t>
+              <a:t>07/03/2026</a:t>
             </a:fld>
             <a:endParaRPr lang="en-IE"/>
           </a:p>
@@ -760,7 +760,7 @@
             <a:fld id="{1D8BD707-D9CF-40AE-B4C6-C98DA3205C09}" type="datetimeFigureOut">
               <a:rPr lang="en-US" smtClean="0"/>
               <a:pPr/>
-              <a:t>3/3/2026</a:t>
+              <a:t>3/7/26</a:t>
             </a:fld>
             <a:endParaRPr lang="en-US"/>
           </a:p>
@@ -925,7 +925,7 @@
             <a:fld id="{1D8BD707-D9CF-40AE-B4C6-C98DA3205C09}" type="datetimeFigureOut">
               <a:rPr lang="en-US" smtClean="0"/>
               <a:pPr/>
-              <a:t>3/3/2026</a:t>
+              <a:t>3/7/26</a:t>
             </a:fld>
             <a:endParaRPr lang="en-US"/>
           </a:p>
@@ -1100,7 +1100,7 @@
             <a:fld id="{1D8BD707-D9CF-40AE-B4C6-C98DA3205C09}" type="datetimeFigureOut">
               <a:rPr lang="en-US" smtClean="0"/>
               <a:pPr/>
-              <a:t>3/3/2026</a:t>
+              <a:t>3/7/26</a:t>
             </a:fld>
             <a:endParaRPr lang="en-US"/>
           </a:p>
@@ -1276,7 +1276,7 @@
           </a:ln>
           <a:extLst>
             <a:ext uri="{C572A759-6A51-4108-AA02-DFA0A04FC94B}">
-              <ma14:wrappingTextBoxFlag xmlns="" xmlns:ma14="http://schemas.microsoft.com/office/mac/drawingml/2011/main" val="1"/>
+              <ma14:wrappingTextBoxFlag xmlns:ma14="http://schemas.microsoft.com/office/mac/drawingml/2011/main" xmlns="" val="1"/>
             </a:ext>
           </a:extLst>
         </p:spPr>
@@ -1363,7 +1363,7 @@
             <a:effectLst/>
             <a:extLst>
               <a:ext uri="{C572A759-6A51-4108-AA02-DFA0A04FC94B}">
-                <ma14:wrappingTextBoxFlag xmlns="" xmlns:ma14="http://schemas.microsoft.com/office/mac/drawingml/2011/main" val="1"/>
+                <ma14:wrappingTextBoxFlag xmlns:ma14="http://schemas.microsoft.com/office/mac/drawingml/2011/main" xmlns="" val="1"/>
               </a:ext>
             </a:extLst>
           </p:spPr>
@@ -1436,7 +1436,7 @@
             <a:effectLst/>
             <a:extLst>
               <a:ext uri="{C572A759-6A51-4108-AA02-DFA0A04FC94B}">
-                <ma14:wrappingTextBoxFlag xmlns="" xmlns:ma14="http://schemas.microsoft.com/office/mac/drawingml/2011/main" val="1"/>
+                <ma14:wrappingTextBoxFlag xmlns:ma14="http://schemas.microsoft.com/office/mac/drawingml/2011/main" xmlns="" val="1"/>
               </a:ext>
             </a:extLst>
           </p:spPr>
@@ -1487,7 +1487,7 @@
             <a:effectLst/>
             <a:extLst>
               <a:ext uri="{C572A759-6A51-4108-AA02-DFA0A04FC94B}">
-                <ma14:wrappingTextBoxFlag xmlns="" xmlns:ma14="http://schemas.microsoft.com/office/mac/drawingml/2011/main" val="1"/>
+                <ma14:wrappingTextBoxFlag xmlns:ma14="http://schemas.microsoft.com/office/mac/drawingml/2011/main" xmlns="" val="1"/>
               </a:ext>
             </a:extLst>
           </p:spPr>
@@ -1880,7 +1880,7 @@
             <a:fld id="{1D8BD707-D9CF-40AE-B4C6-C98DA3205C09}" type="datetimeFigureOut">
               <a:rPr lang="en-US" smtClean="0"/>
               <a:pPr/>
-              <a:t>3/3/2026</a:t>
+              <a:t>3/7/26</a:t>
             </a:fld>
             <a:endParaRPr lang="en-US"/>
           </a:p>
@@ -2160,7 +2160,7 @@
             <a:fld id="{1D8BD707-D9CF-40AE-B4C6-C98DA3205C09}" type="datetimeFigureOut">
               <a:rPr lang="en-US" smtClean="0"/>
               <a:pPr/>
-              <a:t>3/3/2026</a:t>
+              <a:t>3/7/26</a:t>
             </a:fld>
             <a:endParaRPr lang="en-US"/>
           </a:p>
@@ -2453,7 +2453,7 @@
             <a:fld id="{1D8BD707-D9CF-40AE-B4C6-C98DA3205C09}" type="datetimeFigureOut">
               <a:rPr lang="en-US" smtClean="0"/>
               <a:pPr/>
-              <a:t>3/3/2026</a:t>
+              <a:t>3/7/26</a:t>
             </a:fld>
             <a:endParaRPr lang="en-US"/>
           </a:p>
@@ -2911,7 +2911,7 @@
             <a:fld id="{1D8BD707-D9CF-40AE-B4C6-C98DA3205C09}" type="datetimeFigureOut">
               <a:rPr lang="en-US" smtClean="0"/>
               <a:pPr/>
-              <a:t>3/3/2026</a:t>
+              <a:t>3/7/26</a:t>
             </a:fld>
             <a:endParaRPr lang="en-US"/>
           </a:p>
@@ -3071,7 +3071,7 @@
             <a:fld id="{1D8BD707-D9CF-40AE-B4C6-C98DA3205C09}" type="datetimeFigureOut">
               <a:rPr lang="en-US" smtClean="0"/>
               <a:pPr/>
-              <a:t>3/3/2026</a:t>
+              <a:t>3/7/26</a:t>
             </a:fld>
             <a:endParaRPr lang="en-US"/>
           </a:p>
@@ -3198,7 +3198,7 @@
             <a:fld id="{1D8BD707-D9CF-40AE-B4C6-C98DA3205C09}" type="datetimeFigureOut">
               <a:rPr lang="en-US" smtClean="0"/>
               <a:pPr/>
-              <a:t>3/3/2026</a:t>
+              <a:t>3/7/26</a:t>
             </a:fld>
             <a:endParaRPr lang="en-US"/>
           </a:p>
@@ -3470,7 +3470,7 @@
             <a:fld id="{1D8BD707-D9CF-40AE-B4C6-C98DA3205C09}" type="datetimeFigureOut">
               <a:rPr lang="en-US" smtClean="0"/>
               <a:pPr/>
-              <a:t>3/3/2026</a:t>
+              <a:t>3/7/26</a:t>
             </a:fld>
             <a:endParaRPr lang="en-US"/>
           </a:p>
@@ -3719,7 +3719,7 @@
             <a:fld id="{1D8BD707-D9CF-40AE-B4C6-C98DA3205C09}" type="datetimeFigureOut">
               <a:rPr lang="en-US" smtClean="0"/>
               <a:pPr/>
-              <a:t>3/3/2026</a:t>
+              <a:t>3/7/26</a:t>
             </a:fld>
             <a:endParaRPr lang="en-US"/>
           </a:p>
@@ -3927,7 +3927,7 @@
             <a:fld id="{1D8BD707-D9CF-40AE-B4C6-C98DA3205C09}" type="datetimeFigureOut">
               <a:rPr lang="en-US" smtClean="0"/>
               <a:pPr/>
-              <a:t>3/3/2026</a:t>
+              <a:t>3/7/26</a:t>
             </a:fld>
             <a:endParaRPr lang="en-US"/>
           </a:p>
@@ -4735,6 +4735,12 @@
             <a:pPr lvl="0">
               <a:defRPr sz="1800"/>
             </a:pPr>
+            <a:endParaRPr lang="en-IE" sz="2400" dirty="0"/>
+          </a:p>
+          <a:p>
+            <a:pPr lvl="0">
+              <a:defRPr sz="1800"/>
+            </a:pPr>
             <a:r>
               <a:rPr sz="2400" dirty="0"/>
               <a:t>A unit test is a piece of code written by a developer that </a:t>
@@ -4755,6 +4761,19 @@
               <a:rPr sz="2400" dirty="0"/>
               <a:t> a very small, specific area of functionality of the code being tested.</a:t>
             </a:r>
+            <a:endParaRPr lang="en-IE" sz="2400" dirty="0"/>
+          </a:p>
+          <a:p>
+            <a:pPr lvl="0">
+              <a:defRPr sz="1800"/>
+            </a:pPr>
+            <a:endParaRPr lang="en-IE" sz="2400" dirty="0"/>
+          </a:p>
+          <a:p>
+            <a:pPr lvl="0">
+              <a:defRPr sz="1800"/>
+            </a:pPr>
+            <a:endParaRPr sz="2400" dirty="0"/>
           </a:p>
           <a:p>
             <a:pPr lvl="1">
@@ -4794,7 +4813,7 @@
           </a:prstGeom>
           <a:extLst>
             <a:ext uri="{C572A759-6A51-4108-AA02-DFA0A04FC94B}">
-              <ma14:wrappingTextBoxFlag xmlns:ma14="http://schemas.microsoft.com/office/mac/drawingml/2011/main" xmlns="" val="1"/>
+              <ma14:wrappingTextBoxFlag xmlns="" xmlns:ma14="http://schemas.microsoft.com/office/mac/drawingml/2011/main" val="1"/>
             </a:ext>
           </a:extLst>
         </p:spPr>
@@ -4826,6 +4845,242 @@
   <p:clrMapOvr>
     <a:masterClrMapping/>
   </p:clrMapOvr>
+  <p:timing>
+    <p:tnLst>
+      <p:par>
+        <p:cTn id="1" dur="indefinite" restart="never" nodeType="tmRoot">
+          <p:childTnLst>
+            <p:seq concurrent="1" nextAc="seek">
+              <p:cTn id="2" dur="indefinite" nodeType="mainSeq">
+                <p:childTnLst>
+                  <p:par>
+                    <p:cTn id="3" fill="hold">
+                      <p:stCondLst>
+                        <p:cond delay="indefinite"/>
+                      </p:stCondLst>
+                      <p:childTnLst>
+                        <p:par>
+                          <p:cTn id="4" fill="hold">
+                            <p:stCondLst>
+                              <p:cond delay="0"/>
+                            </p:stCondLst>
+                            <p:childTnLst>
+                              <p:par>
+                                <p:cTn id="5" presetID="2" presetClass="entr" presetSubtype="4" fill="hold" nodeType="clickEffect">
+                                  <p:stCondLst>
+                                    <p:cond delay="0"/>
+                                  </p:stCondLst>
+                                  <p:childTnLst>
+                                    <p:set>
+                                      <p:cBhvr>
+                                        <p:cTn id="6" dur="1" fill="hold">
+                                          <p:stCondLst>
+                                            <p:cond delay="0"/>
+                                          </p:stCondLst>
+                                        </p:cTn>
+                                        <p:tgtEl>
+                                          <p:spTgt spid="157">
+                                            <p:txEl>
+                                              <p:pRg st="1" end="1"/>
+                                            </p:txEl>
+                                          </p:spTgt>
+                                        </p:tgtEl>
+                                        <p:attrNameLst>
+                                          <p:attrName>style.visibility</p:attrName>
+                                        </p:attrNameLst>
+                                      </p:cBhvr>
+                                      <p:to>
+                                        <p:strVal val="visible"/>
+                                      </p:to>
+                                    </p:set>
+                                    <p:anim calcmode="lin" valueType="num">
+                                      <p:cBhvr additive="base">
+                                        <p:cTn id="7" dur="500" fill="hold"/>
+                                        <p:tgtEl>
+                                          <p:spTgt spid="157">
+                                            <p:txEl>
+                                              <p:pRg st="1" end="1"/>
+                                            </p:txEl>
+                                          </p:spTgt>
+                                        </p:tgtEl>
+                                        <p:attrNameLst>
+                                          <p:attrName>ppt_x</p:attrName>
+                                        </p:attrNameLst>
+                                      </p:cBhvr>
+                                      <p:tavLst>
+                                        <p:tav tm="0">
+                                          <p:val>
+                                            <p:strVal val="#ppt_x"/>
+                                          </p:val>
+                                        </p:tav>
+                                        <p:tav tm="100000">
+                                          <p:val>
+                                            <p:strVal val="#ppt_x"/>
+                                          </p:val>
+                                        </p:tav>
+                                      </p:tavLst>
+                                    </p:anim>
+                                    <p:anim calcmode="lin" valueType="num">
+                                      <p:cBhvr additive="base">
+                                        <p:cTn id="8" dur="500" fill="hold"/>
+                                        <p:tgtEl>
+                                          <p:spTgt spid="157">
+                                            <p:txEl>
+                                              <p:pRg st="1" end="1"/>
+                                            </p:txEl>
+                                          </p:spTgt>
+                                        </p:tgtEl>
+                                        <p:attrNameLst>
+                                          <p:attrName>ppt_y</p:attrName>
+                                        </p:attrNameLst>
+                                      </p:cBhvr>
+                                      <p:tavLst>
+                                        <p:tav tm="0">
+                                          <p:val>
+                                            <p:strVal val="1+#ppt_h/2"/>
+                                          </p:val>
+                                        </p:tav>
+                                        <p:tav tm="100000">
+                                          <p:val>
+                                            <p:strVal val="#ppt_y"/>
+                                          </p:val>
+                                        </p:tav>
+                                      </p:tavLst>
+                                    </p:anim>
+                                  </p:childTnLst>
+                                </p:cTn>
+                              </p:par>
+                            </p:childTnLst>
+                          </p:cTn>
+                        </p:par>
+                      </p:childTnLst>
+                    </p:cTn>
+                  </p:par>
+                  <p:par>
+                    <p:cTn id="9" fill="hold">
+                      <p:stCondLst>
+                        <p:cond delay="indefinite"/>
+                      </p:stCondLst>
+                      <p:childTnLst>
+                        <p:par>
+                          <p:cTn id="10" fill="hold">
+                            <p:stCondLst>
+                              <p:cond delay="0"/>
+                            </p:stCondLst>
+                            <p:childTnLst>
+                              <p:par>
+                                <p:cTn id="11" presetID="2" presetClass="entr" presetSubtype="4" fill="hold" nodeType="clickEffect">
+                                  <p:stCondLst>
+                                    <p:cond delay="0"/>
+                                  </p:stCondLst>
+                                  <p:childTnLst>
+                                    <p:set>
+                                      <p:cBhvr>
+                                        <p:cTn id="12" dur="1" fill="hold">
+                                          <p:stCondLst>
+                                            <p:cond delay="0"/>
+                                          </p:stCondLst>
+                                        </p:cTn>
+                                        <p:tgtEl>
+                                          <p:spTgt spid="157">
+                                            <p:txEl>
+                                              <p:pRg st="4" end="4"/>
+                                            </p:txEl>
+                                          </p:spTgt>
+                                        </p:tgtEl>
+                                        <p:attrNameLst>
+                                          <p:attrName>style.visibility</p:attrName>
+                                        </p:attrNameLst>
+                                      </p:cBhvr>
+                                      <p:to>
+                                        <p:strVal val="visible"/>
+                                      </p:to>
+                                    </p:set>
+                                    <p:anim calcmode="lin" valueType="num">
+                                      <p:cBhvr additive="base">
+                                        <p:cTn id="13" dur="500" fill="hold"/>
+                                        <p:tgtEl>
+                                          <p:spTgt spid="157">
+                                            <p:txEl>
+                                              <p:pRg st="4" end="4"/>
+                                            </p:txEl>
+                                          </p:spTgt>
+                                        </p:tgtEl>
+                                        <p:attrNameLst>
+                                          <p:attrName>ppt_x</p:attrName>
+                                        </p:attrNameLst>
+                                      </p:cBhvr>
+                                      <p:tavLst>
+                                        <p:tav tm="0">
+                                          <p:val>
+                                            <p:strVal val="#ppt_x"/>
+                                          </p:val>
+                                        </p:tav>
+                                        <p:tav tm="100000">
+                                          <p:val>
+                                            <p:strVal val="#ppt_x"/>
+                                          </p:val>
+                                        </p:tav>
+                                      </p:tavLst>
+                                    </p:anim>
+                                    <p:anim calcmode="lin" valueType="num">
+                                      <p:cBhvr additive="base">
+                                        <p:cTn id="14" dur="500" fill="hold"/>
+                                        <p:tgtEl>
+                                          <p:spTgt spid="157">
+                                            <p:txEl>
+                                              <p:pRg st="4" end="4"/>
+                                            </p:txEl>
+                                          </p:spTgt>
+                                        </p:tgtEl>
+                                        <p:attrNameLst>
+                                          <p:attrName>ppt_y</p:attrName>
+                                        </p:attrNameLst>
+                                      </p:cBhvr>
+                                      <p:tavLst>
+                                        <p:tav tm="0">
+                                          <p:val>
+                                            <p:strVal val="1+#ppt_h/2"/>
+                                          </p:val>
+                                        </p:tav>
+                                        <p:tav tm="100000">
+                                          <p:val>
+                                            <p:strVal val="#ppt_y"/>
+                                          </p:val>
+                                        </p:tav>
+                                      </p:tavLst>
+                                    </p:anim>
+                                  </p:childTnLst>
+                                </p:cTn>
+                              </p:par>
+                            </p:childTnLst>
+                          </p:cTn>
+                        </p:par>
+                      </p:childTnLst>
+                    </p:cTn>
+                  </p:par>
+                </p:childTnLst>
+              </p:cTn>
+              <p:prevCondLst>
+                <p:cond evt="onPrev" delay="0">
+                  <p:tgtEl>
+                    <p:sldTgt/>
+                  </p:tgtEl>
+                </p:cond>
+              </p:prevCondLst>
+              <p:nextCondLst>
+                <p:cond evt="onNext" delay="0">
+                  <p:tgtEl>
+                    <p:sldTgt/>
+                  </p:tgtEl>
+                </p:cond>
+              </p:nextCondLst>
+            </p:seq>
+          </p:childTnLst>
+        </p:cTn>
+      </p:par>
+    </p:tnLst>
+  </p:timing>
 </p:sld>
 </file>
 
@@ -4985,7 +5240,7 @@
           </a:prstGeom>
           <a:extLst>
             <a:ext uri="{C572A759-6A51-4108-AA02-DFA0A04FC94B}">
-              <ma14:wrappingTextBoxFlag xmlns:ma14="http://schemas.microsoft.com/office/mac/drawingml/2011/main" xmlns="" val="1"/>
+              <ma14:wrappingTextBoxFlag xmlns="" xmlns:ma14="http://schemas.microsoft.com/office/mac/drawingml/2011/main" val="1"/>
             </a:ext>
           </a:extLst>
         </p:spPr>
@@ -5017,6 +5272,533 @@
   <p:clrMapOvr>
     <a:masterClrMapping/>
   </p:clrMapOvr>
+  <p:timing>
+    <p:tnLst>
+      <p:par>
+        <p:cTn id="1" dur="indefinite" restart="never" nodeType="tmRoot">
+          <p:childTnLst>
+            <p:seq concurrent="1" nextAc="seek">
+              <p:cTn id="2" dur="indefinite" nodeType="mainSeq">
+                <p:childTnLst>
+                  <p:par>
+                    <p:cTn id="3" fill="hold">
+                      <p:stCondLst>
+                        <p:cond delay="indefinite"/>
+                      </p:stCondLst>
+                      <p:childTnLst>
+                        <p:par>
+                          <p:cTn id="4" fill="hold">
+                            <p:stCondLst>
+                              <p:cond delay="0"/>
+                            </p:stCondLst>
+                            <p:childTnLst>
+                              <p:par>
+                                <p:cTn id="5" presetID="2" presetClass="entr" presetSubtype="4" fill="hold" nodeType="clickEffect">
+                                  <p:stCondLst>
+                                    <p:cond delay="0"/>
+                                  </p:stCondLst>
+                                  <p:childTnLst>
+                                    <p:set>
+                                      <p:cBhvr>
+                                        <p:cTn id="6" dur="1" fill="hold">
+                                          <p:stCondLst>
+                                            <p:cond delay="0"/>
+                                          </p:stCondLst>
+                                        </p:cTn>
+                                        <p:tgtEl>
+                                          <p:spTgt spid="157">
+                                            <p:txEl>
+                                              <p:pRg st="0" end="0"/>
+                                            </p:txEl>
+                                          </p:spTgt>
+                                        </p:tgtEl>
+                                        <p:attrNameLst>
+                                          <p:attrName>style.visibility</p:attrName>
+                                        </p:attrNameLst>
+                                      </p:cBhvr>
+                                      <p:to>
+                                        <p:strVal val="visible"/>
+                                      </p:to>
+                                    </p:set>
+                                    <p:anim calcmode="lin" valueType="num">
+                                      <p:cBhvr additive="base">
+                                        <p:cTn id="7" dur="500" fill="hold"/>
+                                        <p:tgtEl>
+                                          <p:spTgt spid="157">
+                                            <p:txEl>
+                                              <p:pRg st="0" end="0"/>
+                                            </p:txEl>
+                                          </p:spTgt>
+                                        </p:tgtEl>
+                                        <p:attrNameLst>
+                                          <p:attrName>ppt_x</p:attrName>
+                                        </p:attrNameLst>
+                                      </p:cBhvr>
+                                      <p:tavLst>
+                                        <p:tav tm="0">
+                                          <p:val>
+                                            <p:strVal val="#ppt_x"/>
+                                          </p:val>
+                                        </p:tav>
+                                        <p:tav tm="100000">
+                                          <p:val>
+                                            <p:strVal val="#ppt_x"/>
+                                          </p:val>
+                                        </p:tav>
+                                      </p:tavLst>
+                                    </p:anim>
+                                    <p:anim calcmode="lin" valueType="num">
+                                      <p:cBhvr additive="base">
+                                        <p:cTn id="8" dur="500" fill="hold"/>
+                                        <p:tgtEl>
+                                          <p:spTgt spid="157">
+                                            <p:txEl>
+                                              <p:pRg st="0" end="0"/>
+                                            </p:txEl>
+                                          </p:spTgt>
+                                        </p:tgtEl>
+                                        <p:attrNameLst>
+                                          <p:attrName>ppt_y</p:attrName>
+                                        </p:attrNameLst>
+                                      </p:cBhvr>
+                                      <p:tavLst>
+                                        <p:tav tm="0">
+                                          <p:val>
+                                            <p:strVal val="1+#ppt_h/2"/>
+                                          </p:val>
+                                        </p:tav>
+                                        <p:tav tm="100000">
+                                          <p:val>
+                                            <p:strVal val="#ppt_y"/>
+                                          </p:val>
+                                        </p:tav>
+                                      </p:tavLst>
+                                    </p:anim>
+                                  </p:childTnLst>
+                                </p:cTn>
+                              </p:par>
+                              <p:par>
+                                <p:cTn id="9" presetID="2" presetClass="entr" presetSubtype="4" fill="hold" nodeType="withEffect">
+                                  <p:stCondLst>
+                                    <p:cond delay="0"/>
+                                  </p:stCondLst>
+                                  <p:childTnLst>
+                                    <p:set>
+                                      <p:cBhvr>
+                                        <p:cTn id="10" dur="1" fill="hold">
+                                          <p:stCondLst>
+                                            <p:cond delay="0"/>
+                                          </p:stCondLst>
+                                        </p:cTn>
+                                        <p:tgtEl>
+                                          <p:spTgt spid="157">
+                                            <p:txEl>
+                                              <p:pRg st="1" end="1"/>
+                                            </p:txEl>
+                                          </p:spTgt>
+                                        </p:tgtEl>
+                                        <p:attrNameLst>
+                                          <p:attrName>style.visibility</p:attrName>
+                                        </p:attrNameLst>
+                                      </p:cBhvr>
+                                      <p:to>
+                                        <p:strVal val="visible"/>
+                                      </p:to>
+                                    </p:set>
+                                    <p:anim calcmode="lin" valueType="num">
+                                      <p:cBhvr additive="base">
+                                        <p:cTn id="11" dur="500" fill="hold"/>
+                                        <p:tgtEl>
+                                          <p:spTgt spid="157">
+                                            <p:txEl>
+                                              <p:pRg st="1" end="1"/>
+                                            </p:txEl>
+                                          </p:spTgt>
+                                        </p:tgtEl>
+                                        <p:attrNameLst>
+                                          <p:attrName>ppt_x</p:attrName>
+                                        </p:attrNameLst>
+                                      </p:cBhvr>
+                                      <p:tavLst>
+                                        <p:tav tm="0">
+                                          <p:val>
+                                            <p:strVal val="#ppt_x"/>
+                                          </p:val>
+                                        </p:tav>
+                                        <p:tav tm="100000">
+                                          <p:val>
+                                            <p:strVal val="#ppt_x"/>
+                                          </p:val>
+                                        </p:tav>
+                                      </p:tavLst>
+                                    </p:anim>
+                                    <p:anim calcmode="lin" valueType="num">
+                                      <p:cBhvr additive="base">
+                                        <p:cTn id="12" dur="500" fill="hold"/>
+                                        <p:tgtEl>
+                                          <p:spTgt spid="157">
+                                            <p:txEl>
+                                              <p:pRg st="1" end="1"/>
+                                            </p:txEl>
+                                          </p:spTgt>
+                                        </p:tgtEl>
+                                        <p:attrNameLst>
+                                          <p:attrName>ppt_y</p:attrName>
+                                        </p:attrNameLst>
+                                      </p:cBhvr>
+                                      <p:tavLst>
+                                        <p:tav tm="0">
+                                          <p:val>
+                                            <p:strVal val="1+#ppt_h/2"/>
+                                          </p:val>
+                                        </p:tav>
+                                        <p:tav tm="100000">
+                                          <p:val>
+                                            <p:strVal val="#ppt_y"/>
+                                          </p:val>
+                                        </p:tav>
+                                      </p:tavLst>
+                                    </p:anim>
+                                  </p:childTnLst>
+                                </p:cTn>
+                              </p:par>
+                            </p:childTnLst>
+                          </p:cTn>
+                        </p:par>
+                      </p:childTnLst>
+                    </p:cTn>
+                  </p:par>
+                  <p:par>
+                    <p:cTn id="13" fill="hold">
+                      <p:stCondLst>
+                        <p:cond delay="indefinite"/>
+                      </p:stCondLst>
+                      <p:childTnLst>
+                        <p:par>
+                          <p:cTn id="14" fill="hold">
+                            <p:stCondLst>
+                              <p:cond delay="0"/>
+                            </p:stCondLst>
+                            <p:childTnLst>
+                              <p:par>
+                                <p:cTn id="15" presetID="2" presetClass="entr" presetSubtype="4" fill="hold" nodeType="clickEffect">
+                                  <p:stCondLst>
+                                    <p:cond delay="0"/>
+                                  </p:stCondLst>
+                                  <p:childTnLst>
+                                    <p:set>
+                                      <p:cBhvr>
+                                        <p:cTn id="16" dur="1" fill="hold">
+                                          <p:stCondLst>
+                                            <p:cond delay="0"/>
+                                          </p:stCondLst>
+                                        </p:cTn>
+                                        <p:tgtEl>
+                                          <p:spTgt spid="157">
+                                            <p:txEl>
+                                              <p:pRg st="3" end="3"/>
+                                            </p:txEl>
+                                          </p:spTgt>
+                                        </p:tgtEl>
+                                        <p:attrNameLst>
+                                          <p:attrName>style.visibility</p:attrName>
+                                        </p:attrNameLst>
+                                      </p:cBhvr>
+                                      <p:to>
+                                        <p:strVal val="visible"/>
+                                      </p:to>
+                                    </p:set>
+                                    <p:anim calcmode="lin" valueType="num">
+                                      <p:cBhvr additive="base">
+                                        <p:cTn id="17" dur="500" fill="hold"/>
+                                        <p:tgtEl>
+                                          <p:spTgt spid="157">
+                                            <p:txEl>
+                                              <p:pRg st="3" end="3"/>
+                                            </p:txEl>
+                                          </p:spTgt>
+                                        </p:tgtEl>
+                                        <p:attrNameLst>
+                                          <p:attrName>ppt_x</p:attrName>
+                                        </p:attrNameLst>
+                                      </p:cBhvr>
+                                      <p:tavLst>
+                                        <p:tav tm="0">
+                                          <p:val>
+                                            <p:strVal val="#ppt_x"/>
+                                          </p:val>
+                                        </p:tav>
+                                        <p:tav tm="100000">
+                                          <p:val>
+                                            <p:strVal val="#ppt_x"/>
+                                          </p:val>
+                                        </p:tav>
+                                      </p:tavLst>
+                                    </p:anim>
+                                    <p:anim calcmode="lin" valueType="num">
+                                      <p:cBhvr additive="base">
+                                        <p:cTn id="18" dur="500" fill="hold"/>
+                                        <p:tgtEl>
+                                          <p:spTgt spid="157">
+                                            <p:txEl>
+                                              <p:pRg st="3" end="3"/>
+                                            </p:txEl>
+                                          </p:spTgt>
+                                        </p:tgtEl>
+                                        <p:attrNameLst>
+                                          <p:attrName>ppt_y</p:attrName>
+                                        </p:attrNameLst>
+                                      </p:cBhvr>
+                                      <p:tavLst>
+                                        <p:tav tm="0">
+                                          <p:val>
+                                            <p:strVal val="1+#ppt_h/2"/>
+                                          </p:val>
+                                        </p:tav>
+                                        <p:tav tm="100000">
+                                          <p:val>
+                                            <p:strVal val="#ppt_y"/>
+                                          </p:val>
+                                        </p:tav>
+                                      </p:tavLst>
+                                    </p:anim>
+                                  </p:childTnLst>
+                                </p:cTn>
+                              </p:par>
+                            </p:childTnLst>
+                          </p:cTn>
+                        </p:par>
+                      </p:childTnLst>
+                    </p:cTn>
+                  </p:par>
+                  <p:par>
+                    <p:cTn id="19" fill="hold">
+                      <p:stCondLst>
+                        <p:cond delay="indefinite"/>
+                      </p:stCondLst>
+                      <p:childTnLst>
+                        <p:par>
+                          <p:cTn id="20" fill="hold">
+                            <p:stCondLst>
+                              <p:cond delay="0"/>
+                            </p:stCondLst>
+                            <p:childTnLst>
+                              <p:par>
+                                <p:cTn id="21" presetID="2" presetClass="entr" presetSubtype="4" fill="hold" nodeType="clickEffect">
+                                  <p:stCondLst>
+                                    <p:cond delay="0"/>
+                                  </p:stCondLst>
+                                  <p:childTnLst>
+                                    <p:set>
+                                      <p:cBhvr>
+                                        <p:cTn id="22" dur="1" fill="hold">
+                                          <p:stCondLst>
+                                            <p:cond delay="0"/>
+                                          </p:stCondLst>
+                                        </p:cTn>
+                                        <p:tgtEl>
+                                          <p:spTgt spid="157">
+                                            <p:txEl>
+                                              <p:pRg st="4" end="4"/>
+                                            </p:txEl>
+                                          </p:spTgt>
+                                        </p:tgtEl>
+                                        <p:attrNameLst>
+                                          <p:attrName>style.visibility</p:attrName>
+                                        </p:attrNameLst>
+                                      </p:cBhvr>
+                                      <p:to>
+                                        <p:strVal val="visible"/>
+                                      </p:to>
+                                    </p:set>
+                                    <p:anim calcmode="lin" valueType="num">
+                                      <p:cBhvr additive="base">
+                                        <p:cTn id="23" dur="500" fill="hold"/>
+                                        <p:tgtEl>
+                                          <p:spTgt spid="157">
+                                            <p:txEl>
+                                              <p:pRg st="4" end="4"/>
+                                            </p:txEl>
+                                          </p:spTgt>
+                                        </p:tgtEl>
+                                        <p:attrNameLst>
+                                          <p:attrName>ppt_x</p:attrName>
+                                        </p:attrNameLst>
+                                      </p:cBhvr>
+                                      <p:tavLst>
+                                        <p:tav tm="0">
+                                          <p:val>
+                                            <p:strVal val="#ppt_x"/>
+                                          </p:val>
+                                        </p:tav>
+                                        <p:tav tm="100000">
+                                          <p:val>
+                                            <p:strVal val="#ppt_x"/>
+                                          </p:val>
+                                        </p:tav>
+                                      </p:tavLst>
+                                    </p:anim>
+                                    <p:anim calcmode="lin" valueType="num">
+                                      <p:cBhvr additive="base">
+                                        <p:cTn id="24" dur="500" fill="hold"/>
+                                        <p:tgtEl>
+                                          <p:spTgt spid="157">
+                                            <p:txEl>
+                                              <p:pRg st="4" end="4"/>
+                                            </p:txEl>
+                                          </p:spTgt>
+                                        </p:tgtEl>
+                                        <p:attrNameLst>
+                                          <p:attrName>ppt_y</p:attrName>
+                                        </p:attrNameLst>
+                                      </p:cBhvr>
+                                      <p:tavLst>
+                                        <p:tav tm="0">
+                                          <p:val>
+                                            <p:strVal val="1+#ppt_h/2"/>
+                                          </p:val>
+                                        </p:tav>
+                                        <p:tav tm="100000">
+                                          <p:val>
+                                            <p:strVal val="#ppt_y"/>
+                                          </p:val>
+                                        </p:tav>
+                                      </p:tavLst>
+                                    </p:anim>
+                                  </p:childTnLst>
+                                </p:cTn>
+                              </p:par>
+                            </p:childTnLst>
+                          </p:cTn>
+                        </p:par>
+                      </p:childTnLst>
+                    </p:cTn>
+                  </p:par>
+                  <p:par>
+                    <p:cTn id="25" fill="hold">
+                      <p:stCondLst>
+                        <p:cond delay="indefinite"/>
+                      </p:stCondLst>
+                      <p:childTnLst>
+                        <p:par>
+                          <p:cTn id="26" fill="hold">
+                            <p:stCondLst>
+                              <p:cond delay="0"/>
+                            </p:stCondLst>
+                            <p:childTnLst>
+                              <p:par>
+                                <p:cTn id="27" presetID="2" presetClass="entr" presetSubtype="4" fill="hold" nodeType="clickEffect">
+                                  <p:stCondLst>
+                                    <p:cond delay="0"/>
+                                  </p:stCondLst>
+                                  <p:childTnLst>
+                                    <p:set>
+                                      <p:cBhvr>
+                                        <p:cTn id="28" dur="1" fill="hold">
+                                          <p:stCondLst>
+                                            <p:cond delay="0"/>
+                                          </p:stCondLst>
+                                        </p:cTn>
+                                        <p:tgtEl>
+                                          <p:spTgt spid="157">
+                                            <p:txEl>
+                                              <p:pRg st="5" end="5"/>
+                                            </p:txEl>
+                                          </p:spTgt>
+                                        </p:tgtEl>
+                                        <p:attrNameLst>
+                                          <p:attrName>style.visibility</p:attrName>
+                                        </p:attrNameLst>
+                                      </p:cBhvr>
+                                      <p:to>
+                                        <p:strVal val="visible"/>
+                                      </p:to>
+                                    </p:set>
+                                    <p:anim calcmode="lin" valueType="num">
+                                      <p:cBhvr additive="base">
+                                        <p:cTn id="29" dur="500" fill="hold"/>
+                                        <p:tgtEl>
+                                          <p:spTgt spid="157">
+                                            <p:txEl>
+                                              <p:pRg st="5" end="5"/>
+                                            </p:txEl>
+                                          </p:spTgt>
+                                        </p:tgtEl>
+                                        <p:attrNameLst>
+                                          <p:attrName>ppt_x</p:attrName>
+                                        </p:attrNameLst>
+                                      </p:cBhvr>
+                                      <p:tavLst>
+                                        <p:tav tm="0">
+                                          <p:val>
+                                            <p:strVal val="#ppt_x"/>
+                                          </p:val>
+                                        </p:tav>
+                                        <p:tav tm="100000">
+                                          <p:val>
+                                            <p:strVal val="#ppt_x"/>
+                                          </p:val>
+                                        </p:tav>
+                                      </p:tavLst>
+                                    </p:anim>
+                                    <p:anim calcmode="lin" valueType="num">
+                                      <p:cBhvr additive="base">
+                                        <p:cTn id="30" dur="500" fill="hold"/>
+                                        <p:tgtEl>
+                                          <p:spTgt spid="157">
+                                            <p:txEl>
+                                              <p:pRg st="5" end="5"/>
+                                            </p:txEl>
+                                          </p:spTgt>
+                                        </p:tgtEl>
+                                        <p:attrNameLst>
+                                          <p:attrName>ppt_y</p:attrName>
+                                        </p:attrNameLst>
+                                      </p:cBhvr>
+                                      <p:tavLst>
+                                        <p:tav tm="0">
+                                          <p:val>
+                                            <p:strVal val="1+#ppt_h/2"/>
+                                          </p:val>
+                                        </p:tav>
+                                        <p:tav tm="100000">
+                                          <p:val>
+                                            <p:strVal val="#ppt_y"/>
+                                          </p:val>
+                                        </p:tav>
+                                      </p:tavLst>
+                                    </p:anim>
+                                  </p:childTnLst>
+                                </p:cTn>
+                              </p:par>
+                            </p:childTnLst>
+                          </p:cTn>
+                        </p:par>
+                      </p:childTnLst>
+                    </p:cTn>
+                  </p:par>
+                </p:childTnLst>
+              </p:cTn>
+              <p:prevCondLst>
+                <p:cond evt="onPrev" delay="0">
+                  <p:tgtEl>
+                    <p:sldTgt/>
+                  </p:tgtEl>
+                </p:cond>
+              </p:prevCondLst>
+              <p:nextCondLst>
+                <p:cond evt="onNext" delay="0">
+                  <p:tgtEl>
+                    <p:sldTgt/>
+                  </p:tgtEl>
+                </p:cond>
+              </p:nextCondLst>
+            </p:seq>
+          </p:childTnLst>
+        </p:cTn>
+      </p:par>
+    </p:tnLst>
+  </p:timing>
 </p:sld>
 </file>
 
@@ -5265,7 +6047,7 @@
           </a:prstGeom>
           <a:extLst>
             <a:ext uri="{C572A759-6A51-4108-AA02-DFA0A04FC94B}">
-              <ma14:wrappingTextBoxFlag xmlns:ma14="http://schemas.microsoft.com/office/mac/drawingml/2011/main" xmlns="" val="1"/>
+              <ma14:wrappingTextBoxFlag xmlns="" xmlns:ma14="http://schemas.microsoft.com/office/mac/drawingml/2011/main" val="1"/>
             </a:ext>
           </a:extLst>
         </p:spPr>
@@ -5297,6 +6079,600 @@
   <p:clrMapOvr>
     <a:masterClrMapping/>
   </p:clrMapOvr>
+  <p:timing>
+    <p:tnLst>
+      <p:par>
+        <p:cTn id="1" dur="indefinite" restart="never" nodeType="tmRoot">
+          <p:childTnLst>
+            <p:seq concurrent="1" nextAc="seek">
+              <p:cTn id="2" dur="indefinite" nodeType="mainSeq">
+                <p:childTnLst>
+                  <p:par>
+                    <p:cTn id="3" fill="hold">
+                      <p:stCondLst>
+                        <p:cond delay="indefinite"/>
+                      </p:stCondLst>
+                      <p:childTnLst>
+                        <p:par>
+                          <p:cTn id="4" fill="hold">
+                            <p:stCondLst>
+                              <p:cond delay="0"/>
+                            </p:stCondLst>
+                            <p:childTnLst>
+                              <p:par>
+                                <p:cTn id="5" presetID="2" presetClass="entr" presetSubtype="4" fill="hold" nodeType="clickEffect">
+                                  <p:stCondLst>
+                                    <p:cond delay="0"/>
+                                  </p:stCondLst>
+                                  <p:childTnLst>
+                                    <p:set>
+                                      <p:cBhvr>
+                                        <p:cTn id="6" dur="1" fill="hold">
+                                          <p:stCondLst>
+                                            <p:cond delay="0"/>
+                                          </p:stCondLst>
+                                        </p:cTn>
+                                        <p:tgtEl>
+                                          <p:spTgt spid="161">
+                                            <p:txEl>
+                                              <p:pRg st="0" end="0"/>
+                                            </p:txEl>
+                                          </p:spTgt>
+                                        </p:tgtEl>
+                                        <p:attrNameLst>
+                                          <p:attrName>style.visibility</p:attrName>
+                                        </p:attrNameLst>
+                                      </p:cBhvr>
+                                      <p:to>
+                                        <p:strVal val="visible"/>
+                                      </p:to>
+                                    </p:set>
+                                    <p:anim calcmode="lin" valueType="num">
+                                      <p:cBhvr additive="base">
+                                        <p:cTn id="7" dur="500" fill="hold"/>
+                                        <p:tgtEl>
+                                          <p:spTgt spid="161">
+                                            <p:txEl>
+                                              <p:pRg st="0" end="0"/>
+                                            </p:txEl>
+                                          </p:spTgt>
+                                        </p:tgtEl>
+                                        <p:attrNameLst>
+                                          <p:attrName>ppt_x</p:attrName>
+                                        </p:attrNameLst>
+                                      </p:cBhvr>
+                                      <p:tavLst>
+                                        <p:tav tm="0">
+                                          <p:val>
+                                            <p:strVal val="#ppt_x"/>
+                                          </p:val>
+                                        </p:tav>
+                                        <p:tav tm="100000">
+                                          <p:val>
+                                            <p:strVal val="#ppt_x"/>
+                                          </p:val>
+                                        </p:tav>
+                                      </p:tavLst>
+                                    </p:anim>
+                                    <p:anim calcmode="lin" valueType="num">
+                                      <p:cBhvr additive="base">
+                                        <p:cTn id="8" dur="500" fill="hold"/>
+                                        <p:tgtEl>
+                                          <p:spTgt spid="161">
+                                            <p:txEl>
+                                              <p:pRg st="0" end="0"/>
+                                            </p:txEl>
+                                          </p:spTgt>
+                                        </p:tgtEl>
+                                        <p:attrNameLst>
+                                          <p:attrName>ppt_y</p:attrName>
+                                        </p:attrNameLst>
+                                      </p:cBhvr>
+                                      <p:tavLst>
+                                        <p:tav tm="0">
+                                          <p:val>
+                                            <p:strVal val="1+#ppt_h/2"/>
+                                          </p:val>
+                                        </p:tav>
+                                        <p:tav tm="100000">
+                                          <p:val>
+                                            <p:strVal val="#ppt_y"/>
+                                          </p:val>
+                                        </p:tav>
+                                      </p:tavLst>
+                                    </p:anim>
+                                  </p:childTnLst>
+                                </p:cTn>
+                              </p:par>
+                              <p:par>
+                                <p:cTn id="9" presetID="2" presetClass="entr" presetSubtype="4" fill="hold" nodeType="withEffect">
+                                  <p:stCondLst>
+                                    <p:cond delay="0"/>
+                                  </p:stCondLst>
+                                  <p:childTnLst>
+                                    <p:set>
+                                      <p:cBhvr>
+                                        <p:cTn id="10" dur="1" fill="hold">
+                                          <p:stCondLst>
+                                            <p:cond delay="0"/>
+                                          </p:stCondLst>
+                                        </p:cTn>
+                                        <p:tgtEl>
+                                          <p:spTgt spid="161">
+                                            <p:txEl>
+                                              <p:pRg st="1" end="1"/>
+                                            </p:txEl>
+                                          </p:spTgt>
+                                        </p:tgtEl>
+                                        <p:attrNameLst>
+                                          <p:attrName>style.visibility</p:attrName>
+                                        </p:attrNameLst>
+                                      </p:cBhvr>
+                                      <p:to>
+                                        <p:strVal val="visible"/>
+                                      </p:to>
+                                    </p:set>
+                                    <p:anim calcmode="lin" valueType="num">
+                                      <p:cBhvr additive="base">
+                                        <p:cTn id="11" dur="500" fill="hold"/>
+                                        <p:tgtEl>
+                                          <p:spTgt spid="161">
+                                            <p:txEl>
+                                              <p:pRg st="1" end="1"/>
+                                            </p:txEl>
+                                          </p:spTgt>
+                                        </p:tgtEl>
+                                        <p:attrNameLst>
+                                          <p:attrName>ppt_x</p:attrName>
+                                        </p:attrNameLst>
+                                      </p:cBhvr>
+                                      <p:tavLst>
+                                        <p:tav tm="0">
+                                          <p:val>
+                                            <p:strVal val="#ppt_x"/>
+                                          </p:val>
+                                        </p:tav>
+                                        <p:tav tm="100000">
+                                          <p:val>
+                                            <p:strVal val="#ppt_x"/>
+                                          </p:val>
+                                        </p:tav>
+                                      </p:tavLst>
+                                    </p:anim>
+                                    <p:anim calcmode="lin" valueType="num">
+                                      <p:cBhvr additive="base">
+                                        <p:cTn id="12" dur="500" fill="hold"/>
+                                        <p:tgtEl>
+                                          <p:spTgt spid="161">
+                                            <p:txEl>
+                                              <p:pRg st="1" end="1"/>
+                                            </p:txEl>
+                                          </p:spTgt>
+                                        </p:tgtEl>
+                                        <p:attrNameLst>
+                                          <p:attrName>ppt_y</p:attrName>
+                                        </p:attrNameLst>
+                                      </p:cBhvr>
+                                      <p:tavLst>
+                                        <p:tav tm="0">
+                                          <p:val>
+                                            <p:strVal val="1+#ppt_h/2"/>
+                                          </p:val>
+                                        </p:tav>
+                                        <p:tav tm="100000">
+                                          <p:val>
+                                            <p:strVal val="#ppt_y"/>
+                                          </p:val>
+                                        </p:tav>
+                                      </p:tavLst>
+                                    </p:anim>
+                                  </p:childTnLst>
+                                </p:cTn>
+                              </p:par>
+                            </p:childTnLst>
+                          </p:cTn>
+                        </p:par>
+                      </p:childTnLst>
+                    </p:cTn>
+                  </p:par>
+                  <p:par>
+                    <p:cTn id="13" fill="hold">
+                      <p:stCondLst>
+                        <p:cond delay="indefinite"/>
+                      </p:stCondLst>
+                      <p:childTnLst>
+                        <p:par>
+                          <p:cTn id="14" fill="hold">
+                            <p:stCondLst>
+                              <p:cond delay="0"/>
+                            </p:stCondLst>
+                            <p:childTnLst>
+                              <p:par>
+                                <p:cTn id="15" presetID="2" presetClass="entr" presetSubtype="4" fill="hold" nodeType="clickEffect">
+                                  <p:stCondLst>
+                                    <p:cond delay="0"/>
+                                  </p:stCondLst>
+                                  <p:childTnLst>
+                                    <p:set>
+                                      <p:cBhvr>
+                                        <p:cTn id="16" dur="1" fill="hold">
+                                          <p:stCondLst>
+                                            <p:cond delay="0"/>
+                                          </p:stCondLst>
+                                        </p:cTn>
+                                        <p:tgtEl>
+                                          <p:spTgt spid="161">
+                                            <p:txEl>
+                                              <p:pRg st="2" end="2"/>
+                                            </p:txEl>
+                                          </p:spTgt>
+                                        </p:tgtEl>
+                                        <p:attrNameLst>
+                                          <p:attrName>style.visibility</p:attrName>
+                                        </p:attrNameLst>
+                                      </p:cBhvr>
+                                      <p:to>
+                                        <p:strVal val="visible"/>
+                                      </p:to>
+                                    </p:set>
+                                    <p:anim calcmode="lin" valueType="num">
+                                      <p:cBhvr additive="base">
+                                        <p:cTn id="17" dur="500" fill="hold"/>
+                                        <p:tgtEl>
+                                          <p:spTgt spid="161">
+                                            <p:txEl>
+                                              <p:pRg st="2" end="2"/>
+                                            </p:txEl>
+                                          </p:spTgt>
+                                        </p:tgtEl>
+                                        <p:attrNameLst>
+                                          <p:attrName>ppt_x</p:attrName>
+                                        </p:attrNameLst>
+                                      </p:cBhvr>
+                                      <p:tavLst>
+                                        <p:tav tm="0">
+                                          <p:val>
+                                            <p:strVal val="#ppt_x"/>
+                                          </p:val>
+                                        </p:tav>
+                                        <p:tav tm="100000">
+                                          <p:val>
+                                            <p:strVal val="#ppt_x"/>
+                                          </p:val>
+                                        </p:tav>
+                                      </p:tavLst>
+                                    </p:anim>
+                                    <p:anim calcmode="lin" valueType="num">
+                                      <p:cBhvr additive="base">
+                                        <p:cTn id="18" dur="500" fill="hold"/>
+                                        <p:tgtEl>
+                                          <p:spTgt spid="161">
+                                            <p:txEl>
+                                              <p:pRg st="2" end="2"/>
+                                            </p:txEl>
+                                          </p:spTgt>
+                                        </p:tgtEl>
+                                        <p:attrNameLst>
+                                          <p:attrName>ppt_y</p:attrName>
+                                        </p:attrNameLst>
+                                      </p:cBhvr>
+                                      <p:tavLst>
+                                        <p:tav tm="0">
+                                          <p:val>
+                                            <p:strVal val="1+#ppt_h/2"/>
+                                          </p:val>
+                                        </p:tav>
+                                        <p:tav tm="100000">
+                                          <p:val>
+                                            <p:strVal val="#ppt_y"/>
+                                          </p:val>
+                                        </p:tav>
+                                      </p:tavLst>
+                                    </p:anim>
+                                  </p:childTnLst>
+                                </p:cTn>
+                              </p:par>
+                              <p:par>
+                                <p:cTn id="19" presetID="2" presetClass="entr" presetSubtype="4" fill="hold" nodeType="withEffect">
+                                  <p:stCondLst>
+                                    <p:cond delay="0"/>
+                                  </p:stCondLst>
+                                  <p:childTnLst>
+                                    <p:set>
+                                      <p:cBhvr>
+                                        <p:cTn id="20" dur="1" fill="hold">
+                                          <p:stCondLst>
+                                            <p:cond delay="0"/>
+                                          </p:stCondLst>
+                                        </p:cTn>
+                                        <p:tgtEl>
+                                          <p:spTgt spid="161">
+                                            <p:txEl>
+                                              <p:pRg st="3" end="3"/>
+                                            </p:txEl>
+                                          </p:spTgt>
+                                        </p:tgtEl>
+                                        <p:attrNameLst>
+                                          <p:attrName>style.visibility</p:attrName>
+                                        </p:attrNameLst>
+                                      </p:cBhvr>
+                                      <p:to>
+                                        <p:strVal val="visible"/>
+                                      </p:to>
+                                    </p:set>
+                                    <p:anim calcmode="lin" valueType="num">
+                                      <p:cBhvr additive="base">
+                                        <p:cTn id="21" dur="500" fill="hold"/>
+                                        <p:tgtEl>
+                                          <p:spTgt spid="161">
+                                            <p:txEl>
+                                              <p:pRg st="3" end="3"/>
+                                            </p:txEl>
+                                          </p:spTgt>
+                                        </p:tgtEl>
+                                        <p:attrNameLst>
+                                          <p:attrName>ppt_x</p:attrName>
+                                        </p:attrNameLst>
+                                      </p:cBhvr>
+                                      <p:tavLst>
+                                        <p:tav tm="0">
+                                          <p:val>
+                                            <p:strVal val="#ppt_x"/>
+                                          </p:val>
+                                        </p:tav>
+                                        <p:tav tm="100000">
+                                          <p:val>
+                                            <p:strVal val="#ppt_x"/>
+                                          </p:val>
+                                        </p:tav>
+                                      </p:tavLst>
+                                    </p:anim>
+                                    <p:anim calcmode="lin" valueType="num">
+                                      <p:cBhvr additive="base">
+                                        <p:cTn id="22" dur="500" fill="hold"/>
+                                        <p:tgtEl>
+                                          <p:spTgt spid="161">
+                                            <p:txEl>
+                                              <p:pRg st="3" end="3"/>
+                                            </p:txEl>
+                                          </p:spTgt>
+                                        </p:tgtEl>
+                                        <p:attrNameLst>
+                                          <p:attrName>ppt_y</p:attrName>
+                                        </p:attrNameLst>
+                                      </p:cBhvr>
+                                      <p:tavLst>
+                                        <p:tav tm="0">
+                                          <p:val>
+                                            <p:strVal val="1+#ppt_h/2"/>
+                                          </p:val>
+                                        </p:tav>
+                                        <p:tav tm="100000">
+                                          <p:val>
+                                            <p:strVal val="#ppt_y"/>
+                                          </p:val>
+                                        </p:tav>
+                                      </p:tavLst>
+                                    </p:anim>
+                                  </p:childTnLst>
+                                </p:cTn>
+                              </p:par>
+                            </p:childTnLst>
+                          </p:cTn>
+                        </p:par>
+                      </p:childTnLst>
+                    </p:cTn>
+                  </p:par>
+                  <p:par>
+                    <p:cTn id="23" fill="hold">
+                      <p:stCondLst>
+                        <p:cond delay="indefinite"/>
+                      </p:stCondLst>
+                      <p:childTnLst>
+                        <p:par>
+                          <p:cTn id="24" fill="hold">
+                            <p:stCondLst>
+                              <p:cond delay="0"/>
+                            </p:stCondLst>
+                            <p:childTnLst>
+                              <p:par>
+                                <p:cTn id="25" presetID="2" presetClass="entr" presetSubtype="4" fill="hold" nodeType="clickEffect">
+                                  <p:stCondLst>
+                                    <p:cond delay="0"/>
+                                  </p:stCondLst>
+                                  <p:childTnLst>
+                                    <p:set>
+                                      <p:cBhvr>
+                                        <p:cTn id="26" dur="1" fill="hold">
+                                          <p:stCondLst>
+                                            <p:cond delay="0"/>
+                                          </p:stCondLst>
+                                        </p:cTn>
+                                        <p:tgtEl>
+                                          <p:spTgt spid="161">
+                                            <p:txEl>
+                                              <p:pRg st="4" end="4"/>
+                                            </p:txEl>
+                                          </p:spTgt>
+                                        </p:tgtEl>
+                                        <p:attrNameLst>
+                                          <p:attrName>style.visibility</p:attrName>
+                                        </p:attrNameLst>
+                                      </p:cBhvr>
+                                      <p:to>
+                                        <p:strVal val="visible"/>
+                                      </p:to>
+                                    </p:set>
+                                    <p:anim calcmode="lin" valueType="num">
+                                      <p:cBhvr additive="base">
+                                        <p:cTn id="27" dur="500" fill="hold"/>
+                                        <p:tgtEl>
+                                          <p:spTgt spid="161">
+                                            <p:txEl>
+                                              <p:pRg st="4" end="4"/>
+                                            </p:txEl>
+                                          </p:spTgt>
+                                        </p:tgtEl>
+                                        <p:attrNameLst>
+                                          <p:attrName>ppt_x</p:attrName>
+                                        </p:attrNameLst>
+                                      </p:cBhvr>
+                                      <p:tavLst>
+                                        <p:tav tm="0">
+                                          <p:val>
+                                            <p:strVal val="#ppt_x"/>
+                                          </p:val>
+                                        </p:tav>
+                                        <p:tav tm="100000">
+                                          <p:val>
+                                            <p:strVal val="#ppt_x"/>
+                                          </p:val>
+                                        </p:tav>
+                                      </p:tavLst>
+                                    </p:anim>
+                                    <p:anim calcmode="lin" valueType="num">
+                                      <p:cBhvr additive="base">
+                                        <p:cTn id="28" dur="500" fill="hold"/>
+                                        <p:tgtEl>
+                                          <p:spTgt spid="161">
+                                            <p:txEl>
+                                              <p:pRg st="4" end="4"/>
+                                            </p:txEl>
+                                          </p:spTgt>
+                                        </p:tgtEl>
+                                        <p:attrNameLst>
+                                          <p:attrName>ppt_y</p:attrName>
+                                        </p:attrNameLst>
+                                      </p:cBhvr>
+                                      <p:tavLst>
+                                        <p:tav tm="0">
+                                          <p:val>
+                                            <p:strVal val="1+#ppt_h/2"/>
+                                          </p:val>
+                                        </p:tav>
+                                        <p:tav tm="100000">
+                                          <p:val>
+                                            <p:strVal val="#ppt_y"/>
+                                          </p:val>
+                                        </p:tav>
+                                      </p:tavLst>
+                                    </p:anim>
+                                  </p:childTnLst>
+                                </p:cTn>
+                              </p:par>
+                              <p:par>
+                                <p:cTn id="29" presetID="2" presetClass="entr" presetSubtype="4" fill="hold" nodeType="withEffect">
+                                  <p:stCondLst>
+                                    <p:cond delay="0"/>
+                                  </p:stCondLst>
+                                  <p:childTnLst>
+                                    <p:set>
+                                      <p:cBhvr>
+                                        <p:cTn id="30" dur="1" fill="hold">
+                                          <p:stCondLst>
+                                            <p:cond delay="0"/>
+                                          </p:stCondLst>
+                                        </p:cTn>
+                                        <p:tgtEl>
+                                          <p:spTgt spid="161">
+                                            <p:txEl>
+                                              <p:pRg st="5" end="5"/>
+                                            </p:txEl>
+                                          </p:spTgt>
+                                        </p:tgtEl>
+                                        <p:attrNameLst>
+                                          <p:attrName>style.visibility</p:attrName>
+                                        </p:attrNameLst>
+                                      </p:cBhvr>
+                                      <p:to>
+                                        <p:strVal val="visible"/>
+                                      </p:to>
+                                    </p:set>
+                                    <p:anim calcmode="lin" valueType="num">
+                                      <p:cBhvr additive="base">
+                                        <p:cTn id="31" dur="500" fill="hold"/>
+                                        <p:tgtEl>
+                                          <p:spTgt spid="161">
+                                            <p:txEl>
+                                              <p:pRg st="5" end="5"/>
+                                            </p:txEl>
+                                          </p:spTgt>
+                                        </p:tgtEl>
+                                        <p:attrNameLst>
+                                          <p:attrName>ppt_x</p:attrName>
+                                        </p:attrNameLst>
+                                      </p:cBhvr>
+                                      <p:tavLst>
+                                        <p:tav tm="0">
+                                          <p:val>
+                                            <p:strVal val="#ppt_x"/>
+                                          </p:val>
+                                        </p:tav>
+                                        <p:tav tm="100000">
+                                          <p:val>
+                                            <p:strVal val="#ppt_x"/>
+                                          </p:val>
+                                        </p:tav>
+                                      </p:tavLst>
+                                    </p:anim>
+                                    <p:anim calcmode="lin" valueType="num">
+                                      <p:cBhvr additive="base">
+                                        <p:cTn id="32" dur="500" fill="hold"/>
+                                        <p:tgtEl>
+                                          <p:spTgt spid="161">
+                                            <p:txEl>
+                                              <p:pRg st="5" end="5"/>
+                                            </p:txEl>
+                                          </p:spTgt>
+                                        </p:tgtEl>
+                                        <p:attrNameLst>
+                                          <p:attrName>ppt_y</p:attrName>
+                                        </p:attrNameLst>
+                                      </p:cBhvr>
+                                      <p:tavLst>
+                                        <p:tav tm="0">
+                                          <p:val>
+                                            <p:strVal val="1+#ppt_h/2"/>
+                                          </p:val>
+                                        </p:tav>
+                                        <p:tav tm="100000">
+                                          <p:val>
+                                            <p:strVal val="#ppt_y"/>
+                                          </p:val>
+                                        </p:tav>
+                                      </p:tavLst>
+                                    </p:anim>
+                                  </p:childTnLst>
+                                </p:cTn>
+                              </p:par>
+                            </p:childTnLst>
+                          </p:cTn>
+                        </p:par>
+                      </p:childTnLst>
+                    </p:cTn>
+                  </p:par>
+                </p:childTnLst>
+              </p:cTn>
+              <p:prevCondLst>
+                <p:cond evt="onPrev" delay="0">
+                  <p:tgtEl>
+                    <p:sldTgt/>
+                  </p:tgtEl>
+                </p:cond>
+              </p:prevCondLst>
+              <p:nextCondLst>
+                <p:cond evt="onNext" delay="0">
+                  <p:tgtEl>
+                    <p:sldTgt/>
+                  </p:tgtEl>
+                </p:cond>
+              </p:nextCondLst>
+            </p:seq>
+          </p:childTnLst>
+        </p:cTn>
+      </p:par>
+    </p:tnLst>
+  </p:timing>
 </p:sld>
 </file>
 
@@ -5486,7 +6862,7 @@
           </a:prstGeom>
           <a:extLst>
             <a:ext uri="{C572A759-6A51-4108-AA02-DFA0A04FC94B}">
-              <ma14:wrappingTextBoxFlag xmlns:ma14="http://schemas.microsoft.com/office/mac/drawingml/2011/main" xmlns="" val="1"/>
+              <ma14:wrappingTextBoxFlag xmlns="" xmlns:ma14="http://schemas.microsoft.com/office/mac/drawingml/2011/main" val="1"/>
             </a:ext>
           </a:extLst>
         </p:spPr>
@@ -5518,6 +6894,448 @@
   <p:clrMapOvr>
     <a:masterClrMapping/>
   </p:clrMapOvr>
+  <p:timing>
+    <p:tnLst>
+      <p:par>
+        <p:cTn id="1" dur="indefinite" restart="never" nodeType="tmRoot">
+          <p:childTnLst>
+            <p:seq concurrent="1" nextAc="seek">
+              <p:cTn id="2" dur="indefinite" nodeType="mainSeq">
+                <p:childTnLst>
+                  <p:par>
+                    <p:cTn id="3" fill="hold">
+                      <p:stCondLst>
+                        <p:cond delay="indefinite"/>
+                      </p:stCondLst>
+                      <p:childTnLst>
+                        <p:par>
+                          <p:cTn id="4" fill="hold">
+                            <p:stCondLst>
+                              <p:cond delay="0"/>
+                            </p:stCondLst>
+                            <p:childTnLst>
+                              <p:par>
+                                <p:cTn id="5" presetID="2" presetClass="entr" presetSubtype="4" fill="hold" nodeType="clickEffect">
+                                  <p:stCondLst>
+                                    <p:cond delay="0"/>
+                                  </p:stCondLst>
+                                  <p:childTnLst>
+                                    <p:set>
+                                      <p:cBhvr>
+                                        <p:cTn id="6" dur="1" fill="hold">
+                                          <p:stCondLst>
+                                            <p:cond delay="0"/>
+                                          </p:stCondLst>
+                                        </p:cTn>
+                                        <p:tgtEl>
+                                          <p:spTgt spid="169">
+                                            <p:txEl>
+                                              <p:pRg st="0" end="0"/>
+                                            </p:txEl>
+                                          </p:spTgt>
+                                        </p:tgtEl>
+                                        <p:attrNameLst>
+                                          <p:attrName>style.visibility</p:attrName>
+                                        </p:attrNameLst>
+                                      </p:cBhvr>
+                                      <p:to>
+                                        <p:strVal val="visible"/>
+                                      </p:to>
+                                    </p:set>
+                                    <p:anim calcmode="lin" valueType="num">
+                                      <p:cBhvr additive="base">
+                                        <p:cTn id="7" dur="500" fill="hold"/>
+                                        <p:tgtEl>
+                                          <p:spTgt spid="169">
+                                            <p:txEl>
+                                              <p:pRg st="0" end="0"/>
+                                            </p:txEl>
+                                          </p:spTgt>
+                                        </p:tgtEl>
+                                        <p:attrNameLst>
+                                          <p:attrName>ppt_x</p:attrName>
+                                        </p:attrNameLst>
+                                      </p:cBhvr>
+                                      <p:tavLst>
+                                        <p:tav tm="0">
+                                          <p:val>
+                                            <p:strVal val="#ppt_x"/>
+                                          </p:val>
+                                        </p:tav>
+                                        <p:tav tm="100000">
+                                          <p:val>
+                                            <p:strVal val="#ppt_x"/>
+                                          </p:val>
+                                        </p:tav>
+                                      </p:tavLst>
+                                    </p:anim>
+                                    <p:anim calcmode="lin" valueType="num">
+                                      <p:cBhvr additive="base">
+                                        <p:cTn id="8" dur="500" fill="hold"/>
+                                        <p:tgtEl>
+                                          <p:spTgt spid="169">
+                                            <p:txEl>
+                                              <p:pRg st="0" end="0"/>
+                                            </p:txEl>
+                                          </p:spTgt>
+                                        </p:tgtEl>
+                                        <p:attrNameLst>
+                                          <p:attrName>ppt_y</p:attrName>
+                                        </p:attrNameLst>
+                                      </p:cBhvr>
+                                      <p:tavLst>
+                                        <p:tav tm="0">
+                                          <p:val>
+                                            <p:strVal val="1+#ppt_h/2"/>
+                                          </p:val>
+                                        </p:tav>
+                                        <p:tav tm="100000">
+                                          <p:val>
+                                            <p:strVal val="#ppt_y"/>
+                                          </p:val>
+                                        </p:tav>
+                                      </p:tavLst>
+                                    </p:anim>
+                                  </p:childTnLst>
+                                </p:cTn>
+                              </p:par>
+                            </p:childTnLst>
+                          </p:cTn>
+                        </p:par>
+                      </p:childTnLst>
+                    </p:cTn>
+                  </p:par>
+                  <p:par>
+                    <p:cTn id="9" fill="hold">
+                      <p:stCondLst>
+                        <p:cond delay="indefinite"/>
+                      </p:stCondLst>
+                      <p:childTnLst>
+                        <p:par>
+                          <p:cTn id="10" fill="hold">
+                            <p:stCondLst>
+                              <p:cond delay="0"/>
+                            </p:stCondLst>
+                            <p:childTnLst>
+                              <p:par>
+                                <p:cTn id="11" presetID="2" presetClass="entr" presetSubtype="4" fill="hold" nodeType="clickEffect">
+                                  <p:stCondLst>
+                                    <p:cond delay="0"/>
+                                  </p:stCondLst>
+                                  <p:childTnLst>
+                                    <p:set>
+                                      <p:cBhvr>
+                                        <p:cTn id="12" dur="1" fill="hold">
+                                          <p:stCondLst>
+                                            <p:cond delay="0"/>
+                                          </p:stCondLst>
+                                        </p:cTn>
+                                        <p:tgtEl>
+                                          <p:spTgt spid="169">
+                                            <p:txEl>
+                                              <p:pRg st="2" end="2"/>
+                                            </p:txEl>
+                                          </p:spTgt>
+                                        </p:tgtEl>
+                                        <p:attrNameLst>
+                                          <p:attrName>style.visibility</p:attrName>
+                                        </p:attrNameLst>
+                                      </p:cBhvr>
+                                      <p:to>
+                                        <p:strVal val="visible"/>
+                                      </p:to>
+                                    </p:set>
+                                    <p:anim calcmode="lin" valueType="num">
+                                      <p:cBhvr additive="base">
+                                        <p:cTn id="13" dur="500" fill="hold"/>
+                                        <p:tgtEl>
+                                          <p:spTgt spid="169">
+                                            <p:txEl>
+                                              <p:pRg st="2" end="2"/>
+                                            </p:txEl>
+                                          </p:spTgt>
+                                        </p:tgtEl>
+                                        <p:attrNameLst>
+                                          <p:attrName>ppt_x</p:attrName>
+                                        </p:attrNameLst>
+                                      </p:cBhvr>
+                                      <p:tavLst>
+                                        <p:tav tm="0">
+                                          <p:val>
+                                            <p:strVal val="#ppt_x"/>
+                                          </p:val>
+                                        </p:tav>
+                                        <p:tav tm="100000">
+                                          <p:val>
+                                            <p:strVal val="#ppt_x"/>
+                                          </p:val>
+                                        </p:tav>
+                                      </p:tavLst>
+                                    </p:anim>
+                                    <p:anim calcmode="lin" valueType="num">
+                                      <p:cBhvr additive="base">
+                                        <p:cTn id="14" dur="500" fill="hold"/>
+                                        <p:tgtEl>
+                                          <p:spTgt spid="169">
+                                            <p:txEl>
+                                              <p:pRg st="2" end="2"/>
+                                            </p:txEl>
+                                          </p:spTgt>
+                                        </p:tgtEl>
+                                        <p:attrNameLst>
+                                          <p:attrName>ppt_y</p:attrName>
+                                        </p:attrNameLst>
+                                      </p:cBhvr>
+                                      <p:tavLst>
+                                        <p:tav tm="0">
+                                          <p:val>
+                                            <p:strVal val="1+#ppt_h/2"/>
+                                          </p:val>
+                                        </p:tav>
+                                        <p:tav tm="100000">
+                                          <p:val>
+                                            <p:strVal val="#ppt_y"/>
+                                          </p:val>
+                                        </p:tav>
+                                      </p:tavLst>
+                                    </p:anim>
+                                  </p:childTnLst>
+                                </p:cTn>
+                              </p:par>
+                            </p:childTnLst>
+                          </p:cTn>
+                        </p:par>
+                      </p:childTnLst>
+                    </p:cTn>
+                  </p:par>
+                  <p:par>
+                    <p:cTn id="15" fill="hold">
+                      <p:stCondLst>
+                        <p:cond delay="indefinite"/>
+                      </p:stCondLst>
+                      <p:childTnLst>
+                        <p:par>
+                          <p:cTn id="16" fill="hold">
+                            <p:stCondLst>
+                              <p:cond delay="0"/>
+                            </p:stCondLst>
+                            <p:childTnLst>
+                              <p:par>
+                                <p:cTn id="17" presetID="2" presetClass="entr" presetSubtype="4" fill="hold" nodeType="clickEffect">
+                                  <p:stCondLst>
+                                    <p:cond delay="0"/>
+                                  </p:stCondLst>
+                                  <p:childTnLst>
+                                    <p:set>
+                                      <p:cBhvr>
+                                        <p:cTn id="18" dur="1" fill="hold">
+                                          <p:stCondLst>
+                                            <p:cond delay="0"/>
+                                          </p:stCondLst>
+                                        </p:cTn>
+                                        <p:tgtEl>
+                                          <p:spTgt spid="169">
+                                            <p:txEl>
+                                              <p:pRg st="4" end="4"/>
+                                            </p:txEl>
+                                          </p:spTgt>
+                                        </p:tgtEl>
+                                        <p:attrNameLst>
+                                          <p:attrName>style.visibility</p:attrName>
+                                        </p:attrNameLst>
+                                      </p:cBhvr>
+                                      <p:to>
+                                        <p:strVal val="visible"/>
+                                      </p:to>
+                                    </p:set>
+                                    <p:anim calcmode="lin" valueType="num">
+                                      <p:cBhvr additive="base">
+                                        <p:cTn id="19" dur="500" fill="hold"/>
+                                        <p:tgtEl>
+                                          <p:spTgt spid="169">
+                                            <p:txEl>
+                                              <p:pRg st="4" end="4"/>
+                                            </p:txEl>
+                                          </p:spTgt>
+                                        </p:tgtEl>
+                                        <p:attrNameLst>
+                                          <p:attrName>ppt_x</p:attrName>
+                                        </p:attrNameLst>
+                                      </p:cBhvr>
+                                      <p:tavLst>
+                                        <p:tav tm="0">
+                                          <p:val>
+                                            <p:strVal val="#ppt_x"/>
+                                          </p:val>
+                                        </p:tav>
+                                        <p:tav tm="100000">
+                                          <p:val>
+                                            <p:strVal val="#ppt_x"/>
+                                          </p:val>
+                                        </p:tav>
+                                      </p:tavLst>
+                                    </p:anim>
+                                    <p:anim calcmode="lin" valueType="num">
+                                      <p:cBhvr additive="base">
+                                        <p:cTn id="20" dur="500" fill="hold"/>
+                                        <p:tgtEl>
+                                          <p:spTgt spid="169">
+                                            <p:txEl>
+                                              <p:pRg st="4" end="4"/>
+                                            </p:txEl>
+                                          </p:spTgt>
+                                        </p:tgtEl>
+                                        <p:attrNameLst>
+                                          <p:attrName>ppt_y</p:attrName>
+                                        </p:attrNameLst>
+                                      </p:cBhvr>
+                                      <p:tavLst>
+                                        <p:tav tm="0">
+                                          <p:val>
+                                            <p:strVal val="1+#ppt_h/2"/>
+                                          </p:val>
+                                        </p:tav>
+                                        <p:tav tm="100000">
+                                          <p:val>
+                                            <p:strVal val="#ppt_y"/>
+                                          </p:val>
+                                        </p:tav>
+                                      </p:tavLst>
+                                    </p:anim>
+                                  </p:childTnLst>
+                                </p:cTn>
+                              </p:par>
+                            </p:childTnLst>
+                          </p:cTn>
+                        </p:par>
+                      </p:childTnLst>
+                    </p:cTn>
+                  </p:par>
+                  <p:par>
+                    <p:cTn id="21" fill="hold">
+                      <p:stCondLst>
+                        <p:cond delay="indefinite"/>
+                      </p:stCondLst>
+                      <p:childTnLst>
+                        <p:par>
+                          <p:cTn id="22" fill="hold">
+                            <p:stCondLst>
+                              <p:cond delay="0"/>
+                            </p:stCondLst>
+                            <p:childTnLst>
+                              <p:par>
+                                <p:cTn id="23" presetID="2" presetClass="entr" presetSubtype="4" fill="hold" nodeType="clickEffect">
+                                  <p:stCondLst>
+                                    <p:cond delay="0"/>
+                                  </p:stCondLst>
+                                  <p:childTnLst>
+                                    <p:set>
+                                      <p:cBhvr>
+                                        <p:cTn id="24" dur="1" fill="hold">
+                                          <p:stCondLst>
+                                            <p:cond delay="0"/>
+                                          </p:stCondLst>
+                                        </p:cTn>
+                                        <p:tgtEl>
+                                          <p:spTgt spid="169">
+                                            <p:txEl>
+                                              <p:pRg st="6" end="6"/>
+                                            </p:txEl>
+                                          </p:spTgt>
+                                        </p:tgtEl>
+                                        <p:attrNameLst>
+                                          <p:attrName>style.visibility</p:attrName>
+                                        </p:attrNameLst>
+                                      </p:cBhvr>
+                                      <p:to>
+                                        <p:strVal val="visible"/>
+                                      </p:to>
+                                    </p:set>
+                                    <p:anim calcmode="lin" valueType="num">
+                                      <p:cBhvr additive="base">
+                                        <p:cTn id="25" dur="500" fill="hold"/>
+                                        <p:tgtEl>
+                                          <p:spTgt spid="169">
+                                            <p:txEl>
+                                              <p:pRg st="6" end="6"/>
+                                            </p:txEl>
+                                          </p:spTgt>
+                                        </p:tgtEl>
+                                        <p:attrNameLst>
+                                          <p:attrName>ppt_x</p:attrName>
+                                        </p:attrNameLst>
+                                      </p:cBhvr>
+                                      <p:tavLst>
+                                        <p:tav tm="0">
+                                          <p:val>
+                                            <p:strVal val="#ppt_x"/>
+                                          </p:val>
+                                        </p:tav>
+                                        <p:tav tm="100000">
+                                          <p:val>
+                                            <p:strVal val="#ppt_x"/>
+                                          </p:val>
+                                        </p:tav>
+                                      </p:tavLst>
+                                    </p:anim>
+                                    <p:anim calcmode="lin" valueType="num">
+                                      <p:cBhvr additive="base">
+                                        <p:cTn id="26" dur="500" fill="hold"/>
+                                        <p:tgtEl>
+                                          <p:spTgt spid="169">
+                                            <p:txEl>
+                                              <p:pRg st="6" end="6"/>
+                                            </p:txEl>
+                                          </p:spTgt>
+                                        </p:tgtEl>
+                                        <p:attrNameLst>
+                                          <p:attrName>ppt_y</p:attrName>
+                                        </p:attrNameLst>
+                                      </p:cBhvr>
+                                      <p:tavLst>
+                                        <p:tav tm="0">
+                                          <p:val>
+                                            <p:strVal val="1+#ppt_h/2"/>
+                                          </p:val>
+                                        </p:tav>
+                                        <p:tav tm="100000">
+                                          <p:val>
+                                            <p:strVal val="#ppt_y"/>
+                                          </p:val>
+                                        </p:tav>
+                                      </p:tavLst>
+                                    </p:anim>
+                                  </p:childTnLst>
+                                </p:cTn>
+                              </p:par>
+                            </p:childTnLst>
+                          </p:cTn>
+                        </p:par>
+                      </p:childTnLst>
+                    </p:cTn>
+                  </p:par>
+                </p:childTnLst>
+              </p:cTn>
+              <p:prevCondLst>
+                <p:cond evt="onPrev" delay="0">
+                  <p:tgtEl>
+                    <p:sldTgt/>
+                  </p:tgtEl>
+                </p:cond>
+              </p:prevCondLst>
+              <p:nextCondLst>
+                <p:cond evt="onNext" delay="0">
+                  <p:tgtEl>
+                    <p:sldTgt/>
+                  </p:tgtEl>
+                </p:cond>
+              </p:nextCondLst>
+            </p:seq>
+          </p:childTnLst>
+        </p:cTn>
+      </p:par>
+    </p:tnLst>
+  </p:timing>
 </p:sld>
 </file>
 
@@ -5691,6 +7509,92 @@
   <p:clrMapOvr>
     <a:masterClrMapping/>
   </p:clrMapOvr>
+  <p:timing>
+    <p:tnLst>
+      <p:par>
+        <p:cTn id="1" dur="indefinite" restart="never" nodeType="tmRoot">
+          <p:childTnLst>
+            <p:seq concurrent="1" nextAc="seek">
+              <p:cTn id="2" dur="indefinite" nodeType="mainSeq">
+                <p:childTnLst>
+                  <p:par>
+                    <p:cTn id="3" fill="hold">
+                      <p:stCondLst>
+                        <p:cond delay="indefinite"/>
+                      </p:stCondLst>
+                      <p:childTnLst>
+                        <p:par>
+                          <p:cTn id="4" fill="hold">
+                            <p:stCondLst>
+                              <p:cond delay="0"/>
+                            </p:stCondLst>
+                            <p:childTnLst>
+                              <p:par>
+                                <p:cTn id="5" presetID="9" presetClass="entr" presetSubtype="0" fill="hold" grpId="0" nodeType="clickEffect">
+                                  <p:stCondLst>
+                                    <p:cond delay="0"/>
+                                  </p:stCondLst>
+                                  <p:childTnLst>
+                                    <p:set>
+                                      <p:cBhvr>
+                                        <p:cTn id="6" dur="1" fill="hold">
+                                          <p:stCondLst>
+                                            <p:cond delay="0"/>
+                                          </p:stCondLst>
+                                        </p:cTn>
+                                        <p:tgtEl>
+                                          <p:spTgt spid="4"/>
+                                        </p:tgtEl>
+                                        <p:attrNameLst>
+                                          <p:attrName>style.visibility</p:attrName>
+                                        </p:attrNameLst>
+                                      </p:cBhvr>
+                                      <p:to>
+                                        <p:strVal val="visible"/>
+                                      </p:to>
+                                    </p:set>
+                                    <p:animEffect transition="in" filter="dissolve">
+                                      <p:cBhvr>
+                                        <p:cTn id="7" dur="500"/>
+                                        <p:tgtEl>
+                                          <p:spTgt spid="4"/>
+                                        </p:tgtEl>
+                                      </p:cBhvr>
+                                    </p:animEffect>
+                                  </p:childTnLst>
+                                </p:cTn>
+                              </p:par>
+                            </p:childTnLst>
+                          </p:cTn>
+                        </p:par>
+                      </p:childTnLst>
+                    </p:cTn>
+                  </p:par>
+                </p:childTnLst>
+              </p:cTn>
+              <p:prevCondLst>
+                <p:cond evt="onPrev" delay="0">
+                  <p:tgtEl>
+                    <p:sldTgt/>
+                  </p:tgtEl>
+                </p:cond>
+              </p:prevCondLst>
+              <p:nextCondLst>
+                <p:cond evt="onNext" delay="0">
+                  <p:tgtEl>
+                    <p:sldTgt/>
+                  </p:tgtEl>
+                </p:cond>
+              </p:nextCondLst>
+            </p:seq>
+          </p:childTnLst>
+        </p:cTn>
+      </p:par>
+    </p:tnLst>
+    <p:bldLst>
+      <p:bldP spid="4" grpId="0" animBg="1"/>
+    </p:bldLst>
+  </p:timing>
 </p:sld>
 </file>
 
@@ -5816,6 +7720,242 @@
   <p:clrMapOvr>
     <a:masterClrMapping/>
   </p:clrMapOvr>
+  <p:timing>
+    <p:tnLst>
+      <p:par>
+        <p:cTn id="1" dur="indefinite" restart="never" nodeType="tmRoot">
+          <p:childTnLst>
+            <p:seq concurrent="1" nextAc="seek">
+              <p:cTn id="2" dur="indefinite" nodeType="mainSeq">
+                <p:childTnLst>
+                  <p:par>
+                    <p:cTn id="3" fill="hold">
+                      <p:stCondLst>
+                        <p:cond delay="indefinite"/>
+                      </p:stCondLst>
+                      <p:childTnLst>
+                        <p:par>
+                          <p:cTn id="4" fill="hold">
+                            <p:stCondLst>
+                              <p:cond delay="0"/>
+                            </p:stCondLst>
+                            <p:childTnLst>
+                              <p:par>
+                                <p:cTn id="5" presetID="2" presetClass="entr" presetSubtype="4" fill="hold" nodeType="clickEffect">
+                                  <p:stCondLst>
+                                    <p:cond delay="0"/>
+                                  </p:stCondLst>
+                                  <p:childTnLst>
+                                    <p:set>
+                                      <p:cBhvr>
+                                        <p:cTn id="6" dur="1" fill="hold">
+                                          <p:stCondLst>
+                                            <p:cond delay="0"/>
+                                          </p:stCondLst>
+                                        </p:cTn>
+                                        <p:tgtEl>
+                                          <p:spTgt spid="3">
+                                            <p:txEl>
+                                              <p:pRg st="0" end="0"/>
+                                            </p:txEl>
+                                          </p:spTgt>
+                                        </p:tgtEl>
+                                        <p:attrNameLst>
+                                          <p:attrName>style.visibility</p:attrName>
+                                        </p:attrNameLst>
+                                      </p:cBhvr>
+                                      <p:to>
+                                        <p:strVal val="visible"/>
+                                      </p:to>
+                                    </p:set>
+                                    <p:anim calcmode="lin" valueType="num">
+                                      <p:cBhvr additive="base">
+                                        <p:cTn id="7" dur="500" fill="hold"/>
+                                        <p:tgtEl>
+                                          <p:spTgt spid="3">
+                                            <p:txEl>
+                                              <p:pRg st="0" end="0"/>
+                                            </p:txEl>
+                                          </p:spTgt>
+                                        </p:tgtEl>
+                                        <p:attrNameLst>
+                                          <p:attrName>ppt_x</p:attrName>
+                                        </p:attrNameLst>
+                                      </p:cBhvr>
+                                      <p:tavLst>
+                                        <p:tav tm="0">
+                                          <p:val>
+                                            <p:strVal val="#ppt_x"/>
+                                          </p:val>
+                                        </p:tav>
+                                        <p:tav tm="100000">
+                                          <p:val>
+                                            <p:strVal val="#ppt_x"/>
+                                          </p:val>
+                                        </p:tav>
+                                      </p:tavLst>
+                                    </p:anim>
+                                    <p:anim calcmode="lin" valueType="num">
+                                      <p:cBhvr additive="base">
+                                        <p:cTn id="8" dur="500" fill="hold"/>
+                                        <p:tgtEl>
+                                          <p:spTgt spid="3">
+                                            <p:txEl>
+                                              <p:pRg st="0" end="0"/>
+                                            </p:txEl>
+                                          </p:spTgt>
+                                        </p:tgtEl>
+                                        <p:attrNameLst>
+                                          <p:attrName>ppt_y</p:attrName>
+                                        </p:attrNameLst>
+                                      </p:cBhvr>
+                                      <p:tavLst>
+                                        <p:tav tm="0">
+                                          <p:val>
+                                            <p:strVal val="1+#ppt_h/2"/>
+                                          </p:val>
+                                        </p:tav>
+                                        <p:tav tm="100000">
+                                          <p:val>
+                                            <p:strVal val="#ppt_y"/>
+                                          </p:val>
+                                        </p:tav>
+                                      </p:tavLst>
+                                    </p:anim>
+                                  </p:childTnLst>
+                                </p:cTn>
+                              </p:par>
+                            </p:childTnLst>
+                          </p:cTn>
+                        </p:par>
+                      </p:childTnLst>
+                    </p:cTn>
+                  </p:par>
+                  <p:par>
+                    <p:cTn id="9" fill="hold">
+                      <p:stCondLst>
+                        <p:cond delay="indefinite"/>
+                      </p:stCondLst>
+                      <p:childTnLst>
+                        <p:par>
+                          <p:cTn id="10" fill="hold">
+                            <p:stCondLst>
+                              <p:cond delay="0"/>
+                            </p:stCondLst>
+                            <p:childTnLst>
+                              <p:par>
+                                <p:cTn id="11" presetID="2" presetClass="entr" presetSubtype="4" fill="hold" nodeType="clickEffect">
+                                  <p:stCondLst>
+                                    <p:cond delay="0"/>
+                                  </p:stCondLst>
+                                  <p:childTnLst>
+                                    <p:set>
+                                      <p:cBhvr>
+                                        <p:cTn id="12" dur="1" fill="hold">
+                                          <p:stCondLst>
+                                            <p:cond delay="0"/>
+                                          </p:stCondLst>
+                                        </p:cTn>
+                                        <p:tgtEl>
+                                          <p:spTgt spid="3">
+                                            <p:txEl>
+                                              <p:pRg st="2" end="2"/>
+                                            </p:txEl>
+                                          </p:spTgt>
+                                        </p:tgtEl>
+                                        <p:attrNameLst>
+                                          <p:attrName>style.visibility</p:attrName>
+                                        </p:attrNameLst>
+                                      </p:cBhvr>
+                                      <p:to>
+                                        <p:strVal val="visible"/>
+                                      </p:to>
+                                    </p:set>
+                                    <p:anim calcmode="lin" valueType="num">
+                                      <p:cBhvr additive="base">
+                                        <p:cTn id="13" dur="500" fill="hold"/>
+                                        <p:tgtEl>
+                                          <p:spTgt spid="3">
+                                            <p:txEl>
+                                              <p:pRg st="2" end="2"/>
+                                            </p:txEl>
+                                          </p:spTgt>
+                                        </p:tgtEl>
+                                        <p:attrNameLst>
+                                          <p:attrName>ppt_x</p:attrName>
+                                        </p:attrNameLst>
+                                      </p:cBhvr>
+                                      <p:tavLst>
+                                        <p:tav tm="0">
+                                          <p:val>
+                                            <p:strVal val="#ppt_x"/>
+                                          </p:val>
+                                        </p:tav>
+                                        <p:tav tm="100000">
+                                          <p:val>
+                                            <p:strVal val="#ppt_x"/>
+                                          </p:val>
+                                        </p:tav>
+                                      </p:tavLst>
+                                    </p:anim>
+                                    <p:anim calcmode="lin" valueType="num">
+                                      <p:cBhvr additive="base">
+                                        <p:cTn id="14" dur="500" fill="hold"/>
+                                        <p:tgtEl>
+                                          <p:spTgt spid="3">
+                                            <p:txEl>
+                                              <p:pRg st="2" end="2"/>
+                                            </p:txEl>
+                                          </p:spTgt>
+                                        </p:tgtEl>
+                                        <p:attrNameLst>
+                                          <p:attrName>ppt_y</p:attrName>
+                                        </p:attrNameLst>
+                                      </p:cBhvr>
+                                      <p:tavLst>
+                                        <p:tav tm="0">
+                                          <p:val>
+                                            <p:strVal val="1+#ppt_h/2"/>
+                                          </p:val>
+                                        </p:tav>
+                                        <p:tav tm="100000">
+                                          <p:val>
+                                            <p:strVal val="#ppt_y"/>
+                                          </p:val>
+                                        </p:tav>
+                                      </p:tavLst>
+                                    </p:anim>
+                                  </p:childTnLst>
+                                </p:cTn>
+                              </p:par>
+                            </p:childTnLst>
+                          </p:cTn>
+                        </p:par>
+                      </p:childTnLst>
+                    </p:cTn>
+                  </p:par>
+                </p:childTnLst>
+              </p:cTn>
+              <p:prevCondLst>
+                <p:cond evt="onPrev" delay="0">
+                  <p:tgtEl>
+                    <p:sldTgt/>
+                  </p:tgtEl>
+                </p:cond>
+              </p:prevCondLst>
+              <p:nextCondLst>
+                <p:cond evt="onNext" delay="0">
+                  <p:tgtEl>
+                    <p:sldTgt/>
+                  </p:tgtEl>
+                </p:cond>
+              </p:nextCondLst>
+            </p:seq>
+          </p:childTnLst>
+        </p:cTn>
+      </p:par>
+    </p:tnLst>
+  </p:timing>
 </p:sld>
 </file>
 
@@ -5978,6 +8118,654 @@
   <p:clrMapOvr>
     <a:masterClrMapping/>
   </p:clrMapOvr>
+  <p:timing>
+    <p:tnLst>
+      <p:par>
+        <p:cTn id="1" dur="indefinite" restart="never" nodeType="tmRoot">
+          <p:childTnLst>
+            <p:seq concurrent="1" nextAc="seek">
+              <p:cTn id="2" dur="indefinite" nodeType="mainSeq">
+                <p:childTnLst>
+                  <p:par>
+                    <p:cTn id="3" fill="hold">
+                      <p:stCondLst>
+                        <p:cond delay="indefinite"/>
+                      </p:stCondLst>
+                      <p:childTnLst>
+                        <p:par>
+                          <p:cTn id="4" fill="hold">
+                            <p:stCondLst>
+                              <p:cond delay="0"/>
+                            </p:stCondLst>
+                            <p:childTnLst>
+                              <p:par>
+                                <p:cTn id="5" presetID="2" presetClass="entr" presetSubtype="4" fill="hold" nodeType="clickEffect">
+                                  <p:stCondLst>
+                                    <p:cond delay="0"/>
+                                  </p:stCondLst>
+                                  <p:childTnLst>
+                                    <p:set>
+                                      <p:cBhvr>
+                                        <p:cTn id="6" dur="1" fill="hold">
+                                          <p:stCondLst>
+                                            <p:cond delay="0"/>
+                                          </p:stCondLst>
+                                        </p:cTn>
+                                        <p:tgtEl>
+                                          <p:spTgt spid="3">
+                                            <p:txEl>
+                                              <p:pRg st="0" end="0"/>
+                                            </p:txEl>
+                                          </p:spTgt>
+                                        </p:tgtEl>
+                                        <p:attrNameLst>
+                                          <p:attrName>style.visibility</p:attrName>
+                                        </p:attrNameLst>
+                                      </p:cBhvr>
+                                      <p:to>
+                                        <p:strVal val="visible"/>
+                                      </p:to>
+                                    </p:set>
+                                    <p:anim calcmode="lin" valueType="num">
+                                      <p:cBhvr additive="base">
+                                        <p:cTn id="7" dur="500" fill="hold"/>
+                                        <p:tgtEl>
+                                          <p:spTgt spid="3">
+                                            <p:txEl>
+                                              <p:pRg st="0" end="0"/>
+                                            </p:txEl>
+                                          </p:spTgt>
+                                        </p:tgtEl>
+                                        <p:attrNameLst>
+                                          <p:attrName>ppt_x</p:attrName>
+                                        </p:attrNameLst>
+                                      </p:cBhvr>
+                                      <p:tavLst>
+                                        <p:tav tm="0">
+                                          <p:val>
+                                            <p:strVal val="#ppt_x"/>
+                                          </p:val>
+                                        </p:tav>
+                                        <p:tav tm="100000">
+                                          <p:val>
+                                            <p:strVal val="#ppt_x"/>
+                                          </p:val>
+                                        </p:tav>
+                                      </p:tavLst>
+                                    </p:anim>
+                                    <p:anim calcmode="lin" valueType="num">
+                                      <p:cBhvr additive="base">
+                                        <p:cTn id="8" dur="500" fill="hold"/>
+                                        <p:tgtEl>
+                                          <p:spTgt spid="3">
+                                            <p:txEl>
+                                              <p:pRg st="0" end="0"/>
+                                            </p:txEl>
+                                          </p:spTgt>
+                                        </p:tgtEl>
+                                        <p:attrNameLst>
+                                          <p:attrName>ppt_y</p:attrName>
+                                        </p:attrNameLst>
+                                      </p:cBhvr>
+                                      <p:tavLst>
+                                        <p:tav tm="0">
+                                          <p:val>
+                                            <p:strVal val="1+#ppt_h/2"/>
+                                          </p:val>
+                                        </p:tav>
+                                        <p:tav tm="100000">
+                                          <p:val>
+                                            <p:strVal val="#ppt_y"/>
+                                          </p:val>
+                                        </p:tav>
+                                      </p:tavLst>
+                                    </p:anim>
+                                  </p:childTnLst>
+                                </p:cTn>
+                              </p:par>
+                            </p:childTnLst>
+                          </p:cTn>
+                        </p:par>
+                      </p:childTnLst>
+                    </p:cTn>
+                  </p:par>
+                  <p:par>
+                    <p:cTn id="9" fill="hold">
+                      <p:stCondLst>
+                        <p:cond delay="indefinite"/>
+                      </p:stCondLst>
+                      <p:childTnLst>
+                        <p:par>
+                          <p:cTn id="10" fill="hold">
+                            <p:stCondLst>
+                              <p:cond delay="0"/>
+                            </p:stCondLst>
+                            <p:childTnLst>
+                              <p:par>
+                                <p:cTn id="11" presetID="2" presetClass="entr" presetSubtype="4" fill="hold" nodeType="clickEffect">
+                                  <p:stCondLst>
+                                    <p:cond delay="0"/>
+                                  </p:stCondLst>
+                                  <p:childTnLst>
+                                    <p:set>
+                                      <p:cBhvr>
+                                        <p:cTn id="12" dur="1" fill="hold">
+                                          <p:stCondLst>
+                                            <p:cond delay="0"/>
+                                          </p:stCondLst>
+                                        </p:cTn>
+                                        <p:tgtEl>
+                                          <p:spTgt spid="3">
+                                            <p:txEl>
+                                              <p:pRg st="1" end="1"/>
+                                            </p:txEl>
+                                          </p:spTgt>
+                                        </p:tgtEl>
+                                        <p:attrNameLst>
+                                          <p:attrName>style.visibility</p:attrName>
+                                        </p:attrNameLst>
+                                      </p:cBhvr>
+                                      <p:to>
+                                        <p:strVal val="visible"/>
+                                      </p:to>
+                                    </p:set>
+                                    <p:anim calcmode="lin" valueType="num">
+                                      <p:cBhvr additive="base">
+                                        <p:cTn id="13" dur="500" fill="hold"/>
+                                        <p:tgtEl>
+                                          <p:spTgt spid="3">
+                                            <p:txEl>
+                                              <p:pRg st="1" end="1"/>
+                                            </p:txEl>
+                                          </p:spTgt>
+                                        </p:tgtEl>
+                                        <p:attrNameLst>
+                                          <p:attrName>ppt_x</p:attrName>
+                                        </p:attrNameLst>
+                                      </p:cBhvr>
+                                      <p:tavLst>
+                                        <p:tav tm="0">
+                                          <p:val>
+                                            <p:strVal val="#ppt_x"/>
+                                          </p:val>
+                                        </p:tav>
+                                        <p:tav tm="100000">
+                                          <p:val>
+                                            <p:strVal val="#ppt_x"/>
+                                          </p:val>
+                                        </p:tav>
+                                      </p:tavLst>
+                                    </p:anim>
+                                    <p:anim calcmode="lin" valueType="num">
+                                      <p:cBhvr additive="base">
+                                        <p:cTn id="14" dur="500" fill="hold"/>
+                                        <p:tgtEl>
+                                          <p:spTgt spid="3">
+                                            <p:txEl>
+                                              <p:pRg st="1" end="1"/>
+                                            </p:txEl>
+                                          </p:spTgt>
+                                        </p:tgtEl>
+                                        <p:attrNameLst>
+                                          <p:attrName>ppt_y</p:attrName>
+                                        </p:attrNameLst>
+                                      </p:cBhvr>
+                                      <p:tavLst>
+                                        <p:tav tm="0">
+                                          <p:val>
+                                            <p:strVal val="1+#ppt_h/2"/>
+                                          </p:val>
+                                        </p:tav>
+                                        <p:tav tm="100000">
+                                          <p:val>
+                                            <p:strVal val="#ppt_y"/>
+                                          </p:val>
+                                        </p:tav>
+                                      </p:tavLst>
+                                    </p:anim>
+                                  </p:childTnLst>
+                                </p:cTn>
+                              </p:par>
+                            </p:childTnLst>
+                          </p:cTn>
+                        </p:par>
+                      </p:childTnLst>
+                    </p:cTn>
+                  </p:par>
+                  <p:par>
+                    <p:cTn id="15" fill="hold">
+                      <p:stCondLst>
+                        <p:cond delay="indefinite"/>
+                      </p:stCondLst>
+                      <p:childTnLst>
+                        <p:par>
+                          <p:cTn id="16" fill="hold">
+                            <p:stCondLst>
+                              <p:cond delay="0"/>
+                            </p:stCondLst>
+                            <p:childTnLst>
+                              <p:par>
+                                <p:cTn id="17" presetID="2" presetClass="entr" presetSubtype="4" fill="hold" nodeType="clickEffect">
+                                  <p:stCondLst>
+                                    <p:cond delay="0"/>
+                                  </p:stCondLst>
+                                  <p:childTnLst>
+                                    <p:set>
+                                      <p:cBhvr>
+                                        <p:cTn id="18" dur="1" fill="hold">
+                                          <p:stCondLst>
+                                            <p:cond delay="0"/>
+                                          </p:stCondLst>
+                                        </p:cTn>
+                                        <p:tgtEl>
+                                          <p:spTgt spid="3">
+                                            <p:txEl>
+                                              <p:pRg st="2" end="2"/>
+                                            </p:txEl>
+                                          </p:spTgt>
+                                        </p:tgtEl>
+                                        <p:attrNameLst>
+                                          <p:attrName>style.visibility</p:attrName>
+                                        </p:attrNameLst>
+                                      </p:cBhvr>
+                                      <p:to>
+                                        <p:strVal val="visible"/>
+                                      </p:to>
+                                    </p:set>
+                                    <p:anim calcmode="lin" valueType="num">
+                                      <p:cBhvr additive="base">
+                                        <p:cTn id="19" dur="500" fill="hold"/>
+                                        <p:tgtEl>
+                                          <p:spTgt spid="3">
+                                            <p:txEl>
+                                              <p:pRg st="2" end="2"/>
+                                            </p:txEl>
+                                          </p:spTgt>
+                                        </p:tgtEl>
+                                        <p:attrNameLst>
+                                          <p:attrName>ppt_x</p:attrName>
+                                        </p:attrNameLst>
+                                      </p:cBhvr>
+                                      <p:tavLst>
+                                        <p:tav tm="0">
+                                          <p:val>
+                                            <p:strVal val="#ppt_x"/>
+                                          </p:val>
+                                        </p:tav>
+                                        <p:tav tm="100000">
+                                          <p:val>
+                                            <p:strVal val="#ppt_x"/>
+                                          </p:val>
+                                        </p:tav>
+                                      </p:tavLst>
+                                    </p:anim>
+                                    <p:anim calcmode="lin" valueType="num">
+                                      <p:cBhvr additive="base">
+                                        <p:cTn id="20" dur="500" fill="hold"/>
+                                        <p:tgtEl>
+                                          <p:spTgt spid="3">
+                                            <p:txEl>
+                                              <p:pRg st="2" end="2"/>
+                                            </p:txEl>
+                                          </p:spTgt>
+                                        </p:tgtEl>
+                                        <p:attrNameLst>
+                                          <p:attrName>ppt_y</p:attrName>
+                                        </p:attrNameLst>
+                                      </p:cBhvr>
+                                      <p:tavLst>
+                                        <p:tav tm="0">
+                                          <p:val>
+                                            <p:strVal val="1+#ppt_h/2"/>
+                                          </p:val>
+                                        </p:tav>
+                                        <p:tav tm="100000">
+                                          <p:val>
+                                            <p:strVal val="#ppt_y"/>
+                                          </p:val>
+                                        </p:tav>
+                                      </p:tavLst>
+                                    </p:anim>
+                                  </p:childTnLst>
+                                </p:cTn>
+                              </p:par>
+                            </p:childTnLst>
+                          </p:cTn>
+                        </p:par>
+                      </p:childTnLst>
+                    </p:cTn>
+                  </p:par>
+                  <p:par>
+                    <p:cTn id="21" fill="hold">
+                      <p:stCondLst>
+                        <p:cond delay="indefinite"/>
+                      </p:stCondLst>
+                      <p:childTnLst>
+                        <p:par>
+                          <p:cTn id="22" fill="hold">
+                            <p:stCondLst>
+                              <p:cond delay="0"/>
+                            </p:stCondLst>
+                            <p:childTnLst>
+                              <p:par>
+                                <p:cTn id="23" presetID="2" presetClass="entr" presetSubtype="4" fill="hold" nodeType="clickEffect">
+                                  <p:stCondLst>
+                                    <p:cond delay="0"/>
+                                  </p:stCondLst>
+                                  <p:childTnLst>
+                                    <p:set>
+                                      <p:cBhvr>
+                                        <p:cTn id="24" dur="1" fill="hold">
+                                          <p:stCondLst>
+                                            <p:cond delay="0"/>
+                                          </p:stCondLst>
+                                        </p:cTn>
+                                        <p:tgtEl>
+                                          <p:spTgt spid="3">
+                                            <p:txEl>
+                                              <p:pRg st="3" end="3"/>
+                                            </p:txEl>
+                                          </p:spTgt>
+                                        </p:tgtEl>
+                                        <p:attrNameLst>
+                                          <p:attrName>style.visibility</p:attrName>
+                                        </p:attrNameLst>
+                                      </p:cBhvr>
+                                      <p:to>
+                                        <p:strVal val="visible"/>
+                                      </p:to>
+                                    </p:set>
+                                    <p:anim calcmode="lin" valueType="num">
+                                      <p:cBhvr additive="base">
+                                        <p:cTn id="25" dur="500" fill="hold"/>
+                                        <p:tgtEl>
+                                          <p:spTgt spid="3">
+                                            <p:txEl>
+                                              <p:pRg st="3" end="3"/>
+                                            </p:txEl>
+                                          </p:spTgt>
+                                        </p:tgtEl>
+                                        <p:attrNameLst>
+                                          <p:attrName>ppt_x</p:attrName>
+                                        </p:attrNameLst>
+                                      </p:cBhvr>
+                                      <p:tavLst>
+                                        <p:tav tm="0">
+                                          <p:val>
+                                            <p:strVal val="#ppt_x"/>
+                                          </p:val>
+                                        </p:tav>
+                                        <p:tav tm="100000">
+                                          <p:val>
+                                            <p:strVal val="#ppt_x"/>
+                                          </p:val>
+                                        </p:tav>
+                                      </p:tavLst>
+                                    </p:anim>
+                                    <p:anim calcmode="lin" valueType="num">
+                                      <p:cBhvr additive="base">
+                                        <p:cTn id="26" dur="500" fill="hold"/>
+                                        <p:tgtEl>
+                                          <p:spTgt spid="3">
+                                            <p:txEl>
+                                              <p:pRg st="3" end="3"/>
+                                            </p:txEl>
+                                          </p:spTgt>
+                                        </p:tgtEl>
+                                        <p:attrNameLst>
+                                          <p:attrName>ppt_y</p:attrName>
+                                        </p:attrNameLst>
+                                      </p:cBhvr>
+                                      <p:tavLst>
+                                        <p:tav tm="0">
+                                          <p:val>
+                                            <p:strVal val="1+#ppt_h/2"/>
+                                          </p:val>
+                                        </p:tav>
+                                        <p:tav tm="100000">
+                                          <p:val>
+                                            <p:strVal val="#ppt_y"/>
+                                          </p:val>
+                                        </p:tav>
+                                      </p:tavLst>
+                                    </p:anim>
+                                  </p:childTnLst>
+                                </p:cTn>
+                              </p:par>
+                            </p:childTnLst>
+                          </p:cTn>
+                        </p:par>
+                      </p:childTnLst>
+                    </p:cTn>
+                  </p:par>
+                  <p:par>
+                    <p:cTn id="27" fill="hold">
+                      <p:stCondLst>
+                        <p:cond delay="indefinite"/>
+                      </p:stCondLst>
+                      <p:childTnLst>
+                        <p:par>
+                          <p:cTn id="28" fill="hold">
+                            <p:stCondLst>
+                              <p:cond delay="0"/>
+                            </p:stCondLst>
+                            <p:childTnLst>
+                              <p:par>
+                                <p:cTn id="29" presetID="2" presetClass="entr" presetSubtype="4" fill="hold" nodeType="clickEffect">
+                                  <p:stCondLst>
+                                    <p:cond delay="0"/>
+                                  </p:stCondLst>
+                                  <p:childTnLst>
+                                    <p:set>
+                                      <p:cBhvr>
+                                        <p:cTn id="30" dur="1" fill="hold">
+                                          <p:stCondLst>
+                                            <p:cond delay="0"/>
+                                          </p:stCondLst>
+                                        </p:cTn>
+                                        <p:tgtEl>
+                                          <p:spTgt spid="3">
+                                            <p:txEl>
+                                              <p:pRg st="4" end="4"/>
+                                            </p:txEl>
+                                          </p:spTgt>
+                                        </p:tgtEl>
+                                        <p:attrNameLst>
+                                          <p:attrName>style.visibility</p:attrName>
+                                        </p:attrNameLst>
+                                      </p:cBhvr>
+                                      <p:to>
+                                        <p:strVal val="visible"/>
+                                      </p:to>
+                                    </p:set>
+                                    <p:anim calcmode="lin" valueType="num">
+                                      <p:cBhvr additive="base">
+                                        <p:cTn id="31" dur="500" fill="hold"/>
+                                        <p:tgtEl>
+                                          <p:spTgt spid="3">
+                                            <p:txEl>
+                                              <p:pRg st="4" end="4"/>
+                                            </p:txEl>
+                                          </p:spTgt>
+                                        </p:tgtEl>
+                                        <p:attrNameLst>
+                                          <p:attrName>ppt_x</p:attrName>
+                                        </p:attrNameLst>
+                                      </p:cBhvr>
+                                      <p:tavLst>
+                                        <p:tav tm="0">
+                                          <p:val>
+                                            <p:strVal val="#ppt_x"/>
+                                          </p:val>
+                                        </p:tav>
+                                        <p:tav tm="100000">
+                                          <p:val>
+                                            <p:strVal val="#ppt_x"/>
+                                          </p:val>
+                                        </p:tav>
+                                      </p:tavLst>
+                                    </p:anim>
+                                    <p:anim calcmode="lin" valueType="num">
+                                      <p:cBhvr additive="base">
+                                        <p:cTn id="32" dur="500" fill="hold"/>
+                                        <p:tgtEl>
+                                          <p:spTgt spid="3">
+                                            <p:txEl>
+                                              <p:pRg st="4" end="4"/>
+                                            </p:txEl>
+                                          </p:spTgt>
+                                        </p:tgtEl>
+                                        <p:attrNameLst>
+                                          <p:attrName>ppt_y</p:attrName>
+                                        </p:attrNameLst>
+                                      </p:cBhvr>
+                                      <p:tavLst>
+                                        <p:tav tm="0">
+                                          <p:val>
+                                            <p:strVal val="1+#ppt_h/2"/>
+                                          </p:val>
+                                        </p:tav>
+                                        <p:tav tm="100000">
+                                          <p:val>
+                                            <p:strVal val="#ppt_y"/>
+                                          </p:val>
+                                        </p:tav>
+                                      </p:tavLst>
+                                    </p:anim>
+                                  </p:childTnLst>
+                                </p:cTn>
+                              </p:par>
+                            </p:childTnLst>
+                          </p:cTn>
+                        </p:par>
+                      </p:childTnLst>
+                    </p:cTn>
+                  </p:par>
+                  <p:par>
+                    <p:cTn id="33" fill="hold">
+                      <p:stCondLst>
+                        <p:cond delay="indefinite"/>
+                      </p:stCondLst>
+                      <p:childTnLst>
+                        <p:par>
+                          <p:cTn id="34" fill="hold">
+                            <p:stCondLst>
+                              <p:cond delay="0"/>
+                            </p:stCondLst>
+                            <p:childTnLst>
+                              <p:par>
+                                <p:cTn id="35" presetID="2" presetClass="entr" presetSubtype="4" fill="hold" nodeType="clickEffect">
+                                  <p:stCondLst>
+                                    <p:cond delay="0"/>
+                                  </p:stCondLst>
+                                  <p:childTnLst>
+                                    <p:set>
+                                      <p:cBhvr>
+                                        <p:cTn id="36" dur="1" fill="hold">
+                                          <p:stCondLst>
+                                            <p:cond delay="0"/>
+                                          </p:stCondLst>
+                                        </p:cTn>
+                                        <p:tgtEl>
+                                          <p:spTgt spid="3">
+                                            <p:txEl>
+                                              <p:pRg st="5" end="5"/>
+                                            </p:txEl>
+                                          </p:spTgt>
+                                        </p:tgtEl>
+                                        <p:attrNameLst>
+                                          <p:attrName>style.visibility</p:attrName>
+                                        </p:attrNameLst>
+                                      </p:cBhvr>
+                                      <p:to>
+                                        <p:strVal val="visible"/>
+                                      </p:to>
+                                    </p:set>
+                                    <p:anim calcmode="lin" valueType="num">
+                                      <p:cBhvr additive="base">
+                                        <p:cTn id="37" dur="500" fill="hold"/>
+                                        <p:tgtEl>
+                                          <p:spTgt spid="3">
+                                            <p:txEl>
+                                              <p:pRg st="5" end="5"/>
+                                            </p:txEl>
+                                          </p:spTgt>
+                                        </p:tgtEl>
+                                        <p:attrNameLst>
+                                          <p:attrName>ppt_x</p:attrName>
+                                        </p:attrNameLst>
+                                      </p:cBhvr>
+                                      <p:tavLst>
+                                        <p:tav tm="0">
+                                          <p:val>
+                                            <p:strVal val="#ppt_x"/>
+                                          </p:val>
+                                        </p:tav>
+                                        <p:tav tm="100000">
+                                          <p:val>
+                                            <p:strVal val="#ppt_x"/>
+                                          </p:val>
+                                        </p:tav>
+                                      </p:tavLst>
+                                    </p:anim>
+                                    <p:anim calcmode="lin" valueType="num">
+                                      <p:cBhvr additive="base">
+                                        <p:cTn id="38" dur="500" fill="hold"/>
+                                        <p:tgtEl>
+                                          <p:spTgt spid="3">
+                                            <p:txEl>
+                                              <p:pRg st="5" end="5"/>
+                                            </p:txEl>
+                                          </p:spTgt>
+                                        </p:tgtEl>
+                                        <p:attrNameLst>
+                                          <p:attrName>ppt_y</p:attrName>
+                                        </p:attrNameLst>
+                                      </p:cBhvr>
+                                      <p:tavLst>
+                                        <p:tav tm="0">
+                                          <p:val>
+                                            <p:strVal val="1+#ppt_h/2"/>
+                                          </p:val>
+                                        </p:tav>
+                                        <p:tav tm="100000">
+                                          <p:val>
+                                            <p:strVal val="#ppt_y"/>
+                                          </p:val>
+                                        </p:tav>
+                                      </p:tavLst>
+                                    </p:anim>
+                                  </p:childTnLst>
+                                </p:cTn>
+                              </p:par>
+                            </p:childTnLst>
+                          </p:cTn>
+                        </p:par>
+                      </p:childTnLst>
+                    </p:cTn>
+                  </p:par>
+                </p:childTnLst>
+              </p:cTn>
+              <p:prevCondLst>
+                <p:cond evt="onPrev" delay="0">
+                  <p:tgtEl>
+                    <p:sldTgt/>
+                  </p:tgtEl>
+                </p:cond>
+              </p:prevCondLst>
+              <p:nextCondLst>
+                <p:cond evt="onNext" delay="0">
+                  <p:tgtEl>
+                    <p:sldTgt/>
+                  </p:tgtEl>
+                </p:cond>
+              </p:nextCondLst>
+            </p:seq>
+          </p:childTnLst>
+        </p:cTn>
+      </p:par>
+    </p:tnLst>
+  </p:timing>
 </p:sld>
 </file>
 
@@ -6014,7 +8802,7 @@
           </a:prstGeom>
           <a:extLst>
             <a:ext uri="{C572A759-6A51-4108-AA02-DFA0A04FC94B}">
-              <ma14:wrappingTextBoxFlag xmlns:ma14="http://schemas.microsoft.com/office/mac/drawingml/2011/main" xmlns="" val="1"/>
+              <ma14:wrappingTextBoxFlag xmlns="" xmlns:ma14="http://schemas.microsoft.com/office/mac/drawingml/2011/main" val="1"/>
             </a:ext>
           </a:extLst>
         </p:spPr>
@@ -6131,6 +8919,327 @@
   <p:clrMapOvr>
     <a:masterClrMapping/>
   </p:clrMapOvr>
+  <p:timing>
+    <p:tnLst>
+      <p:par>
+        <p:cTn id="1" dur="indefinite" restart="never" nodeType="tmRoot">
+          <p:childTnLst>
+            <p:seq concurrent="1" nextAc="seek">
+              <p:cTn id="2" dur="indefinite" nodeType="mainSeq">
+                <p:childTnLst>
+                  <p:par>
+                    <p:cTn id="3" fill="hold">
+                      <p:stCondLst>
+                        <p:cond delay="indefinite"/>
+                      </p:stCondLst>
+                      <p:childTnLst>
+                        <p:par>
+                          <p:cTn id="4" fill="hold">
+                            <p:stCondLst>
+                              <p:cond delay="0"/>
+                            </p:stCondLst>
+                            <p:childTnLst>
+                              <p:par>
+                                <p:cTn id="5" presetID="2" presetClass="entr" presetSubtype="4" fill="hold" nodeType="clickEffect">
+                                  <p:stCondLst>
+                                    <p:cond delay="0"/>
+                                  </p:stCondLst>
+                                  <p:childTnLst>
+                                    <p:set>
+                                      <p:cBhvr>
+                                        <p:cTn id="6" dur="1" fill="hold">
+                                          <p:stCondLst>
+                                            <p:cond delay="0"/>
+                                          </p:stCondLst>
+                                        </p:cTn>
+                                        <p:tgtEl>
+                                          <p:spTgt spid="112">
+                                            <p:txEl>
+                                              <p:pRg st="1" end="1"/>
+                                            </p:txEl>
+                                          </p:spTgt>
+                                        </p:tgtEl>
+                                        <p:attrNameLst>
+                                          <p:attrName>style.visibility</p:attrName>
+                                        </p:attrNameLst>
+                                      </p:cBhvr>
+                                      <p:to>
+                                        <p:strVal val="visible"/>
+                                      </p:to>
+                                    </p:set>
+                                    <p:anim calcmode="lin" valueType="num">
+                                      <p:cBhvr additive="base">
+                                        <p:cTn id="7" dur="500" fill="hold"/>
+                                        <p:tgtEl>
+                                          <p:spTgt spid="112">
+                                            <p:txEl>
+                                              <p:pRg st="1" end="1"/>
+                                            </p:txEl>
+                                          </p:spTgt>
+                                        </p:tgtEl>
+                                        <p:attrNameLst>
+                                          <p:attrName>ppt_x</p:attrName>
+                                        </p:attrNameLst>
+                                      </p:cBhvr>
+                                      <p:tavLst>
+                                        <p:tav tm="0">
+                                          <p:val>
+                                            <p:strVal val="#ppt_x"/>
+                                          </p:val>
+                                        </p:tav>
+                                        <p:tav tm="100000">
+                                          <p:val>
+                                            <p:strVal val="#ppt_x"/>
+                                          </p:val>
+                                        </p:tav>
+                                      </p:tavLst>
+                                    </p:anim>
+                                    <p:anim calcmode="lin" valueType="num">
+                                      <p:cBhvr additive="base">
+                                        <p:cTn id="8" dur="500" fill="hold"/>
+                                        <p:tgtEl>
+                                          <p:spTgt spid="112">
+                                            <p:txEl>
+                                              <p:pRg st="1" end="1"/>
+                                            </p:txEl>
+                                          </p:spTgt>
+                                        </p:tgtEl>
+                                        <p:attrNameLst>
+                                          <p:attrName>ppt_y</p:attrName>
+                                        </p:attrNameLst>
+                                      </p:cBhvr>
+                                      <p:tavLst>
+                                        <p:tav tm="0">
+                                          <p:val>
+                                            <p:strVal val="1+#ppt_h/2"/>
+                                          </p:val>
+                                        </p:tav>
+                                        <p:tav tm="100000">
+                                          <p:val>
+                                            <p:strVal val="#ppt_y"/>
+                                          </p:val>
+                                        </p:tav>
+                                      </p:tavLst>
+                                    </p:anim>
+                                  </p:childTnLst>
+                                </p:cTn>
+                              </p:par>
+                            </p:childTnLst>
+                          </p:cTn>
+                        </p:par>
+                      </p:childTnLst>
+                    </p:cTn>
+                  </p:par>
+                  <p:par>
+                    <p:cTn id="9" fill="hold">
+                      <p:stCondLst>
+                        <p:cond delay="indefinite"/>
+                      </p:stCondLst>
+                      <p:childTnLst>
+                        <p:par>
+                          <p:cTn id="10" fill="hold">
+                            <p:stCondLst>
+                              <p:cond delay="0"/>
+                            </p:stCondLst>
+                            <p:childTnLst>
+                              <p:par>
+                                <p:cTn id="11" presetID="2" presetClass="entr" presetSubtype="4" fill="hold" nodeType="clickEffect">
+                                  <p:stCondLst>
+                                    <p:cond delay="0"/>
+                                  </p:stCondLst>
+                                  <p:childTnLst>
+                                    <p:set>
+                                      <p:cBhvr>
+                                        <p:cTn id="12" dur="1" fill="hold">
+                                          <p:stCondLst>
+                                            <p:cond delay="0"/>
+                                          </p:stCondLst>
+                                        </p:cTn>
+                                        <p:tgtEl>
+                                          <p:spTgt spid="112">
+                                            <p:txEl>
+                                              <p:pRg st="4" end="4"/>
+                                            </p:txEl>
+                                          </p:spTgt>
+                                        </p:tgtEl>
+                                        <p:attrNameLst>
+                                          <p:attrName>style.visibility</p:attrName>
+                                        </p:attrNameLst>
+                                      </p:cBhvr>
+                                      <p:to>
+                                        <p:strVal val="visible"/>
+                                      </p:to>
+                                    </p:set>
+                                    <p:anim calcmode="lin" valueType="num">
+                                      <p:cBhvr additive="base">
+                                        <p:cTn id="13" dur="500" fill="hold"/>
+                                        <p:tgtEl>
+                                          <p:spTgt spid="112">
+                                            <p:txEl>
+                                              <p:pRg st="4" end="4"/>
+                                            </p:txEl>
+                                          </p:spTgt>
+                                        </p:tgtEl>
+                                        <p:attrNameLst>
+                                          <p:attrName>ppt_x</p:attrName>
+                                        </p:attrNameLst>
+                                      </p:cBhvr>
+                                      <p:tavLst>
+                                        <p:tav tm="0">
+                                          <p:val>
+                                            <p:strVal val="#ppt_x"/>
+                                          </p:val>
+                                        </p:tav>
+                                        <p:tav tm="100000">
+                                          <p:val>
+                                            <p:strVal val="#ppt_x"/>
+                                          </p:val>
+                                        </p:tav>
+                                      </p:tavLst>
+                                    </p:anim>
+                                    <p:anim calcmode="lin" valueType="num">
+                                      <p:cBhvr additive="base">
+                                        <p:cTn id="14" dur="500" fill="hold"/>
+                                        <p:tgtEl>
+                                          <p:spTgt spid="112">
+                                            <p:txEl>
+                                              <p:pRg st="4" end="4"/>
+                                            </p:txEl>
+                                          </p:spTgt>
+                                        </p:tgtEl>
+                                        <p:attrNameLst>
+                                          <p:attrName>ppt_y</p:attrName>
+                                        </p:attrNameLst>
+                                      </p:cBhvr>
+                                      <p:tavLst>
+                                        <p:tav tm="0">
+                                          <p:val>
+                                            <p:strVal val="1+#ppt_h/2"/>
+                                          </p:val>
+                                        </p:tav>
+                                        <p:tav tm="100000">
+                                          <p:val>
+                                            <p:strVal val="#ppt_y"/>
+                                          </p:val>
+                                        </p:tav>
+                                      </p:tavLst>
+                                    </p:anim>
+                                  </p:childTnLst>
+                                </p:cTn>
+                              </p:par>
+                              <p:par>
+                                <p:cTn id="15" presetID="2" presetClass="entr" presetSubtype="4" fill="hold" nodeType="withEffect">
+                                  <p:stCondLst>
+                                    <p:cond delay="0"/>
+                                  </p:stCondLst>
+                                  <p:childTnLst>
+                                    <p:set>
+                                      <p:cBhvr>
+                                        <p:cTn id="16" dur="1" fill="hold">
+                                          <p:stCondLst>
+                                            <p:cond delay="0"/>
+                                          </p:stCondLst>
+                                        </p:cTn>
+                                        <p:tgtEl>
+                                          <p:spTgt spid="112">
+                                            <p:txEl>
+                                              <p:pRg st="5" end="5"/>
+                                            </p:txEl>
+                                          </p:spTgt>
+                                        </p:tgtEl>
+                                        <p:attrNameLst>
+                                          <p:attrName>style.visibility</p:attrName>
+                                        </p:attrNameLst>
+                                      </p:cBhvr>
+                                      <p:to>
+                                        <p:strVal val="visible"/>
+                                      </p:to>
+                                    </p:set>
+                                    <p:anim calcmode="lin" valueType="num">
+                                      <p:cBhvr additive="base">
+                                        <p:cTn id="17" dur="500" fill="hold"/>
+                                        <p:tgtEl>
+                                          <p:spTgt spid="112">
+                                            <p:txEl>
+                                              <p:pRg st="5" end="5"/>
+                                            </p:txEl>
+                                          </p:spTgt>
+                                        </p:tgtEl>
+                                        <p:attrNameLst>
+                                          <p:attrName>ppt_x</p:attrName>
+                                        </p:attrNameLst>
+                                      </p:cBhvr>
+                                      <p:tavLst>
+                                        <p:tav tm="0">
+                                          <p:val>
+                                            <p:strVal val="#ppt_x"/>
+                                          </p:val>
+                                        </p:tav>
+                                        <p:tav tm="100000">
+                                          <p:val>
+                                            <p:strVal val="#ppt_x"/>
+                                          </p:val>
+                                        </p:tav>
+                                      </p:tavLst>
+                                    </p:anim>
+                                    <p:anim calcmode="lin" valueType="num">
+                                      <p:cBhvr additive="base">
+                                        <p:cTn id="18" dur="500" fill="hold"/>
+                                        <p:tgtEl>
+                                          <p:spTgt spid="112">
+                                            <p:txEl>
+                                              <p:pRg st="5" end="5"/>
+                                            </p:txEl>
+                                          </p:spTgt>
+                                        </p:tgtEl>
+                                        <p:attrNameLst>
+                                          <p:attrName>ppt_y</p:attrName>
+                                        </p:attrNameLst>
+                                      </p:cBhvr>
+                                      <p:tavLst>
+                                        <p:tav tm="0">
+                                          <p:val>
+                                            <p:strVal val="1+#ppt_h/2"/>
+                                          </p:val>
+                                        </p:tav>
+                                        <p:tav tm="100000">
+                                          <p:val>
+                                            <p:strVal val="#ppt_y"/>
+                                          </p:val>
+                                        </p:tav>
+                                      </p:tavLst>
+                                    </p:anim>
+                                  </p:childTnLst>
+                                </p:cTn>
+                              </p:par>
+                            </p:childTnLst>
+                          </p:cTn>
+                        </p:par>
+                      </p:childTnLst>
+                    </p:cTn>
+                  </p:par>
+                </p:childTnLst>
+              </p:cTn>
+              <p:prevCondLst>
+                <p:cond evt="onPrev" delay="0">
+                  <p:tgtEl>
+                    <p:sldTgt/>
+                  </p:tgtEl>
+                </p:cond>
+              </p:prevCondLst>
+              <p:nextCondLst>
+                <p:cond evt="onNext" delay="0">
+                  <p:tgtEl>
+                    <p:sldTgt/>
+                  </p:tgtEl>
+                </p:cond>
+              </p:nextCondLst>
+            </p:seq>
+          </p:childTnLst>
+        </p:cTn>
+      </p:par>
+    </p:tnLst>
+  </p:timing>
 </p:sld>
 </file>
 
@@ -6683,6 +9792,752 @@
   <p:clrMapOvr>
     <a:masterClrMapping/>
   </p:clrMapOvr>
+  <p:timing>
+    <p:tnLst>
+      <p:par>
+        <p:cTn id="1" dur="indefinite" restart="never" nodeType="tmRoot">
+          <p:childTnLst>
+            <p:seq concurrent="1" nextAc="seek">
+              <p:cTn id="2" dur="indefinite" nodeType="mainSeq">
+                <p:childTnLst>
+                  <p:par>
+                    <p:cTn id="3" fill="hold">
+                      <p:stCondLst>
+                        <p:cond delay="indefinite"/>
+                      </p:stCondLst>
+                      <p:childTnLst>
+                        <p:par>
+                          <p:cTn id="4" fill="hold">
+                            <p:stCondLst>
+                              <p:cond delay="0"/>
+                            </p:stCondLst>
+                            <p:childTnLst>
+                              <p:par>
+                                <p:cTn id="5" presetID="2" presetClass="entr" presetSubtype="4" fill="hold" nodeType="clickEffect">
+                                  <p:stCondLst>
+                                    <p:cond delay="0"/>
+                                  </p:stCondLst>
+                                  <p:childTnLst>
+                                    <p:set>
+                                      <p:cBhvr>
+                                        <p:cTn id="6" dur="1" fill="hold">
+                                          <p:stCondLst>
+                                            <p:cond delay="0"/>
+                                          </p:stCondLst>
+                                        </p:cTn>
+                                        <p:tgtEl>
+                                          <p:spTgt spid="3">
+                                            <p:txEl>
+                                              <p:pRg st="1" end="1"/>
+                                            </p:txEl>
+                                          </p:spTgt>
+                                        </p:tgtEl>
+                                        <p:attrNameLst>
+                                          <p:attrName>style.visibility</p:attrName>
+                                        </p:attrNameLst>
+                                      </p:cBhvr>
+                                      <p:to>
+                                        <p:strVal val="visible"/>
+                                      </p:to>
+                                    </p:set>
+                                    <p:anim calcmode="lin" valueType="num">
+                                      <p:cBhvr additive="base">
+                                        <p:cTn id="7" dur="500" fill="hold"/>
+                                        <p:tgtEl>
+                                          <p:spTgt spid="3">
+                                            <p:txEl>
+                                              <p:pRg st="1" end="1"/>
+                                            </p:txEl>
+                                          </p:spTgt>
+                                        </p:tgtEl>
+                                        <p:attrNameLst>
+                                          <p:attrName>ppt_x</p:attrName>
+                                        </p:attrNameLst>
+                                      </p:cBhvr>
+                                      <p:tavLst>
+                                        <p:tav tm="0">
+                                          <p:val>
+                                            <p:strVal val="#ppt_x"/>
+                                          </p:val>
+                                        </p:tav>
+                                        <p:tav tm="100000">
+                                          <p:val>
+                                            <p:strVal val="#ppt_x"/>
+                                          </p:val>
+                                        </p:tav>
+                                      </p:tavLst>
+                                    </p:anim>
+                                    <p:anim calcmode="lin" valueType="num">
+                                      <p:cBhvr additive="base">
+                                        <p:cTn id="8" dur="500" fill="hold"/>
+                                        <p:tgtEl>
+                                          <p:spTgt spid="3">
+                                            <p:txEl>
+                                              <p:pRg st="1" end="1"/>
+                                            </p:txEl>
+                                          </p:spTgt>
+                                        </p:tgtEl>
+                                        <p:attrNameLst>
+                                          <p:attrName>ppt_y</p:attrName>
+                                        </p:attrNameLst>
+                                      </p:cBhvr>
+                                      <p:tavLst>
+                                        <p:tav tm="0">
+                                          <p:val>
+                                            <p:strVal val="1+#ppt_h/2"/>
+                                          </p:val>
+                                        </p:tav>
+                                        <p:tav tm="100000">
+                                          <p:val>
+                                            <p:strVal val="#ppt_y"/>
+                                          </p:val>
+                                        </p:tav>
+                                      </p:tavLst>
+                                    </p:anim>
+                                  </p:childTnLst>
+                                </p:cTn>
+                              </p:par>
+                              <p:par>
+                                <p:cTn id="9" presetID="2" presetClass="entr" presetSubtype="4" fill="hold" nodeType="withEffect">
+                                  <p:stCondLst>
+                                    <p:cond delay="0"/>
+                                  </p:stCondLst>
+                                  <p:childTnLst>
+                                    <p:set>
+                                      <p:cBhvr>
+                                        <p:cTn id="10" dur="1" fill="hold">
+                                          <p:stCondLst>
+                                            <p:cond delay="0"/>
+                                          </p:stCondLst>
+                                        </p:cTn>
+                                        <p:tgtEl>
+                                          <p:spTgt spid="3">
+                                            <p:txEl>
+                                              <p:pRg st="2" end="2"/>
+                                            </p:txEl>
+                                          </p:spTgt>
+                                        </p:tgtEl>
+                                        <p:attrNameLst>
+                                          <p:attrName>style.visibility</p:attrName>
+                                        </p:attrNameLst>
+                                      </p:cBhvr>
+                                      <p:to>
+                                        <p:strVal val="visible"/>
+                                      </p:to>
+                                    </p:set>
+                                    <p:anim calcmode="lin" valueType="num">
+                                      <p:cBhvr additive="base">
+                                        <p:cTn id="11" dur="500" fill="hold"/>
+                                        <p:tgtEl>
+                                          <p:spTgt spid="3">
+                                            <p:txEl>
+                                              <p:pRg st="2" end="2"/>
+                                            </p:txEl>
+                                          </p:spTgt>
+                                        </p:tgtEl>
+                                        <p:attrNameLst>
+                                          <p:attrName>ppt_x</p:attrName>
+                                        </p:attrNameLst>
+                                      </p:cBhvr>
+                                      <p:tavLst>
+                                        <p:tav tm="0">
+                                          <p:val>
+                                            <p:strVal val="#ppt_x"/>
+                                          </p:val>
+                                        </p:tav>
+                                        <p:tav tm="100000">
+                                          <p:val>
+                                            <p:strVal val="#ppt_x"/>
+                                          </p:val>
+                                        </p:tav>
+                                      </p:tavLst>
+                                    </p:anim>
+                                    <p:anim calcmode="lin" valueType="num">
+                                      <p:cBhvr additive="base">
+                                        <p:cTn id="12" dur="500" fill="hold"/>
+                                        <p:tgtEl>
+                                          <p:spTgt spid="3">
+                                            <p:txEl>
+                                              <p:pRg st="2" end="2"/>
+                                            </p:txEl>
+                                          </p:spTgt>
+                                        </p:tgtEl>
+                                        <p:attrNameLst>
+                                          <p:attrName>ppt_y</p:attrName>
+                                        </p:attrNameLst>
+                                      </p:cBhvr>
+                                      <p:tavLst>
+                                        <p:tav tm="0">
+                                          <p:val>
+                                            <p:strVal val="1+#ppt_h/2"/>
+                                          </p:val>
+                                        </p:tav>
+                                        <p:tav tm="100000">
+                                          <p:val>
+                                            <p:strVal val="#ppt_y"/>
+                                          </p:val>
+                                        </p:tav>
+                                      </p:tavLst>
+                                    </p:anim>
+                                  </p:childTnLst>
+                                </p:cTn>
+                              </p:par>
+                              <p:par>
+                                <p:cTn id="13" presetID="2" presetClass="entr" presetSubtype="4" fill="hold" nodeType="withEffect">
+                                  <p:stCondLst>
+                                    <p:cond delay="0"/>
+                                  </p:stCondLst>
+                                  <p:childTnLst>
+                                    <p:set>
+                                      <p:cBhvr>
+                                        <p:cTn id="14" dur="1" fill="hold">
+                                          <p:stCondLst>
+                                            <p:cond delay="0"/>
+                                          </p:stCondLst>
+                                        </p:cTn>
+                                        <p:tgtEl>
+                                          <p:spTgt spid="3">
+                                            <p:txEl>
+                                              <p:pRg st="3" end="3"/>
+                                            </p:txEl>
+                                          </p:spTgt>
+                                        </p:tgtEl>
+                                        <p:attrNameLst>
+                                          <p:attrName>style.visibility</p:attrName>
+                                        </p:attrNameLst>
+                                      </p:cBhvr>
+                                      <p:to>
+                                        <p:strVal val="visible"/>
+                                      </p:to>
+                                    </p:set>
+                                    <p:anim calcmode="lin" valueType="num">
+                                      <p:cBhvr additive="base">
+                                        <p:cTn id="15" dur="500" fill="hold"/>
+                                        <p:tgtEl>
+                                          <p:spTgt spid="3">
+                                            <p:txEl>
+                                              <p:pRg st="3" end="3"/>
+                                            </p:txEl>
+                                          </p:spTgt>
+                                        </p:tgtEl>
+                                        <p:attrNameLst>
+                                          <p:attrName>ppt_x</p:attrName>
+                                        </p:attrNameLst>
+                                      </p:cBhvr>
+                                      <p:tavLst>
+                                        <p:tav tm="0">
+                                          <p:val>
+                                            <p:strVal val="#ppt_x"/>
+                                          </p:val>
+                                        </p:tav>
+                                        <p:tav tm="100000">
+                                          <p:val>
+                                            <p:strVal val="#ppt_x"/>
+                                          </p:val>
+                                        </p:tav>
+                                      </p:tavLst>
+                                    </p:anim>
+                                    <p:anim calcmode="lin" valueType="num">
+                                      <p:cBhvr additive="base">
+                                        <p:cTn id="16" dur="500" fill="hold"/>
+                                        <p:tgtEl>
+                                          <p:spTgt spid="3">
+                                            <p:txEl>
+                                              <p:pRg st="3" end="3"/>
+                                            </p:txEl>
+                                          </p:spTgt>
+                                        </p:tgtEl>
+                                        <p:attrNameLst>
+                                          <p:attrName>ppt_y</p:attrName>
+                                        </p:attrNameLst>
+                                      </p:cBhvr>
+                                      <p:tavLst>
+                                        <p:tav tm="0">
+                                          <p:val>
+                                            <p:strVal val="1+#ppt_h/2"/>
+                                          </p:val>
+                                        </p:tav>
+                                        <p:tav tm="100000">
+                                          <p:val>
+                                            <p:strVal val="#ppt_y"/>
+                                          </p:val>
+                                        </p:tav>
+                                      </p:tavLst>
+                                    </p:anim>
+                                  </p:childTnLst>
+                                </p:cTn>
+                              </p:par>
+                              <p:par>
+                                <p:cTn id="17" presetID="2" presetClass="entr" presetSubtype="4" fill="hold" nodeType="withEffect">
+                                  <p:stCondLst>
+                                    <p:cond delay="0"/>
+                                  </p:stCondLst>
+                                  <p:childTnLst>
+                                    <p:set>
+                                      <p:cBhvr>
+                                        <p:cTn id="18" dur="1" fill="hold">
+                                          <p:stCondLst>
+                                            <p:cond delay="0"/>
+                                          </p:stCondLst>
+                                        </p:cTn>
+                                        <p:tgtEl>
+                                          <p:spTgt spid="3">
+                                            <p:txEl>
+                                              <p:pRg st="4" end="4"/>
+                                            </p:txEl>
+                                          </p:spTgt>
+                                        </p:tgtEl>
+                                        <p:attrNameLst>
+                                          <p:attrName>style.visibility</p:attrName>
+                                        </p:attrNameLst>
+                                      </p:cBhvr>
+                                      <p:to>
+                                        <p:strVal val="visible"/>
+                                      </p:to>
+                                    </p:set>
+                                    <p:anim calcmode="lin" valueType="num">
+                                      <p:cBhvr additive="base">
+                                        <p:cTn id="19" dur="500" fill="hold"/>
+                                        <p:tgtEl>
+                                          <p:spTgt spid="3">
+                                            <p:txEl>
+                                              <p:pRg st="4" end="4"/>
+                                            </p:txEl>
+                                          </p:spTgt>
+                                        </p:tgtEl>
+                                        <p:attrNameLst>
+                                          <p:attrName>ppt_x</p:attrName>
+                                        </p:attrNameLst>
+                                      </p:cBhvr>
+                                      <p:tavLst>
+                                        <p:tav tm="0">
+                                          <p:val>
+                                            <p:strVal val="#ppt_x"/>
+                                          </p:val>
+                                        </p:tav>
+                                        <p:tav tm="100000">
+                                          <p:val>
+                                            <p:strVal val="#ppt_x"/>
+                                          </p:val>
+                                        </p:tav>
+                                      </p:tavLst>
+                                    </p:anim>
+                                    <p:anim calcmode="lin" valueType="num">
+                                      <p:cBhvr additive="base">
+                                        <p:cTn id="20" dur="500" fill="hold"/>
+                                        <p:tgtEl>
+                                          <p:spTgt spid="3">
+                                            <p:txEl>
+                                              <p:pRg st="4" end="4"/>
+                                            </p:txEl>
+                                          </p:spTgt>
+                                        </p:tgtEl>
+                                        <p:attrNameLst>
+                                          <p:attrName>ppt_y</p:attrName>
+                                        </p:attrNameLst>
+                                      </p:cBhvr>
+                                      <p:tavLst>
+                                        <p:tav tm="0">
+                                          <p:val>
+                                            <p:strVal val="1+#ppt_h/2"/>
+                                          </p:val>
+                                        </p:tav>
+                                        <p:tav tm="100000">
+                                          <p:val>
+                                            <p:strVal val="#ppt_y"/>
+                                          </p:val>
+                                        </p:tav>
+                                      </p:tavLst>
+                                    </p:anim>
+                                  </p:childTnLst>
+                                </p:cTn>
+                              </p:par>
+                            </p:childTnLst>
+                          </p:cTn>
+                        </p:par>
+                      </p:childTnLst>
+                    </p:cTn>
+                  </p:par>
+                  <p:par>
+                    <p:cTn id="21" fill="hold">
+                      <p:stCondLst>
+                        <p:cond delay="indefinite"/>
+                      </p:stCondLst>
+                      <p:childTnLst>
+                        <p:par>
+                          <p:cTn id="22" fill="hold">
+                            <p:stCondLst>
+                              <p:cond delay="0"/>
+                            </p:stCondLst>
+                            <p:childTnLst>
+                              <p:par>
+                                <p:cTn id="23" presetID="2" presetClass="entr" presetSubtype="4" fill="hold" nodeType="clickEffect">
+                                  <p:stCondLst>
+                                    <p:cond delay="0"/>
+                                  </p:stCondLst>
+                                  <p:childTnLst>
+                                    <p:set>
+                                      <p:cBhvr>
+                                        <p:cTn id="24" dur="1" fill="hold">
+                                          <p:stCondLst>
+                                            <p:cond delay="0"/>
+                                          </p:stCondLst>
+                                        </p:cTn>
+                                        <p:tgtEl>
+                                          <p:spTgt spid="3">
+                                            <p:txEl>
+                                              <p:pRg st="5" end="5"/>
+                                            </p:txEl>
+                                          </p:spTgt>
+                                        </p:tgtEl>
+                                        <p:attrNameLst>
+                                          <p:attrName>style.visibility</p:attrName>
+                                        </p:attrNameLst>
+                                      </p:cBhvr>
+                                      <p:to>
+                                        <p:strVal val="visible"/>
+                                      </p:to>
+                                    </p:set>
+                                    <p:anim calcmode="lin" valueType="num">
+                                      <p:cBhvr additive="base">
+                                        <p:cTn id="25" dur="500" fill="hold"/>
+                                        <p:tgtEl>
+                                          <p:spTgt spid="3">
+                                            <p:txEl>
+                                              <p:pRg st="5" end="5"/>
+                                            </p:txEl>
+                                          </p:spTgt>
+                                        </p:tgtEl>
+                                        <p:attrNameLst>
+                                          <p:attrName>ppt_x</p:attrName>
+                                        </p:attrNameLst>
+                                      </p:cBhvr>
+                                      <p:tavLst>
+                                        <p:tav tm="0">
+                                          <p:val>
+                                            <p:strVal val="#ppt_x"/>
+                                          </p:val>
+                                        </p:tav>
+                                        <p:tav tm="100000">
+                                          <p:val>
+                                            <p:strVal val="#ppt_x"/>
+                                          </p:val>
+                                        </p:tav>
+                                      </p:tavLst>
+                                    </p:anim>
+                                    <p:anim calcmode="lin" valueType="num">
+                                      <p:cBhvr additive="base">
+                                        <p:cTn id="26" dur="500" fill="hold"/>
+                                        <p:tgtEl>
+                                          <p:spTgt spid="3">
+                                            <p:txEl>
+                                              <p:pRg st="5" end="5"/>
+                                            </p:txEl>
+                                          </p:spTgt>
+                                        </p:tgtEl>
+                                        <p:attrNameLst>
+                                          <p:attrName>ppt_y</p:attrName>
+                                        </p:attrNameLst>
+                                      </p:cBhvr>
+                                      <p:tavLst>
+                                        <p:tav tm="0">
+                                          <p:val>
+                                            <p:strVal val="1+#ppt_h/2"/>
+                                          </p:val>
+                                        </p:tav>
+                                        <p:tav tm="100000">
+                                          <p:val>
+                                            <p:strVal val="#ppt_y"/>
+                                          </p:val>
+                                        </p:tav>
+                                      </p:tavLst>
+                                    </p:anim>
+                                  </p:childTnLst>
+                                </p:cTn>
+                              </p:par>
+                              <p:par>
+                                <p:cTn id="27" presetID="2" presetClass="entr" presetSubtype="4" fill="hold" nodeType="withEffect">
+                                  <p:stCondLst>
+                                    <p:cond delay="0"/>
+                                  </p:stCondLst>
+                                  <p:childTnLst>
+                                    <p:set>
+                                      <p:cBhvr>
+                                        <p:cTn id="28" dur="1" fill="hold">
+                                          <p:stCondLst>
+                                            <p:cond delay="0"/>
+                                          </p:stCondLst>
+                                        </p:cTn>
+                                        <p:tgtEl>
+                                          <p:spTgt spid="3">
+                                            <p:txEl>
+                                              <p:pRg st="6" end="6"/>
+                                            </p:txEl>
+                                          </p:spTgt>
+                                        </p:tgtEl>
+                                        <p:attrNameLst>
+                                          <p:attrName>style.visibility</p:attrName>
+                                        </p:attrNameLst>
+                                      </p:cBhvr>
+                                      <p:to>
+                                        <p:strVal val="visible"/>
+                                      </p:to>
+                                    </p:set>
+                                    <p:anim calcmode="lin" valueType="num">
+                                      <p:cBhvr additive="base">
+                                        <p:cTn id="29" dur="500" fill="hold"/>
+                                        <p:tgtEl>
+                                          <p:spTgt spid="3">
+                                            <p:txEl>
+                                              <p:pRg st="6" end="6"/>
+                                            </p:txEl>
+                                          </p:spTgt>
+                                        </p:tgtEl>
+                                        <p:attrNameLst>
+                                          <p:attrName>ppt_x</p:attrName>
+                                        </p:attrNameLst>
+                                      </p:cBhvr>
+                                      <p:tavLst>
+                                        <p:tav tm="0">
+                                          <p:val>
+                                            <p:strVal val="#ppt_x"/>
+                                          </p:val>
+                                        </p:tav>
+                                        <p:tav tm="100000">
+                                          <p:val>
+                                            <p:strVal val="#ppt_x"/>
+                                          </p:val>
+                                        </p:tav>
+                                      </p:tavLst>
+                                    </p:anim>
+                                    <p:anim calcmode="lin" valueType="num">
+                                      <p:cBhvr additive="base">
+                                        <p:cTn id="30" dur="500" fill="hold"/>
+                                        <p:tgtEl>
+                                          <p:spTgt spid="3">
+                                            <p:txEl>
+                                              <p:pRg st="6" end="6"/>
+                                            </p:txEl>
+                                          </p:spTgt>
+                                        </p:tgtEl>
+                                        <p:attrNameLst>
+                                          <p:attrName>ppt_y</p:attrName>
+                                        </p:attrNameLst>
+                                      </p:cBhvr>
+                                      <p:tavLst>
+                                        <p:tav tm="0">
+                                          <p:val>
+                                            <p:strVal val="1+#ppt_h/2"/>
+                                          </p:val>
+                                        </p:tav>
+                                        <p:tav tm="100000">
+                                          <p:val>
+                                            <p:strVal val="#ppt_y"/>
+                                          </p:val>
+                                        </p:tav>
+                                      </p:tavLst>
+                                    </p:anim>
+                                  </p:childTnLst>
+                                </p:cTn>
+                              </p:par>
+                              <p:par>
+                                <p:cTn id="31" presetID="2" presetClass="entr" presetSubtype="4" fill="hold" nodeType="withEffect">
+                                  <p:stCondLst>
+                                    <p:cond delay="0"/>
+                                  </p:stCondLst>
+                                  <p:childTnLst>
+                                    <p:set>
+                                      <p:cBhvr>
+                                        <p:cTn id="32" dur="1" fill="hold">
+                                          <p:stCondLst>
+                                            <p:cond delay="0"/>
+                                          </p:stCondLst>
+                                        </p:cTn>
+                                        <p:tgtEl>
+                                          <p:spTgt spid="3">
+                                            <p:txEl>
+                                              <p:pRg st="7" end="7"/>
+                                            </p:txEl>
+                                          </p:spTgt>
+                                        </p:tgtEl>
+                                        <p:attrNameLst>
+                                          <p:attrName>style.visibility</p:attrName>
+                                        </p:attrNameLst>
+                                      </p:cBhvr>
+                                      <p:to>
+                                        <p:strVal val="visible"/>
+                                      </p:to>
+                                    </p:set>
+                                    <p:anim calcmode="lin" valueType="num">
+                                      <p:cBhvr additive="base">
+                                        <p:cTn id="33" dur="500" fill="hold"/>
+                                        <p:tgtEl>
+                                          <p:spTgt spid="3">
+                                            <p:txEl>
+                                              <p:pRg st="7" end="7"/>
+                                            </p:txEl>
+                                          </p:spTgt>
+                                        </p:tgtEl>
+                                        <p:attrNameLst>
+                                          <p:attrName>ppt_x</p:attrName>
+                                        </p:attrNameLst>
+                                      </p:cBhvr>
+                                      <p:tavLst>
+                                        <p:tav tm="0">
+                                          <p:val>
+                                            <p:strVal val="#ppt_x"/>
+                                          </p:val>
+                                        </p:tav>
+                                        <p:tav tm="100000">
+                                          <p:val>
+                                            <p:strVal val="#ppt_x"/>
+                                          </p:val>
+                                        </p:tav>
+                                      </p:tavLst>
+                                    </p:anim>
+                                    <p:anim calcmode="lin" valueType="num">
+                                      <p:cBhvr additive="base">
+                                        <p:cTn id="34" dur="500" fill="hold"/>
+                                        <p:tgtEl>
+                                          <p:spTgt spid="3">
+                                            <p:txEl>
+                                              <p:pRg st="7" end="7"/>
+                                            </p:txEl>
+                                          </p:spTgt>
+                                        </p:tgtEl>
+                                        <p:attrNameLst>
+                                          <p:attrName>ppt_y</p:attrName>
+                                        </p:attrNameLst>
+                                      </p:cBhvr>
+                                      <p:tavLst>
+                                        <p:tav tm="0">
+                                          <p:val>
+                                            <p:strVal val="1+#ppt_h/2"/>
+                                          </p:val>
+                                        </p:tav>
+                                        <p:tav tm="100000">
+                                          <p:val>
+                                            <p:strVal val="#ppt_y"/>
+                                          </p:val>
+                                        </p:tav>
+                                      </p:tavLst>
+                                    </p:anim>
+                                  </p:childTnLst>
+                                </p:cTn>
+                              </p:par>
+                              <p:par>
+                                <p:cTn id="35" presetID="2" presetClass="entr" presetSubtype="4" fill="hold" nodeType="withEffect">
+                                  <p:stCondLst>
+                                    <p:cond delay="0"/>
+                                  </p:stCondLst>
+                                  <p:childTnLst>
+                                    <p:set>
+                                      <p:cBhvr>
+                                        <p:cTn id="36" dur="1" fill="hold">
+                                          <p:stCondLst>
+                                            <p:cond delay="0"/>
+                                          </p:stCondLst>
+                                        </p:cTn>
+                                        <p:tgtEl>
+                                          <p:spTgt spid="3">
+                                            <p:txEl>
+                                              <p:pRg st="8" end="8"/>
+                                            </p:txEl>
+                                          </p:spTgt>
+                                        </p:tgtEl>
+                                        <p:attrNameLst>
+                                          <p:attrName>style.visibility</p:attrName>
+                                        </p:attrNameLst>
+                                      </p:cBhvr>
+                                      <p:to>
+                                        <p:strVal val="visible"/>
+                                      </p:to>
+                                    </p:set>
+                                    <p:anim calcmode="lin" valueType="num">
+                                      <p:cBhvr additive="base">
+                                        <p:cTn id="37" dur="500" fill="hold"/>
+                                        <p:tgtEl>
+                                          <p:spTgt spid="3">
+                                            <p:txEl>
+                                              <p:pRg st="8" end="8"/>
+                                            </p:txEl>
+                                          </p:spTgt>
+                                        </p:tgtEl>
+                                        <p:attrNameLst>
+                                          <p:attrName>ppt_x</p:attrName>
+                                        </p:attrNameLst>
+                                      </p:cBhvr>
+                                      <p:tavLst>
+                                        <p:tav tm="0">
+                                          <p:val>
+                                            <p:strVal val="#ppt_x"/>
+                                          </p:val>
+                                        </p:tav>
+                                        <p:tav tm="100000">
+                                          <p:val>
+                                            <p:strVal val="#ppt_x"/>
+                                          </p:val>
+                                        </p:tav>
+                                      </p:tavLst>
+                                    </p:anim>
+                                    <p:anim calcmode="lin" valueType="num">
+                                      <p:cBhvr additive="base">
+                                        <p:cTn id="38" dur="500" fill="hold"/>
+                                        <p:tgtEl>
+                                          <p:spTgt spid="3">
+                                            <p:txEl>
+                                              <p:pRg st="8" end="8"/>
+                                            </p:txEl>
+                                          </p:spTgt>
+                                        </p:tgtEl>
+                                        <p:attrNameLst>
+                                          <p:attrName>ppt_y</p:attrName>
+                                        </p:attrNameLst>
+                                      </p:cBhvr>
+                                      <p:tavLst>
+                                        <p:tav tm="0">
+                                          <p:val>
+                                            <p:strVal val="1+#ppt_h/2"/>
+                                          </p:val>
+                                        </p:tav>
+                                        <p:tav tm="100000">
+                                          <p:val>
+                                            <p:strVal val="#ppt_y"/>
+                                          </p:val>
+                                        </p:tav>
+                                      </p:tavLst>
+                                    </p:anim>
+                                  </p:childTnLst>
+                                </p:cTn>
+                              </p:par>
+                            </p:childTnLst>
+                          </p:cTn>
+                        </p:par>
+                      </p:childTnLst>
+                    </p:cTn>
+                  </p:par>
+                </p:childTnLst>
+              </p:cTn>
+              <p:prevCondLst>
+                <p:cond evt="onPrev" delay="0">
+                  <p:tgtEl>
+                    <p:sldTgt/>
+                  </p:tgtEl>
+                </p:cond>
+              </p:prevCondLst>
+              <p:nextCondLst>
+                <p:cond evt="onNext" delay="0">
+                  <p:tgtEl>
+                    <p:sldTgt/>
+                  </p:tgtEl>
+                </p:cond>
+              </p:nextCondLst>
+            </p:seq>
+          </p:childTnLst>
+        </p:cTn>
+      </p:par>
+    </p:tnLst>
+  </p:timing>
 </p:sld>
 </file>
 
@@ -6843,6 +10698,752 @@
   <p:clrMapOvr>
     <a:masterClrMapping/>
   </p:clrMapOvr>
+  <p:timing>
+    <p:tnLst>
+      <p:par>
+        <p:cTn id="1" dur="indefinite" restart="never" nodeType="tmRoot">
+          <p:childTnLst>
+            <p:seq concurrent="1" nextAc="seek">
+              <p:cTn id="2" dur="indefinite" nodeType="mainSeq">
+                <p:childTnLst>
+                  <p:par>
+                    <p:cTn id="3" fill="hold">
+                      <p:stCondLst>
+                        <p:cond delay="indefinite"/>
+                      </p:stCondLst>
+                      <p:childTnLst>
+                        <p:par>
+                          <p:cTn id="4" fill="hold">
+                            <p:stCondLst>
+                              <p:cond delay="0"/>
+                            </p:stCondLst>
+                            <p:childTnLst>
+                              <p:par>
+                                <p:cTn id="5" presetID="2" presetClass="entr" presetSubtype="4" fill="hold" nodeType="clickEffect">
+                                  <p:stCondLst>
+                                    <p:cond delay="0"/>
+                                  </p:stCondLst>
+                                  <p:childTnLst>
+                                    <p:set>
+                                      <p:cBhvr>
+                                        <p:cTn id="6" dur="1" fill="hold">
+                                          <p:stCondLst>
+                                            <p:cond delay="0"/>
+                                          </p:stCondLst>
+                                        </p:cTn>
+                                        <p:tgtEl>
+                                          <p:spTgt spid="3">
+                                            <p:txEl>
+                                              <p:pRg st="0" end="0"/>
+                                            </p:txEl>
+                                          </p:spTgt>
+                                        </p:tgtEl>
+                                        <p:attrNameLst>
+                                          <p:attrName>style.visibility</p:attrName>
+                                        </p:attrNameLst>
+                                      </p:cBhvr>
+                                      <p:to>
+                                        <p:strVal val="visible"/>
+                                      </p:to>
+                                    </p:set>
+                                    <p:anim calcmode="lin" valueType="num">
+                                      <p:cBhvr additive="base">
+                                        <p:cTn id="7" dur="500" fill="hold"/>
+                                        <p:tgtEl>
+                                          <p:spTgt spid="3">
+                                            <p:txEl>
+                                              <p:pRg st="0" end="0"/>
+                                            </p:txEl>
+                                          </p:spTgt>
+                                        </p:tgtEl>
+                                        <p:attrNameLst>
+                                          <p:attrName>ppt_x</p:attrName>
+                                        </p:attrNameLst>
+                                      </p:cBhvr>
+                                      <p:tavLst>
+                                        <p:tav tm="0">
+                                          <p:val>
+                                            <p:strVal val="#ppt_x"/>
+                                          </p:val>
+                                        </p:tav>
+                                        <p:tav tm="100000">
+                                          <p:val>
+                                            <p:strVal val="#ppt_x"/>
+                                          </p:val>
+                                        </p:tav>
+                                      </p:tavLst>
+                                    </p:anim>
+                                    <p:anim calcmode="lin" valueType="num">
+                                      <p:cBhvr additive="base">
+                                        <p:cTn id="8" dur="500" fill="hold"/>
+                                        <p:tgtEl>
+                                          <p:spTgt spid="3">
+                                            <p:txEl>
+                                              <p:pRg st="0" end="0"/>
+                                            </p:txEl>
+                                          </p:spTgt>
+                                        </p:tgtEl>
+                                        <p:attrNameLst>
+                                          <p:attrName>ppt_y</p:attrName>
+                                        </p:attrNameLst>
+                                      </p:cBhvr>
+                                      <p:tavLst>
+                                        <p:tav tm="0">
+                                          <p:val>
+                                            <p:strVal val="1+#ppt_h/2"/>
+                                          </p:val>
+                                        </p:tav>
+                                        <p:tav tm="100000">
+                                          <p:val>
+                                            <p:strVal val="#ppt_y"/>
+                                          </p:val>
+                                        </p:tav>
+                                      </p:tavLst>
+                                    </p:anim>
+                                  </p:childTnLst>
+                                </p:cTn>
+                              </p:par>
+                              <p:par>
+                                <p:cTn id="9" presetID="2" presetClass="entr" presetSubtype="4" fill="hold" nodeType="withEffect">
+                                  <p:stCondLst>
+                                    <p:cond delay="0"/>
+                                  </p:stCondLst>
+                                  <p:childTnLst>
+                                    <p:set>
+                                      <p:cBhvr>
+                                        <p:cTn id="10" dur="1" fill="hold">
+                                          <p:stCondLst>
+                                            <p:cond delay="0"/>
+                                          </p:stCondLst>
+                                        </p:cTn>
+                                        <p:tgtEl>
+                                          <p:spTgt spid="3">
+                                            <p:txEl>
+                                              <p:pRg st="1" end="1"/>
+                                            </p:txEl>
+                                          </p:spTgt>
+                                        </p:tgtEl>
+                                        <p:attrNameLst>
+                                          <p:attrName>style.visibility</p:attrName>
+                                        </p:attrNameLst>
+                                      </p:cBhvr>
+                                      <p:to>
+                                        <p:strVal val="visible"/>
+                                      </p:to>
+                                    </p:set>
+                                    <p:anim calcmode="lin" valueType="num">
+                                      <p:cBhvr additive="base">
+                                        <p:cTn id="11" dur="500" fill="hold"/>
+                                        <p:tgtEl>
+                                          <p:spTgt spid="3">
+                                            <p:txEl>
+                                              <p:pRg st="1" end="1"/>
+                                            </p:txEl>
+                                          </p:spTgt>
+                                        </p:tgtEl>
+                                        <p:attrNameLst>
+                                          <p:attrName>ppt_x</p:attrName>
+                                        </p:attrNameLst>
+                                      </p:cBhvr>
+                                      <p:tavLst>
+                                        <p:tav tm="0">
+                                          <p:val>
+                                            <p:strVal val="#ppt_x"/>
+                                          </p:val>
+                                        </p:tav>
+                                        <p:tav tm="100000">
+                                          <p:val>
+                                            <p:strVal val="#ppt_x"/>
+                                          </p:val>
+                                        </p:tav>
+                                      </p:tavLst>
+                                    </p:anim>
+                                    <p:anim calcmode="lin" valueType="num">
+                                      <p:cBhvr additive="base">
+                                        <p:cTn id="12" dur="500" fill="hold"/>
+                                        <p:tgtEl>
+                                          <p:spTgt spid="3">
+                                            <p:txEl>
+                                              <p:pRg st="1" end="1"/>
+                                            </p:txEl>
+                                          </p:spTgt>
+                                        </p:tgtEl>
+                                        <p:attrNameLst>
+                                          <p:attrName>ppt_y</p:attrName>
+                                        </p:attrNameLst>
+                                      </p:cBhvr>
+                                      <p:tavLst>
+                                        <p:tav tm="0">
+                                          <p:val>
+                                            <p:strVal val="1+#ppt_h/2"/>
+                                          </p:val>
+                                        </p:tav>
+                                        <p:tav tm="100000">
+                                          <p:val>
+                                            <p:strVal val="#ppt_y"/>
+                                          </p:val>
+                                        </p:tav>
+                                      </p:tavLst>
+                                    </p:anim>
+                                  </p:childTnLst>
+                                </p:cTn>
+                              </p:par>
+                              <p:par>
+                                <p:cTn id="13" presetID="2" presetClass="entr" presetSubtype="4" fill="hold" nodeType="withEffect">
+                                  <p:stCondLst>
+                                    <p:cond delay="0"/>
+                                  </p:stCondLst>
+                                  <p:childTnLst>
+                                    <p:set>
+                                      <p:cBhvr>
+                                        <p:cTn id="14" dur="1" fill="hold">
+                                          <p:stCondLst>
+                                            <p:cond delay="0"/>
+                                          </p:stCondLst>
+                                        </p:cTn>
+                                        <p:tgtEl>
+                                          <p:spTgt spid="3">
+                                            <p:txEl>
+                                              <p:pRg st="2" end="2"/>
+                                            </p:txEl>
+                                          </p:spTgt>
+                                        </p:tgtEl>
+                                        <p:attrNameLst>
+                                          <p:attrName>style.visibility</p:attrName>
+                                        </p:attrNameLst>
+                                      </p:cBhvr>
+                                      <p:to>
+                                        <p:strVal val="visible"/>
+                                      </p:to>
+                                    </p:set>
+                                    <p:anim calcmode="lin" valueType="num">
+                                      <p:cBhvr additive="base">
+                                        <p:cTn id="15" dur="500" fill="hold"/>
+                                        <p:tgtEl>
+                                          <p:spTgt spid="3">
+                                            <p:txEl>
+                                              <p:pRg st="2" end="2"/>
+                                            </p:txEl>
+                                          </p:spTgt>
+                                        </p:tgtEl>
+                                        <p:attrNameLst>
+                                          <p:attrName>ppt_x</p:attrName>
+                                        </p:attrNameLst>
+                                      </p:cBhvr>
+                                      <p:tavLst>
+                                        <p:tav tm="0">
+                                          <p:val>
+                                            <p:strVal val="#ppt_x"/>
+                                          </p:val>
+                                        </p:tav>
+                                        <p:tav tm="100000">
+                                          <p:val>
+                                            <p:strVal val="#ppt_x"/>
+                                          </p:val>
+                                        </p:tav>
+                                      </p:tavLst>
+                                    </p:anim>
+                                    <p:anim calcmode="lin" valueType="num">
+                                      <p:cBhvr additive="base">
+                                        <p:cTn id="16" dur="500" fill="hold"/>
+                                        <p:tgtEl>
+                                          <p:spTgt spid="3">
+                                            <p:txEl>
+                                              <p:pRg st="2" end="2"/>
+                                            </p:txEl>
+                                          </p:spTgt>
+                                        </p:tgtEl>
+                                        <p:attrNameLst>
+                                          <p:attrName>ppt_y</p:attrName>
+                                        </p:attrNameLst>
+                                      </p:cBhvr>
+                                      <p:tavLst>
+                                        <p:tav tm="0">
+                                          <p:val>
+                                            <p:strVal val="1+#ppt_h/2"/>
+                                          </p:val>
+                                        </p:tav>
+                                        <p:tav tm="100000">
+                                          <p:val>
+                                            <p:strVal val="#ppt_y"/>
+                                          </p:val>
+                                        </p:tav>
+                                      </p:tavLst>
+                                    </p:anim>
+                                  </p:childTnLst>
+                                </p:cTn>
+                              </p:par>
+                              <p:par>
+                                <p:cTn id="17" presetID="2" presetClass="entr" presetSubtype="4" fill="hold" nodeType="withEffect">
+                                  <p:stCondLst>
+                                    <p:cond delay="0"/>
+                                  </p:stCondLst>
+                                  <p:childTnLst>
+                                    <p:set>
+                                      <p:cBhvr>
+                                        <p:cTn id="18" dur="1" fill="hold">
+                                          <p:stCondLst>
+                                            <p:cond delay="0"/>
+                                          </p:stCondLst>
+                                        </p:cTn>
+                                        <p:tgtEl>
+                                          <p:spTgt spid="3">
+                                            <p:txEl>
+                                              <p:pRg st="3" end="3"/>
+                                            </p:txEl>
+                                          </p:spTgt>
+                                        </p:tgtEl>
+                                        <p:attrNameLst>
+                                          <p:attrName>style.visibility</p:attrName>
+                                        </p:attrNameLst>
+                                      </p:cBhvr>
+                                      <p:to>
+                                        <p:strVal val="visible"/>
+                                      </p:to>
+                                    </p:set>
+                                    <p:anim calcmode="lin" valueType="num">
+                                      <p:cBhvr additive="base">
+                                        <p:cTn id="19" dur="500" fill="hold"/>
+                                        <p:tgtEl>
+                                          <p:spTgt spid="3">
+                                            <p:txEl>
+                                              <p:pRg st="3" end="3"/>
+                                            </p:txEl>
+                                          </p:spTgt>
+                                        </p:tgtEl>
+                                        <p:attrNameLst>
+                                          <p:attrName>ppt_x</p:attrName>
+                                        </p:attrNameLst>
+                                      </p:cBhvr>
+                                      <p:tavLst>
+                                        <p:tav tm="0">
+                                          <p:val>
+                                            <p:strVal val="#ppt_x"/>
+                                          </p:val>
+                                        </p:tav>
+                                        <p:tav tm="100000">
+                                          <p:val>
+                                            <p:strVal val="#ppt_x"/>
+                                          </p:val>
+                                        </p:tav>
+                                      </p:tavLst>
+                                    </p:anim>
+                                    <p:anim calcmode="lin" valueType="num">
+                                      <p:cBhvr additive="base">
+                                        <p:cTn id="20" dur="500" fill="hold"/>
+                                        <p:tgtEl>
+                                          <p:spTgt spid="3">
+                                            <p:txEl>
+                                              <p:pRg st="3" end="3"/>
+                                            </p:txEl>
+                                          </p:spTgt>
+                                        </p:tgtEl>
+                                        <p:attrNameLst>
+                                          <p:attrName>ppt_y</p:attrName>
+                                        </p:attrNameLst>
+                                      </p:cBhvr>
+                                      <p:tavLst>
+                                        <p:tav tm="0">
+                                          <p:val>
+                                            <p:strVal val="1+#ppt_h/2"/>
+                                          </p:val>
+                                        </p:tav>
+                                        <p:tav tm="100000">
+                                          <p:val>
+                                            <p:strVal val="#ppt_y"/>
+                                          </p:val>
+                                        </p:tav>
+                                      </p:tavLst>
+                                    </p:anim>
+                                  </p:childTnLst>
+                                </p:cTn>
+                              </p:par>
+                            </p:childTnLst>
+                          </p:cTn>
+                        </p:par>
+                      </p:childTnLst>
+                    </p:cTn>
+                  </p:par>
+                  <p:par>
+                    <p:cTn id="21" fill="hold">
+                      <p:stCondLst>
+                        <p:cond delay="indefinite"/>
+                      </p:stCondLst>
+                      <p:childTnLst>
+                        <p:par>
+                          <p:cTn id="22" fill="hold">
+                            <p:stCondLst>
+                              <p:cond delay="0"/>
+                            </p:stCondLst>
+                            <p:childTnLst>
+                              <p:par>
+                                <p:cTn id="23" presetID="2" presetClass="entr" presetSubtype="4" fill="hold" nodeType="clickEffect">
+                                  <p:stCondLst>
+                                    <p:cond delay="0"/>
+                                  </p:stCondLst>
+                                  <p:childTnLst>
+                                    <p:set>
+                                      <p:cBhvr>
+                                        <p:cTn id="24" dur="1" fill="hold">
+                                          <p:stCondLst>
+                                            <p:cond delay="0"/>
+                                          </p:stCondLst>
+                                        </p:cTn>
+                                        <p:tgtEl>
+                                          <p:spTgt spid="3">
+                                            <p:txEl>
+                                              <p:pRg st="5" end="5"/>
+                                            </p:txEl>
+                                          </p:spTgt>
+                                        </p:tgtEl>
+                                        <p:attrNameLst>
+                                          <p:attrName>style.visibility</p:attrName>
+                                        </p:attrNameLst>
+                                      </p:cBhvr>
+                                      <p:to>
+                                        <p:strVal val="visible"/>
+                                      </p:to>
+                                    </p:set>
+                                    <p:anim calcmode="lin" valueType="num">
+                                      <p:cBhvr additive="base">
+                                        <p:cTn id="25" dur="500" fill="hold"/>
+                                        <p:tgtEl>
+                                          <p:spTgt spid="3">
+                                            <p:txEl>
+                                              <p:pRg st="5" end="5"/>
+                                            </p:txEl>
+                                          </p:spTgt>
+                                        </p:tgtEl>
+                                        <p:attrNameLst>
+                                          <p:attrName>ppt_x</p:attrName>
+                                        </p:attrNameLst>
+                                      </p:cBhvr>
+                                      <p:tavLst>
+                                        <p:tav tm="0">
+                                          <p:val>
+                                            <p:strVal val="#ppt_x"/>
+                                          </p:val>
+                                        </p:tav>
+                                        <p:tav tm="100000">
+                                          <p:val>
+                                            <p:strVal val="#ppt_x"/>
+                                          </p:val>
+                                        </p:tav>
+                                      </p:tavLst>
+                                    </p:anim>
+                                    <p:anim calcmode="lin" valueType="num">
+                                      <p:cBhvr additive="base">
+                                        <p:cTn id="26" dur="500" fill="hold"/>
+                                        <p:tgtEl>
+                                          <p:spTgt spid="3">
+                                            <p:txEl>
+                                              <p:pRg st="5" end="5"/>
+                                            </p:txEl>
+                                          </p:spTgt>
+                                        </p:tgtEl>
+                                        <p:attrNameLst>
+                                          <p:attrName>ppt_y</p:attrName>
+                                        </p:attrNameLst>
+                                      </p:cBhvr>
+                                      <p:tavLst>
+                                        <p:tav tm="0">
+                                          <p:val>
+                                            <p:strVal val="1+#ppt_h/2"/>
+                                          </p:val>
+                                        </p:tav>
+                                        <p:tav tm="100000">
+                                          <p:val>
+                                            <p:strVal val="#ppt_y"/>
+                                          </p:val>
+                                        </p:tav>
+                                      </p:tavLst>
+                                    </p:anim>
+                                  </p:childTnLst>
+                                </p:cTn>
+                              </p:par>
+                              <p:par>
+                                <p:cTn id="27" presetID="2" presetClass="entr" presetSubtype="4" fill="hold" nodeType="withEffect">
+                                  <p:stCondLst>
+                                    <p:cond delay="0"/>
+                                  </p:stCondLst>
+                                  <p:childTnLst>
+                                    <p:set>
+                                      <p:cBhvr>
+                                        <p:cTn id="28" dur="1" fill="hold">
+                                          <p:stCondLst>
+                                            <p:cond delay="0"/>
+                                          </p:stCondLst>
+                                        </p:cTn>
+                                        <p:tgtEl>
+                                          <p:spTgt spid="3">
+                                            <p:txEl>
+                                              <p:pRg st="6" end="6"/>
+                                            </p:txEl>
+                                          </p:spTgt>
+                                        </p:tgtEl>
+                                        <p:attrNameLst>
+                                          <p:attrName>style.visibility</p:attrName>
+                                        </p:attrNameLst>
+                                      </p:cBhvr>
+                                      <p:to>
+                                        <p:strVal val="visible"/>
+                                      </p:to>
+                                    </p:set>
+                                    <p:anim calcmode="lin" valueType="num">
+                                      <p:cBhvr additive="base">
+                                        <p:cTn id="29" dur="500" fill="hold"/>
+                                        <p:tgtEl>
+                                          <p:spTgt spid="3">
+                                            <p:txEl>
+                                              <p:pRg st="6" end="6"/>
+                                            </p:txEl>
+                                          </p:spTgt>
+                                        </p:tgtEl>
+                                        <p:attrNameLst>
+                                          <p:attrName>ppt_x</p:attrName>
+                                        </p:attrNameLst>
+                                      </p:cBhvr>
+                                      <p:tavLst>
+                                        <p:tav tm="0">
+                                          <p:val>
+                                            <p:strVal val="#ppt_x"/>
+                                          </p:val>
+                                        </p:tav>
+                                        <p:tav tm="100000">
+                                          <p:val>
+                                            <p:strVal val="#ppt_x"/>
+                                          </p:val>
+                                        </p:tav>
+                                      </p:tavLst>
+                                    </p:anim>
+                                    <p:anim calcmode="lin" valueType="num">
+                                      <p:cBhvr additive="base">
+                                        <p:cTn id="30" dur="500" fill="hold"/>
+                                        <p:tgtEl>
+                                          <p:spTgt spid="3">
+                                            <p:txEl>
+                                              <p:pRg st="6" end="6"/>
+                                            </p:txEl>
+                                          </p:spTgt>
+                                        </p:tgtEl>
+                                        <p:attrNameLst>
+                                          <p:attrName>ppt_y</p:attrName>
+                                        </p:attrNameLst>
+                                      </p:cBhvr>
+                                      <p:tavLst>
+                                        <p:tav tm="0">
+                                          <p:val>
+                                            <p:strVal val="1+#ppt_h/2"/>
+                                          </p:val>
+                                        </p:tav>
+                                        <p:tav tm="100000">
+                                          <p:val>
+                                            <p:strVal val="#ppt_y"/>
+                                          </p:val>
+                                        </p:tav>
+                                      </p:tavLst>
+                                    </p:anim>
+                                  </p:childTnLst>
+                                </p:cTn>
+                              </p:par>
+                              <p:par>
+                                <p:cTn id="31" presetID="2" presetClass="entr" presetSubtype="4" fill="hold" nodeType="withEffect">
+                                  <p:stCondLst>
+                                    <p:cond delay="0"/>
+                                  </p:stCondLst>
+                                  <p:childTnLst>
+                                    <p:set>
+                                      <p:cBhvr>
+                                        <p:cTn id="32" dur="1" fill="hold">
+                                          <p:stCondLst>
+                                            <p:cond delay="0"/>
+                                          </p:stCondLst>
+                                        </p:cTn>
+                                        <p:tgtEl>
+                                          <p:spTgt spid="3">
+                                            <p:txEl>
+                                              <p:pRg st="7" end="7"/>
+                                            </p:txEl>
+                                          </p:spTgt>
+                                        </p:tgtEl>
+                                        <p:attrNameLst>
+                                          <p:attrName>style.visibility</p:attrName>
+                                        </p:attrNameLst>
+                                      </p:cBhvr>
+                                      <p:to>
+                                        <p:strVal val="visible"/>
+                                      </p:to>
+                                    </p:set>
+                                    <p:anim calcmode="lin" valueType="num">
+                                      <p:cBhvr additive="base">
+                                        <p:cTn id="33" dur="500" fill="hold"/>
+                                        <p:tgtEl>
+                                          <p:spTgt spid="3">
+                                            <p:txEl>
+                                              <p:pRg st="7" end="7"/>
+                                            </p:txEl>
+                                          </p:spTgt>
+                                        </p:tgtEl>
+                                        <p:attrNameLst>
+                                          <p:attrName>ppt_x</p:attrName>
+                                        </p:attrNameLst>
+                                      </p:cBhvr>
+                                      <p:tavLst>
+                                        <p:tav tm="0">
+                                          <p:val>
+                                            <p:strVal val="#ppt_x"/>
+                                          </p:val>
+                                        </p:tav>
+                                        <p:tav tm="100000">
+                                          <p:val>
+                                            <p:strVal val="#ppt_x"/>
+                                          </p:val>
+                                        </p:tav>
+                                      </p:tavLst>
+                                    </p:anim>
+                                    <p:anim calcmode="lin" valueType="num">
+                                      <p:cBhvr additive="base">
+                                        <p:cTn id="34" dur="500" fill="hold"/>
+                                        <p:tgtEl>
+                                          <p:spTgt spid="3">
+                                            <p:txEl>
+                                              <p:pRg st="7" end="7"/>
+                                            </p:txEl>
+                                          </p:spTgt>
+                                        </p:tgtEl>
+                                        <p:attrNameLst>
+                                          <p:attrName>ppt_y</p:attrName>
+                                        </p:attrNameLst>
+                                      </p:cBhvr>
+                                      <p:tavLst>
+                                        <p:tav tm="0">
+                                          <p:val>
+                                            <p:strVal val="1+#ppt_h/2"/>
+                                          </p:val>
+                                        </p:tav>
+                                        <p:tav tm="100000">
+                                          <p:val>
+                                            <p:strVal val="#ppt_y"/>
+                                          </p:val>
+                                        </p:tav>
+                                      </p:tavLst>
+                                    </p:anim>
+                                  </p:childTnLst>
+                                </p:cTn>
+                              </p:par>
+                              <p:par>
+                                <p:cTn id="35" presetID="2" presetClass="entr" presetSubtype="4" fill="hold" nodeType="withEffect">
+                                  <p:stCondLst>
+                                    <p:cond delay="0"/>
+                                  </p:stCondLst>
+                                  <p:childTnLst>
+                                    <p:set>
+                                      <p:cBhvr>
+                                        <p:cTn id="36" dur="1" fill="hold">
+                                          <p:stCondLst>
+                                            <p:cond delay="0"/>
+                                          </p:stCondLst>
+                                        </p:cTn>
+                                        <p:tgtEl>
+                                          <p:spTgt spid="3">
+                                            <p:txEl>
+                                              <p:pRg st="8" end="8"/>
+                                            </p:txEl>
+                                          </p:spTgt>
+                                        </p:tgtEl>
+                                        <p:attrNameLst>
+                                          <p:attrName>style.visibility</p:attrName>
+                                        </p:attrNameLst>
+                                      </p:cBhvr>
+                                      <p:to>
+                                        <p:strVal val="visible"/>
+                                      </p:to>
+                                    </p:set>
+                                    <p:anim calcmode="lin" valueType="num">
+                                      <p:cBhvr additive="base">
+                                        <p:cTn id="37" dur="500" fill="hold"/>
+                                        <p:tgtEl>
+                                          <p:spTgt spid="3">
+                                            <p:txEl>
+                                              <p:pRg st="8" end="8"/>
+                                            </p:txEl>
+                                          </p:spTgt>
+                                        </p:tgtEl>
+                                        <p:attrNameLst>
+                                          <p:attrName>ppt_x</p:attrName>
+                                        </p:attrNameLst>
+                                      </p:cBhvr>
+                                      <p:tavLst>
+                                        <p:tav tm="0">
+                                          <p:val>
+                                            <p:strVal val="#ppt_x"/>
+                                          </p:val>
+                                        </p:tav>
+                                        <p:tav tm="100000">
+                                          <p:val>
+                                            <p:strVal val="#ppt_x"/>
+                                          </p:val>
+                                        </p:tav>
+                                      </p:tavLst>
+                                    </p:anim>
+                                    <p:anim calcmode="lin" valueType="num">
+                                      <p:cBhvr additive="base">
+                                        <p:cTn id="38" dur="500" fill="hold"/>
+                                        <p:tgtEl>
+                                          <p:spTgt spid="3">
+                                            <p:txEl>
+                                              <p:pRg st="8" end="8"/>
+                                            </p:txEl>
+                                          </p:spTgt>
+                                        </p:tgtEl>
+                                        <p:attrNameLst>
+                                          <p:attrName>ppt_y</p:attrName>
+                                        </p:attrNameLst>
+                                      </p:cBhvr>
+                                      <p:tavLst>
+                                        <p:tav tm="0">
+                                          <p:val>
+                                            <p:strVal val="1+#ppt_h/2"/>
+                                          </p:val>
+                                        </p:tav>
+                                        <p:tav tm="100000">
+                                          <p:val>
+                                            <p:strVal val="#ppt_y"/>
+                                          </p:val>
+                                        </p:tav>
+                                      </p:tavLst>
+                                    </p:anim>
+                                  </p:childTnLst>
+                                </p:cTn>
+                              </p:par>
+                            </p:childTnLst>
+                          </p:cTn>
+                        </p:par>
+                      </p:childTnLst>
+                    </p:cTn>
+                  </p:par>
+                </p:childTnLst>
+              </p:cTn>
+              <p:prevCondLst>
+                <p:cond evt="onPrev" delay="0">
+                  <p:tgtEl>
+                    <p:sldTgt/>
+                  </p:tgtEl>
+                </p:cond>
+              </p:prevCondLst>
+              <p:nextCondLst>
+                <p:cond evt="onNext" delay="0">
+                  <p:tgtEl>
+                    <p:sldTgt/>
+                  </p:tgtEl>
+                </p:cond>
+              </p:nextCondLst>
+            </p:seq>
+          </p:childTnLst>
+        </p:cTn>
+      </p:par>
+    </p:tnLst>
+  </p:timing>
 </p:sld>
 </file>
 
@@ -7016,6 +11617,92 @@
   <p:clrMapOvr>
     <a:masterClrMapping/>
   </p:clrMapOvr>
+  <p:timing>
+    <p:tnLst>
+      <p:par>
+        <p:cTn id="1" dur="indefinite" restart="never" nodeType="tmRoot">
+          <p:childTnLst>
+            <p:seq concurrent="1" nextAc="seek">
+              <p:cTn id="2" dur="indefinite" nodeType="mainSeq">
+                <p:childTnLst>
+                  <p:par>
+                    <p:cTn id="3" fill="hold">
+                      <p:stCondLst>
+                        <p:cond delay="indefinite"/>
+                      </p:stCondLst>
+                      <p:childTnLst>
+                        <p:par>
+                          <p:cTn id="4" fill="hold">
+                            <p:stCondLst>
+                              <p:cond delay="0"/>
+                            </p:stCondLst>
+                            <p:childTnLst>
+                              <p:par>
+                                <p:cTn id="5" presetID="9" presetClass="entr" presetSubtype="0" fill="hold" grpId="0" nodeType="clickEffect">
+                                  <p:stCondLst>
+                                    <p:cond delay="0"/>
+                                  </p:stCondLst>
+                                  <p:childTnLst>
+                                    <p:set>
+                                      <p:cBhvr>
+                                        <p:cTn id="6" dur="1" fill="hold">
+                                          <p:stCondLst>
+                                            <p:cond delay="0"/>
+                                          </p:stCondLst>
+                                        </p:cTn>
+                                        <p:tgtEl>
+                                          <p:spTgt spid="4"/>
+                                        </p:tgtEl>
+                                        <p:attrNameLst>
+                                          <p:attrName>style.visibility</p:attrName>
+                                        </p:attrNameLst>
+                                      </p:cBhvr>
+                                      <p:to>
+                                        <p:strVal val="visible"/>
+                                      </p:to>
+                                    </p:set>
+                                    <p:animEffect transition="in" filter="dissolve">
+                                      <p:cBhvr>
+                                        <p:cTn id="7" dur="500"/>
+                                        <p:tgtEl>
+                                          <p:spTgt spid="4"/>
+                                        </p:tgtEl>
+                                      </p:cBhvr>
+                                    </p:animEffect>
+                                  </p:childTnLst>
+                                </p:cTn>
+                              </p:par>
+                            </p:childTnLst>
+                          </p:cTn>
+                        </p:par>
+                      </p:childTnLst>
+                    </p:cTn>
+                  </p:par>
+                </p:childTnLst>
+              </p:cTn>
+              <p:prevCondLst>
+                <p:cond evt="onPrev" delay="0">
+                  <p:tgtEl>
+                    <p:sldTgt/>
+                  </p:tgtEl>
+                </p:cond>
+              </p:prevCondLst>
+              <p:nextCondLst>
+                <p:cond evt="onNext" delay="0">
+                  <p:tgtEl>
+                    <p:sldTgt/>
+                  </p:tgtEl>
+                </p:cond>
+              </p:nextCondLst>
+            </p:seq>
+          </p:childTnLst>
+        </p:cTn>
+      </p:par>
+    </p:tnLst>
+    <p:bldLst>
+      <p:bldP spid="4" grpId="0" animBg="1"/>
+    </p:bldLst>
+  </p:timing>
 </p:sld>
 </file>
 
@@ -7220,6 +11907,345 @@
   <p:clrMapOvr>
     <a:masterClrMapping/>
   </p:clrMapOvr>
+  <p:timing>
+    <p:tnLst>
+      <p:par>
+        <p:cTn id="1" dur="indefinite" restart="never" nodeType="tmRoot">
+          <p:childTnLst>
+            <p:seq concurrent="1" nextAc="seek">
+              <p:cTn id="2" dur="indefinite" nodeType="mainSeq">
+                <p:childTnLst>
+                  <p:par>
+                    <p:cTn id="3" fill="hold">
+                      <p:stCondLst>
+                        <p:cond delay="indefinite"/>
+                      </p:stCondLst>
+                      <p:childTnLst>
+                        <p:par>
+                          <p:cTn id="4" fill="hold">
+                            <p:stCondLst>
+                              <p:cond delay="0"/>
+                            </p:stCondLst>
+                            <p:childTnLst>
+                              <p:par>
+                                <p:cTn id="5" presetID="2" presetClass="entr" presetSubtype="4" fill="hold" nodeType="clickEffect">
+                                  <p:stCondLst>
+                                    <p:cond delay="0"/>
+                                  </p:stCondLst>
+                                  <p:childTnLst>
+                                    <p:set>
+                                      <p:cBhvr>
+                                        <p:cTn id="6" dur="1" fill="hold">
+                                          <p:stCondLst>
+                                            <p:cond delay="0"/>
+                                          </p:stCondLst>
+                                        </p:cTn>
+                                        <p:tgtEl>
+                                          <p:spTgt spid="148">
+                                            <p:txEl>
+                                              <p:pRg st="2" end="2"/>
+                                            </p:txEl>
+                                          </p:spTgt>
+                                        </p:tgtEl>
+                                        <p:attrNameLst>
+                                          <p:attrName>style.visibility</p:attrName>
+                                        </p:attrNameLst>
+                                      </p:cBhvr>
+                                      <p:to>
+                                        <p:strVal val="visible"/>
+                                      </p:to>
+                                    </p:set>
+                                    <p:anim calcmode="lin" valueType="num">
+                                      <p:cBhvr additive="base">
+                                        <p:cTn id="7" dur="500" fill="hold"/>
+                                        <p:tgtEl>
+                                          <p:spTgt spid="148">
+                                            <p:txEl>
+                                              <p:pRg st="2" end="2"/>
+                                            </p:txEl>
+                                          </p:spTgt>
+                                        </p:tgtEl>
+                                        <p:attrNameLst>
+                                          <p:attrName>ppt_x</p:attrName>
+                                        </p:attrNameLst>
+                                      </p:cBhvr>
+                                      <p:tavLst>
+                                        <p:tav tm="0">
+                                          <p:val>
+                                            <p:strVal val="#ppt_x"/>
+                                          </p:val>
+                                        </p:tav>
+                                        <p:tav tm="100000">
+                                          <p:val>
+                                            <p:strVal val="#ppt_x"/>
+                                          </p:val>
+                                        </p:tav>
+                                      </p:tavLst>
+                                    </p:anim>
+                                    <p:anim calcmode="lin" valueType="num">
+                                      <p:cBhvr additive="base">
+                                        <p:cTn id="8" dur="500" fill="hold"/>
+                                        <p:tgtEl>
+                                          <p:spTgt spid="148">
+                                            <p:txEl>
+                                              <p:pRg st="2" end="2"/>
+                                            </p:txEl>
+                                          </p:spTgt>
+                                        </p:tgtEl>
+                                        <p:attrNameLst>
+                                          <p:attrName>ppt_y</p:attrName>
+                                        </p:attrNameLst>
+                                      </p:cBhvr>
+                                      <p:tavLst>
+                                        <p:tav tm="0">
+                                          <p:val>
+                                            <p:strVal val="1+#ppt_h/2"/>
+                                          </p:val>
+                                        </p:tav>
+                                        <p:tav tm="100000">
+                                          <p:val>
+                                            <p:strVal val="#ppt_y"/>
+                                          </p:val>
+                                        </p:tav>
+                                      </p:tavLst>
+                                    </p:anim>
+                                  </p:childTnLst>
+                                </p:cTn>
+                              </p:par>
+                            </p:childTnLst>
+                          </p:cTn>
+                        </p:par>
+                      </p:childTnLst>
+                    </p:cTn>
+                  </p:par>
+                  <p:par>
+                    <p:cTn id="9" fill="hold">
+                      <p:stCondLst>
+                        <p:cond delay="indefinite"/>
+                      </p:stCondLst>
+                      <p:childTnLst>
+                        <p:par>
+                          <p:cTn id="10" fill="hold">
+                            <p:stCondLst>
+                              <p:cond delay="0"/>
+                            </p:stCondLst>
+                            <p:childTnLst>
+                              <p:par>
+                                <p:cTn id="11" presetID="2" presetClass="entr" presetSubtype="4" fill="hold" nodeType="clickEffect">
+                                  <p:stCondLst>
+                                    <p:cond delay="0"/>
+                                  </p:stCondLst>
+                                  <p:childTnLst>
+                                    <p:set>
+                                      <p:cBhvr>
+                                        <p:cTn id="12" dur="1" fill="hold">
+                                          <p:stCondLst>
+                                            <p:cond delay="0"/>
+                                          </p:stCondLst>
+                                        </p:cTn>
+                                        <p:tgtEl>
+                                          <p:spTgt spid="148">
+                                            <p:txEl>
+                                              <p:pRg st="3" end="3"/>
+                                            </p:txEl>
+                                          </p:spTgt>
+                                        </p:tgtEl>
+                                        <p:attrNameLst>
+                                          <p:attrName>style.visibility</p:attrName>
+                                        </p:attrNameLst>
+                                      </p:cBhvr>
+                                      <p:to>
+                                        <p:strVal val="visible"/>
+                                      </p:to>
+                                    </p:set>
+                                    <p:anim calcmode="lin" valueType="num">
+                                      <p:cBhvr additive="base">
+                                        <p:cTn id="13" dur="500" fill="hold"/>
+                                        <p:tgtEl>
+                                          <p:spTgt spid="148">
+                                            <p:txEl>
+                                              <p:pRg st="3" end="3"/>
+                                            </p:txEl>
+                                          </p:spTgt>
+                                        </p:tgtEl>
+                                        <p:attrNameLst>
+                                          <p:attrName>ppt_x</p:attrName>
+                                        </p:attrNameLst>
+                                      </p:cBhvr>
+                                      <p:tavLst>
+                                        <p:tav tm="0">
+                                          <p:val>
+                                            <p:strVal val="#ppt_x"/>
+                                          </p:val>
+                                        </p:tav>
+                                        <p:tav tm="100000">
+                                          <p:val>
+                                            <p:strVal val="#ppt_x"/>
+                                          </p:val>
+                                        </p:tav>
+                                      </p:tavLst>
+                                    </p:anim>
+                                    <p:anim calcmode="lin" valueType="num">
+                                      <p:cBhvr additive="base">
+                                        <p:cTn id="14" dur="500" fill="hold"/>
+                                        <p:tgtEl>
+                                          <p:spTgt spid="148">
+                                            <p:txEl>
+                                              <p:pRg st="3" end="3"/>
+                                            </p:txEl>
+                                          </p:spTgt>
+                                        </p:tgtEl>
+                                        <p:attrNameLst>
+                                          <p:attrName>ppt_y</p:attrName>
+                                        </p:attrNameLst>
+                                      </p:cBhvr>
+                                      <p:tavLst>
+                                        <p:tav tm="0">
+                                          <p:val>
+                                            <p:strVal val="1+#ppt_h/2"/>
+                                          </p:val>
+                                        </p:tav>
+                                        <p:tav tm="100000">
+                                          <p:val>
+                                            <p:strVal val="#ppt_y"/>
+                                          </p:val>
+                                        </p:tav>
+                                      </p:tavLst>
+                                    </p:anim>
+                                  </p:childTnLst>
+                                </p:cTn>
+                              </p:par>
+                            </p:childTnLst>
+                          </p:cTn>
+                        </p:par>
+                      </p:childTnLst>
+                    </p:cTn>
+                  </p:par>
+                  <p:par>
+                    <p:cTn id="15" fill="hold">
+                      <p:stCondLst>
+                        <p:cond delay="indefinite"/>
+                      </p:stCondLst>
+                      <p:childTnLst>
+                        <p:par>
+                          <p:cTn id="16" fill="hold">
+                            <p:stCondLst>
+                              <p:cond delay="0"/>
+                            </p:stCondLst>
+                            <p:childTnLst>
+                              <p:par>
+                                <p:cTn id="17" presetID="2" presetClass="entr" presetSubtype="4" fill="hold" nodeType="clickEffect">
+                                  <p:stCondLst>
+                                    <p:cond delay="0"/>
+                                  </p:stCondLst>
+                                  <p:childTnLst>
+                                    <p:set>
+                                      <p:cBhvr>
+                                        <p:cTn id="18" dur="1" fill="hold">
+                                          <p:stCondLst>
+                                            <p:cond delay="0"/>
+                                          </p:stCondLst>
+                                        </p:cTn>
+                                        <p:tgtEl>
+                                          <p:spTgt spid="148">
+                                            <p:txEl>
+                                              <p:pRg st="5" end="5"/>
+                                            </p:txEl>
+                                          </p:spTgt>
+                                        </p:tgtEl>
+                                        <p:attrNameLst>
+                                          <p:attrName>style.visibility</p:attrName>
+                                        </p:attrNameLst>
+                                      </p:cBhvr>
+                                      <p:to>
+                                        <p:strVal val="visible"/>
+                                      </p:to>
+                                    </p:set>
+                                    <p:anim calcmode="lin" valueType="num">
+                                      <p:cBhvr additive="base">
+                                        <p:cTn id="19" dur="500" fill="hold"/>
+                                        <p:tgtEl>
+                                          <p:spTgt spid="148">
+                                            <p:txEl>
+                                              <p:pRg st="5" end="5"/>
+                                            </p:txEl>
+                                          </p:spTgt>
+                                        </p:tgtEl>
+                                        <p:attrNameLst>
+                                          <p:attrName>ppt_x</p:attrName>
+                                        </p:attrNameLst>
+                                      </p:cBhvr>
+                                      <p:tavLst>
+                                        <p:tav tm="0">
+                                          <p:val>
+                                            <p:strVal val="#ppt_x"/>
+                                          </p:val>
+                                        </p:tav>
+                                        <p:tav tm="100000">
+                                          <p:val>
+                                            <p:strVal val="#ppt_x"/>
+                                          </p:val>
+                                        </p:tav>
+                                      </p:tavLst>
+                                    </p:anim>
+                                    <p:anim calcmode="lin" valueType="num">
+                                      <p:cBhvr additive="base">
+                                        <p:cTn id="20" dur="500" fill="hold"/>
+                                        <p:tgtEl>
+                                          <p:spTgt spid="148">
+                                            <p:txEl>
+                                              <p:pRg st="5" end="5"/>
+                                            </p:txEl>
+                                          </p:spTgt>
+                                        </p:tgtEl>
+                                        <p:attrNameLst>
+                                          <p:attrName>ppt_y</p:attrName>
+                                        </p:attrNameLst>
+                                      </p:cBhvr>
+                                      <p:tavLst>
+                                        <p:tav tm="0">
+                                          <p:val>
+                                            <p:strVal val="1+#ppt_h/2"/>
+                                          </p:val>
+                                        </p:tav>
+                                        <p:tav tm="100000">
+                                          <p:val>
+                                            <p:strVal val="#ppt_y"/>
+                                          </p:val>
+                                        </p:tav>
+                                      </p:tavLst>
+                                    </p:anim>
+                                  </p:childTnLst>
+                                </p:cTn>
+                              </p:par>
+                            </p:childTnLst>
+                          </p:cTn>
+                        </p:par>
+                      </p:childTnLst>
+                    </p:cTn>
+                  </p:par>
+                </p:childTnLst>
+              </p:cTn>
+              <p:prevCondLst>
+                <p:cond evt="onPrev" delay="0">
+                  <p:tgtEl>
+                    <p:sldTgt/>
+                  </p:tgtEl>
+                </p:cond>
+              </p:prevCondLst>
+              <p:nextCondLst>
+                <p:cond evt="onNext" delay="0">
+                  <p:tgtEl>
+                    <p:sldTgt/>
+                  </p:tgtEl>
+                </p:cond>
+              </p:nextCondLst>
+            </p:seq>
+          </p:childTnLst>
+        </p:cTn>
+      </p:par>
+    </p:tnLst>
+  </p:timing>
 </p:sld>
 </file>
 
@@ -7436,7 +12462,7 @@
           </a:prstGeom>
           <a:extLst>
             <a:ext uri="{C572A759-6A51-4108-AA02-DFA0A04FC94B}">
-              <ma14:wrappingTextBoxFlag xmlns:ma14="http://schemas.microsoft.com/office/mac/drawingml/2011/main" xmlns="" val="1"/>
+              <ma14:wrappingTextBoxFlag xmlns="" xmlns:ma14="http://schemas.microsoft.com/office/mac/drawingml/2011/main" val="1"/>
             </a:ext>
           </a:extLst>
         </p:spPr>
@@ -7468,6 +12494,654 @@
   <p:clrMapOvr>
     <a:masterClrMapping/>
   </p:clrMapOvr>
+  <p:timing>
+    <p:tnLst>
+      <p:par>
+        <p:cTn id="1" dur="indefinite" restart="never" nodeType="tmRoot">
+          <p:childTnLst>
+            <p:seq concurrent="1" nextAc="seek">
+              <p:cTn id="2" dur="indefinite" nodeType="mainSeq">
+                <p:childTnLst>
+                  <p:par>
+                    <p:cTn id="3" fill="hold">
+                      <p:stCondLst>
+                        <p:cond delay="indefinite"/>
+                      </p:stCondLst>
+                      <p:childTnLst>
+                        <p:par>
+                          <p:cTn id="4" fill="hold">
+                            <p:stCondLst>
+                              <p:cond delay="0"/>
+                            </p:stCondLst>
+                            <p:childTnLst>
+                              <p:par>
+                                <p:cTn id="5" presetID="2" presetClass="entr" presetSubtype="4" fill="hold" nodeType="clickEffect">
+                                  <p:stCondLst>
+                                    <p:cond delay="0"/>
+                                  </p:stCondLst>
+                                  <p:childTnLst>
+                                    <p:set>
+                                      <p:cBhvr>
+                                        <p:cTn id="6" dur="1" fill="hold">
+                                          <p:stCondLst>
+                                            <p:cond delay="0"/>
+                                          </p:stCondLst>
+                                        </p:cTn>
+                                        <p:tgtEl>
+                                          <p:spTgt spid="165">
+                                            <p:txEl>
+                                              <p:pRg st="0" end="0"/>
+                                            </p:txEl>
+                                          </p:spTgt>
+                                        </p:tgtEl>
+                                        <p:attrNameLst>
+                                          <p:attrName>style.visibility</p:attrName>
+                                        </p:attrNameLst>
+                                      </p:cBhvr>
+                                      <p:to>
+                                        <p:strVal val="visible"/>
+                                      </p:to>
+                                    </p:set>
+                                    <p:anim calcmode="lin" valueType="num">
+                                      <p:cBhvr additive="base">
+                                        <p:cTn id="7" dur="500" fill="hold"/>
+                                        <p:tgtEl>
+                                          <p:spTgt spid="165">
+                                            <p:txEl>
+                                              <p:pRg st="0" end="0"/>
+                                            </p:txEl>
+                                          </p:spTgt>
+                                        </p:tgtEl>
+                                        <p:attrNameLst>
+                                          <p:attrName>ppt_x</p:attrName>
+                                        </p:attrNameLst>
+                                      </p:cBhvr>
+                                      <p:tavLst>
+                                        <p:tav tm="0">
+                                          <p:val>
+                                            <p:strVal val="#ppt_x"/>
+                                          </p:val>
+                                        </p:tav>
+                                        <p:tav tm="100000">
+                                          <p:val>
+                                            <p:strVal val="#ppt_x"/>
+                                          </p:val>
+                                        </p:tav>
+                                      </p:tavLst>
+                                    </p:anim>
+                                    <p:anim calcmode="lin" valueType="num">
+                                      <p:cBhvr additive="base">
+                                        <p:cTn id="8" dur="500" fill="hold"/>
+                                        <p:tgtEl>
+                                          <p:spTgt spid="165">
+                                            <p:txEl>
+                                              <p:pRg st="0" end="0"/>
+                                            </p:txEl>
+                                          </p:spTgt>
+                                        </p:tgtEl>
+                                        <p:attrNameLst>
+                                          <p:attrName>ppt_y</p:attrName>
+                                        </p:attrNameLst>
+                                      </p:cBhvr>
+                                      <p:tavLst>
+                                        <p:tav tm="0">
+                                          <p:val>
+                                            <p:strVal val="1+#ppt_h/2"/>
+                                          </p:val>
+                                        </p:tav>
+                                        <p:tav tm="100000">
+                                          <p:val>
+                                            <p:strVal val="#ppt_y"/>
+                                          </p:val>
+                                        </p:tav>
+                                      </p:tavLst>
+                                    </p:anim>
+                                  </p:childTnLst>
+                                </p:cTn>
+                              </p:par>
+                            </p:childTnLst>
+                          </p:cTn>
+                        </p:par>
+                      </p:childTnLst>
+                    </p:cTn>
+                  </p:par>
+                  <p:par>
+                    <p:cTn id="9" fill="hold">
+                      <p:stCondLst>
+                        <p:cond delay="indefinite"/>
+                      </p:stCondLst>
+                      <p:childTnLst>
+                        <p:par>
+                          <p:cTn id="10" fill="hold">
+                            <p:stCondLst>
+                              <p:cond delay="0"/>
+                            </p:stCondLst>
+                            <p:childTnLst>
+                              <p:par>
+                                <p:cTn id="11" presetID="2" presetClass="entr" presetSubtype="4" fill="hold" nodeType="clickEffect">
+                                  <p:stCondLst>
+                                    <p:cond delay="0"/>
+                                  </p:stCondLst>
+                                  <p:childTnLst>
+                                    <p:set>
+                                      <p:cBhvr>
+                                        <p:cTn id="12" dur="1" fill="hold">
+                                          <p:stCondLst>
+                                            <p:cond delay="0"/>
+                                          </p:stCondLst>
+                                        </p:cTn>
+                                        <p:tgtEl>
+                                          <p:spTgt spid="165">
+                                            <p:txEl>
+                                              <p:pRg st="1" end="1"/>
+                                            </p:txEl>
+                                          </p:spTgt>
+                                        </p:tgtEl>
+                                        <p:attrNameLst>
+                                          <p:attrName>style.visibility</p:attrName>
+                                        </p:attrNameLst>
+                                      </p:cBhvr>
+                                      <p:to>
+                                        <p:strVal val="visible"/>
+                                      </p:to>
+                                    </p:set>
+                                    <p:anim calcmode="lin" valueType="num">
+                                      <p:cBhvr additive="base">
+                                        <p:cTn id="13" dur="500" fill="hold"/>
+                                        <p:tgtEl>
+                                          <p:spTgt spid="165">
+                                            <p:txEl>
+                                              <p:pRg st="1" end="1"/>
+                                            </p:txEl>
+                                          </p:spTgt>
+                                        </p:tgtEl>
+                                        <p:attrNameLst>
+                                          <p:attrName>ppt_x</p:attrName>
+                                        </p:attrNameLst>
+                                      </p:cBhvr>
+                                      <p:tavLst>
+                                        <p:tav tm="0">
+                                          <p:val>
+                                            <p:strVal val="#ppt_x"/>
+                                          </p:val>
+                                        </p:tav>
+                                        <p:tav tm="100000">
+                                          <p:val>
+                                            <p:strVal val="#ppt_x"/>
+                                          </p:val>
+                                        </p:tav>
+                                      </p:tavLst>
+                                    </p:anim>
+                                    <p:anim calcmode="lin" valueType="num">
+                                      <p:cBhvr additive="base">
+                                        <p:cTn id="14" dur="500" fill="hold"/>
+                                        <p:tgtEl>
+                                          <p:spTgt spid="165">
+                                            <p:txEl>
+                                              <p:pRg st="1" end="1"/>
+                                            </p:txEl>
+                                          </p:spTgt>
+                                        </p:tgtEl>
+                                        <p:attrNameLst>
+                                          <p:attrName>ppt_y</p:attrName>
+                                        </p:attrNameLst>
+                                      </p:cBhvr>
+                                      <p:tavLst>
+                                        <p:tav tm="0">
+                                          <p:val>
+                                            <p:strVal val="1+#ppt_h/2"/>
+                                          </p:val>
+                                        </p:tav>
+                                        <p:tav tm="100000">
+                                          <p:val>
+                                            <p:strVal val="#ppt_y"/>
+                                          </p:val>
+                                        </p:tav>
+                                      </p:tavLst>
+                                    </p:anim>
+                                  </p:childTnLst>
+                                </p:cTn>
+                              </p:par>
+                            </p:childTnLst>
+                          </p:cTn>
+                        </p:par>
+                      </p:childTnLst>
+                    </p:cTn>
+                  </p:par>
+                  <p:par>
+                    <p:cTn id="15" fill="hold">
+                      <p:stCondLst>
+                        <p:cond delay="indefinite"/>
+                      </p:stCondLst>
+                      <p:childTnLst>
+                        <p:par>
+                          <p:cTn id="16" fill="hold">
+                            <p:stCondLst>
+                              <p:cond delay="0"/>
+                            </p:stCondLst>
+                            <p:childTnLst>
+                              <p:par>
+                                <p:cTn id="17" presetID="2" presetClass="entr" presetSubtype="4" fill="hold" nodeType="clickEffect">
+                                  <p:stCondLst>
+                                    <p:cond delay="0"/>
+                                  </p:stCondLst>
+                                  <p:childTnLst>
+                                    <p:set>
+                                      <p:cBhvr>
+                                        <p:cTn id="18" dur="1" fill="hold">
+                                          <p:stCondLst>
+                                            <p:cond delay="0"/>
+                                          </p:stCondLst>
+                                        </p:cTn>
+                                        <p:tgtEl>
+                                          <p:spTgt spid="165">
+                                            <p:txEl>
+                                              <p:pRg st="2" end="2"/>
+                                            </p:txEl>
+                                          </p:spTgt>
+                                        </p:tgtEl>
+                                        <p:attrNameLst>
+                                          <p:attrName>style.visibility</p:attrName>
+                                        </p:attrNameLst>
+                                      </p:cBhvr>
+                                      <p:to>
+                                        <p:strVal val="visible"/>
+                                      </p:to>
+                                    </p:set>
+                                    <p:anim calcmode="lin" valueType="num">
+                                      <p:cBhvr additive="base">
+                                        <p:cTn id="19" dur="500" fill="hold"/>
+                                        <p:tgtEl>
+                                          <p:spTgt spid="165">
+                                            <p:txEl>
+                                              <p:pRg st="2" end="2"/>
+                                            </p:txEl>
+                                          </p:spTgt>
+                                        </p:tgtEl>
+                                        <p:attrNameLst>
+                                          <p:attrName>ppt_x</p:attrName>
+                                        </p:attrNameLst>
+                                      </p:cBhvr>
+                                      <p:tavLst>
+                                        <p:tav tm="0">
+                                          <p:val>
+                                            <p:strVal val="#ppt_x"/>
+                                          </p:val>
+                                        </p:tav>
+                                        <p:tav tm="100000">
+                                          <p:val>
+                                            <p:strVal val="#ppt_x"/>
+                                          </p:val>
+                                        </p:tav>
+                                      </p:tavLst>
+                                    </p:anim>
+                                    <p:anim calcmode="lin" valueType="num">
+                                      <p:cBhvr additive="base">
+                                        <p:cTn id="20" dur="500" fill="hold"/>
+                                        <p:tgtEl>
+                                          <p:spTgt spid="165">
+                                            <p:txEl>
+                                              <p:pRg st="2" end="2"/>
+                                            </p:txEl>
+                                          </p:spTgt>
+                                        </p:tgtEl>
+                                        <p:attrNameLst>
+                                          <p:attrName>ppt_y</p:attrName>
+                                        </p:attrNameLst>
+                                      </p:cBhvr>
+                                      <p:tavLst>
+                                        <p:tav tm="0">
+                                          <p:val>
+                                            <p:strVal val="1+#ppt_h/2"/>
+                                          </p:val>
+                                        </p:tav>
+                                        <p:tav tm="100000">
+                                          <p:val>
+                                            <p:strVal val="#ppt_y"/>
+                                          </p:val>
+                                        </p:tav>
+                                      </p:tavLst>
+                                    </p:anim>
+                                  </p:childTnLst>
+                                </p:cTn>
+                              </p:par>
+                            </p:childTnLst>
+                          </p:cTn>
+                        </p:par>
+                      </p:childTnLst>
+                    </p:cTn>
+                  </p:par>
+                  <p:par>
+                    <p:cTn id="21" fill="hold">
+                      <p:stCondLst>
+                        <p:cond delay="indefinite"/>
+                      </p:stCondLst>
+                      <p:childTnLst>
+                        <p:par>
+                          <p:cTn id="22" fill="hold">
+                            <p:stCondLst>
+                              <p:cond delay="0"/>
+                            </p:stCondLst>
+                            <p:childTnLst>
+                              <p:par>
+                                <p:cTn id="23" presetID="2" presetClass="entr" presetSubtype="4" fill="hold" nodeType="clickEffect">
+                                  <p:stCondLst>
+                                    <p:cond delay="0"/>
+                                  </p:stCondLst>
+                                  <p:childTnLst>
+                                    <p:set>
+                                      <p:cBhvr>
+                                        <p:cTn id="24" dur="1" fill="hold">
+                                          <p:stCondLst>
+                                            <p:cond delay="0"/>
+                                          </p:stCondLst>
+                                        </p:cTn>
+                                        <p:tgtEl>
+                                          <p:spTgt spid="165">
+                                            <p:txEl>
+                                              <p:pRg st="3" end="3"/>
+                                            </p:txEl>
+                                          </p:spTgt>
+                                        </p:tgtEl>
+                                        <p:attrNameLst>
+                                          <p:attrName>style.visibility</p:attrName>
+                                        </p:attrNameLst>
+                                      </p:cBhvr>
+                                      <p:to>
+                                        <p:strVal val="visible"/>
+                                      </p:to>
+                                    </p:set>
+                                    <p:anim calcmode="lin" valueType="num">
+                                      <p:cBhvr additive="base">
+                                        <p:cTn id="25" dur="500" fill="hold"/>
+                                        <p:tgtEl>
+                                          <p:spTgt spid="165">
+                                            <p:txEl>
+                                              <p:pRg st="3" end="3"/>
+                                            </p:txEl>
+                                          </p:spTgt>
+                                        </p:tgtEl>
+                                        <p:attrNameLst>
+                                          <p:attrName>ppt_x</p:attrName>
+                                        </p:attrNameLst>
+                                      </p:cBhvr>
+                                      <p:tavLst>
+                                        <p:tav tm="0">
+                                          <p:val>
+                                            <p:strVal val="#ppt_x"/>
+                                          </p:val>
+                                        </p:tav>
+                                        <p:tav tm="100000">
+                                          <p:val>
+                                            <p:strVal val="#ppt_x"/>
+                                          </p:val>
+                                        </p:tav>
+                                      </p:tavLst>
+                                    </p:anim>
+                                    <p:anim calcmode="lin" valueType="num">
+                                      <p:cBhvr additive="base">
+                                        <p:cTn id="26" dur="500" fill="hold"/>
+                                        <p:tgtEl>
+                                          <p:spTgt spid="165">
+                                            <p:txEl>
+                                              <p:pRg st="3" end="3"/>
+                                            </p:txEl>
+                                          </p:spTgt>
+                                        </p:tgtEl>
+                                        <p:attrNameLst>
+                                          <p:attrName>ppt_y</p:attrName>
+                                        </p:attrNameLst>
+                                      </p:cBhvr>
+                                      <p:tavLst>
+                                        <p:tav tm="0">
+                                          <p:val>
+                                            <p:strVal val="1+#ppt_h/2"/>
+                                          </p:val>
+                                        </p:tav>
+                                        <p:tav tm="100000">
+                                          <p:val>
+                                            <p:strVal val="#ppt_y"/>
+                                          </p:val>
+                                        </p:tav>
+                                      </p:tavLst>
+                                    </p:anim>
+                                  </p:childTnLst>
+                                </p:cTn>
+                              </p:par>
+                            </p:childTnLst>
+                          </p:cTn>
+                        </p:par>
+                      </p:childTnLst>
+                    </p:cTn>
+                  </p:par>
+                  <p:par>
+                    <p:cTn id="27" fill="hold">
+                      <p:stCondLst>
+                        <p:cond delay="indefinite"/>
+                      </p:stCondLst>
+                      <p:childTnLst>
+                        <p:par>
+                          <p:cTn id="28" fill="hold">
+                            <p:stCondLst>
+                              <p:cond delay="0"/>
+                            </p:stCondLst>
+                            <p:childTnLst>
+                              <p:par>
+                                <p:cTn id="29" presetID="2" presetClass="entr" presetSubtype="4" fill="hold" nodeType="clickEffect">
+                                  <p:stCondLst>
+                                    <p:cond delay="0"/>
+                                  </p:stCondLst>
+                                  <p:childTnLst>
+                                    <p:set>
+                                      <p:cBhvr>
+                                        <p:cTn id="30" dur="1" fill="hold">
+                                          <p:stCondLst>
+                                            <p:cond delay="0"/>
+                                          </p:stCondLst>
+                                        </p:cTn>
+                                        <p:tgtEl>
+                                          <p:spTgt spid="165">
+                                            <p:txEl>
+                                              <p:pRg st="5" end="5"/>
+                                            </p:txEl>
+                                          </p:spTgt>
+                                        </p:tgtEl>
+                                        <p:attrNameLst>
+                                          <p:attrName>style.visibility</p:attrName>
+                                        </p:attrNameLst>
+                                      </p:cBhvr>
+                                      <p:to>
+                                        <p:strVal val="visible"/>
+                                      </p:to>
+                                    </p:set>
+                                    <p:anim calcmode="lin" valueType="num">
+                                      <p:cBhvr additive="base">
+                                        <p:cTn id="31" dur="500" fill="hold"/>
+                                        <p:tgtEl>
+                                          <p:spTgt spid="165">
+                                            <p:txEl>
+                                              <p:pRg st="5" end="5"/>
+                                            </p:txEl>
+                                          </p:spTgt>
+                                        </p:tgtEl>
+                                        <p:attrNameLst>
+                                          <p:attrName>ppt_x</p:attrName>
+                                        </p:attrNameLst>
+                                      </p:cBhvr>
+                                      <p:tavLst>
+                                        <p:tav tm="0">
+                                          <p:val>
+                                            <p:strVal val="#ppt_x"/>
+                                          </p:val>
+                                        </p:tav>
+                                        <p:tav tm="100000">
+                                          <p:val>
+                                            <p:strVal val="#ppt_x"/>
+                                          </p:val>
+                                        </p:tav>
+                                      </p:tavLst>
+                                    </p:anim>
+                                    <p:anim calcmode="lin" valueType="num">
+                                      <p:cBhvr additive="base">
+                                        <p:cTn id="32" dur="500" fill="hold"/>
+                                        <p:tgtEl>
+                                          <p:spTgt spid="165">
+                                            <p:txEl>
+                                              <p:pRg st="5" end="5"/>
+                                            </p:txEl>
+                                          </p:spTgt>
+                                        </p:tgtEl>
+                                        <p:attrNameLst>
+                                          <p:attrName>ppt_y</p:attrName>
+                                        </p:attrNameLst>
+                                      </p:cBhvr>
+                                      <p:tavLst>
+                                        <p:tav tm="0">
+                                          <p:val>
+                                            <p:strVal val="1+#ppt_h/2"/>
+                                          </p:val>
+                                        </p:tav>
+                                        <p:tav tm="100000">
+                                          <p:val>
+                                            <p:strVal val="#ppt_y"/>
+                                          </p:val>
+                                        </p:tav>
+                                      </p:tavLst>
+                                    </p:anim>
+                                  </p:childTnLst>
+                                </p:cTn>
+                              </p:par>
+                            </p:childTnLst>
+                          </p:cTn>
+                        </p:par>
+                      </p:childTnLst>
+                    </p:cTn>
+                  </p:par>
+                  <p:par>
+                    <p:cTn id="33" fill="hold">
+                      <p:stCondLst>
+                        <p:cond delay="indefinite"/>
+                      </p:stCondLst>
+                      <p:childTnLst>
+                        <p:par>
+                          <p:cTn id="34" fill="hold">
+                            <p:stCondLst>
+                              <p:cond delay="0"/>
+                            </p:stCondLst>
+                            <p:childTnLst>
+                              <p:par>
+                                <p:cTn id="35" presetID="2" presetClass="entr" presetSubtype="4" fill="hold" nodeType="clickEffect">
+                                  <p:stCondLst>
+                                    <p:cond delay="0"/>
+                                  </p:stCondLst>
+                                  <p:childTnLst>
+                                    <p:set>
+                                      <p:cBhvr>
+                                        <p:cTn id="36" dur="1" fill="hold">
+                                          <p:stCondLst>
+                                            <p:cond delay="0"/>
+                                          </p:stCondLst>
+                                        </p:cTn>
+                                        <p:tgtEl>
+                                          <p:spTgt spid="165">
+                                            <p:txEl>
+                                              <p:pRg st="6" end="6"/>
+                                            </p:txEl>
+                                          </p:spTgt>
+                                        </p:tgtEl>
+                                        <p:attrNameLst>
+                                          <p:attrName>style.visibility</p:attrName>
+                                        </p:attrNameLst>
+                                      </p:cBhvr>
+                                      <p:to>
+                                        <p:strVal val="visible"/>
+                                      </p:to>
+                                    </p:set>
+                                    <p:anim calcmode="lin" valueType="num">
+                                      <p:cBhvr additive="base">
+                                        <p:cTn id="37" dur="500" fill="hold"/>
+                                        <p:tgtEl>
+                                          <p:spTgt spid="165">
+                                            <p:txEl>
+                                              <p:pRg st="6" end="6"/>
+                                            </p:txEl>
+                                          </p:spTgt>
+                                        </p:tgtEl>
+                                        <p:attrNameLst>
+                                          <p:attrName>ppt_x</p:attrName>
+                                        </p:attrNameLst>
+                                      </p:cBhvr>
+                                      <p:tavLst>
+                                        <p:tav tm="0">
+                                          <p:val>
+                                            <p:strVal val="#ppt_x"/>
+                                          </p:val>
+                                        </p:tav>
+                                        <p:tav tm="100000">
+                                          <p:val>
+                                            <p:strVal val="#ppt_x"/>
+                                          </p:val>
+                                        </p:tav>
+                                      </p:tavLst>
+                                    </p:anim>
+                                    <p:anim calcmode="lin" valueType="num">
+                                      <p:cBhvr additive="base">
+                                        <p:cTn id="38" dur="500" fill="hold"/>
+                                        <p:tgtEl>
+                                          <p:spTgt spid="165">
+                                            <p:txEl>
+                                              <p:pRg st="6" end="6"/>
+                                            </p:txEl>
+                                          </p:spTgt>
+                                        </p:tgtEl>
+                                        <p:attrNameLst>
+                                          <p:attrName>ppt_y</p:attrName>
+                                        </p:attrNameLst>
+                                      </p:cBhvr>
+                                      <p:tavLst>
+                                        <p:tav tm="0">
+                                          <p:val>
+                                            <p:strVal val="1+#ppt_h/2"/>
+                                          </p:val>
+                                        </p:tav>
+                                        <p:tav tm="100000">
+                                          <p:val>
+                                            <p:strVal val="#ppt_y"/>
+                                          </p:val>
+                                        </p:tav>
+                                      </p:tavLst>
+                                    </p:anim>
+                                  </p:childTnLst>
+                                </p:cTn>
+                              </p:par>
+                            </p:childTnLst>
+                          </p:cTn>
+                        </p:par>
+                      </p:childTnLst>
+                    </p:cTn>
+                  </p:par>
+                </p:childTnLst>
+              </p:cTn>
+              <p:prevCondLst>
+                <p:cond evt="onPrev" delay="0">
+                  <p:tgtEl>
+                    <p:sldTgt/>
+                  </p:tgtEl>
+                </p:cond>
+              </p:prevCondLst>
+              <p:nextCondLst>
+                <p:cond evt="onNext" delay="0">
+                  <p:tgtEl>
+                    <p:sldTgt/>
+                  </p:tgtEl>
+                </p:cond>
+              </p:nextCondLst>
+            </p:seq>
+          </p:childTnLst>
+        </p:cTn>
+      </p:par>
+    </p:tnLst>
+  </p:timing>
 </p:sld>
 </file>
 
@@ -7592,6 +13266,218 @@
   <p:clrMapOvr>
     <a:masterClrMapping/>
   </p:clrMapOvr>
+  <p:timing>
+    <p:tnLst>
+      <p:par>
+        <p:cTn id="1" dur="indefinite" restart="never" nodeType="tmRoot">
+          <p:childTnLst>
+            <p:seq concurrent="1" nextAc="seek">
+              <p:cTn id="2" dur="indefinite" nodeType="mainSeq">
+                <p:childTnLst>
+                  <p:par>
+                    <p:cTn id="3" fill="hold">
+                      <p:stCondLst>
+                        <p:cond delay="indefinite"/>
+                      </p:stCondLst>
+                      <p:childTnLst>
+                        <p:par>
+                          <p:cTn id="4" fill="hold">
+                            <p:stCondLst>
+                              <p:cond delay="0"/>
+                            </p:stCondLst>
+                            <p:childTnLst>
+                              <p:par>
+                                <p:cTn id="5" presetID="2" presetClass="entr" presetSubtype="4" fill="hold" nodeType="clickEffect">
+                                  <p:stCondLst>
+                                    <p:cond delay="0"/>
+                                  </p:stCondLst>
+                                  <p:childTnLst>
+                                    <p:set>
+                                      <p:cBhvr>
+                                        <p:cTn id="6" dur="1" fill="hold">
+                                          <p:stCondLst>
+                                            <p:cond delay="0"/>
+                                          </p:stCondLst>
+                                        </p:cTn>
+                                        <p:tgtEl>
+                                          <p:spTgt spid="137"/>
+                                        </p:tgtEl>
+                                        <p:attrNameLst>
+                                          <p:attrName>style.visibility</p:attrName>
+                                        </p:attrNameLst>
+                                      </p:cBhvr>
+                                      <p:to>
+                                        <p:strVal val="visible"/>
+                                      </p:to>
+                                    </p:set>
+                                    <p:anim calcmode="lin" valueType="num">
+                                      <p:cBhvr additive="base">
+                                        <p:cTn id="7" dur="500" fill="hold"/>
+                                        <p:tgtEl>
+                                          <p:spTgt spid="137"/>
+                                        </p:tgtEl>
+                                        <p:attrNameLst>
+                                          <p:attrName>ppt_x</p:attrName>
+                                        </p:attrNameLst>
+                                      </p:cBhvr>
+                                      <p:tavLst>
+                                        <p:tav tm="0">
+                                          <p:val>
+                                            <p:strVal val="#ppt_x"/>
+                                          </p:val>
+                                        </p:tav>
+                                        <p:tav tm="100000">
+                                          <p:val>
+                                            <p:strVal val="#ppt_x"/>
+                                          </p:val>
+                                        </p:tav>
+                                      </p:tavLst>
+                                    </p:anim>
+                                    <p:anim calcmode="lin" valueType="num">
+                                      <p:cBhvr additive="base">
+                                        <p:cTn id="8" dur="500" fill="hold"/>
+                                        <p:tgtEl>
+                                          <p:spTgt spid="137"/>
+                                        </p:tgtEl>
+                                        <p:attrNameLst>
+                                          <p:attrName>ppt_y</p:attrName>
+                                        </p:attrNameLst>
+                                      </p:cBhvr>
+                                      <p:tavLst>
+                                        <p:tav tm="0">
+                                          <p:val>
+                                            <p:strVal val="1+#ppt_h/2"/>
+                                          </p:val>
+                                        </p:tav>
+                                        <p:tav tm="100000">
+                                          <p:val>
+                                            <p:strVal val="#ppt_y"/>
+                                          </p:val>
+                                        </p:tav>
+                                      </p:tavLst>
+                                    </p:anim>
+                                  </p:childTnLst>
+                                </p:cTn>
+                              </p:par>
+                            </p:childTnLst>
+                          </p:cTn>
+                        </p:par>
+                      </p:childTnLst>
+                    </p:cTn>
+                  </p:par>
+                  <p:par>
+                    <p:cTn id="9" fill="hold">
+                      <p:stCondLst>
+                        <p:cond delay="indefinite"/>
+                      </p:stCondLst>
+                      <p:childTnLst>
+                        <p:par>
+                          <p:cTn id="10" fill="hold">
+                            <p:stCondLst>
+                              <p:cond delay="0"/>
+                            </p:stCondLst>
+                            <p:childTnLst>
+                              <p:par>
+                                <p:cTn id="11" presetID="2" presetClass="entr" presetSubtype="4" fill="hold" nodeType="clickEffect">
+                                  <p:stCondLst>
+                                    <p:cond delay="0"/>
+                                  </p:stCondLst>
+                                  <p:childTnLst>
+                                    <p:set>
+                                      <p:cBhvr>
+                                        <p:cTn id="12" dur="1" fill="hold">
+                                          <p:stCondLst>
+                                            <p:cond delay="0"/>
+                                          </p:stCondLst>
+                                        </p:cTn>
+                                        <p:tgtEl>
+                                          <p:spTgt spid="5"/>
+                                        </p:tgtEl>
+                                        <p:attrNameLst>
+                                          <p:attrName>style.visibility</p:attrName>
+                                        </p:attrNameLst>
+                                      </p:cBhvr>
+                                      <p:to>
+                                        <p:strVal val="visible"/>
+                                      </p:to>
+                                    </p:set>
+                                    <p:anim calcmode="lin" valueType="num">
+                                      <p:cBhvr additive="base">
+                                        <p:cTn id="13" dur="500" fill="hold"/>
+                                        <p:tgtEl>
+                                          <p:spTgt spid="5"/>
+                                        </p:tgtEl>
+                                        <p:attrNameLst>
+                                          <p:attrName>ppt_x</p:attrName>
+                                        </p:attrNameLst>
+                                      </p:cBhvr>
+                                      <p:tavLst>
+                                        <p:tav tm="0">
+                                          <p:val>
+                                            <p:strVal val="#ppt_x"/>
+                                          </p:val>
+                                        </p:tav>
+                                        <p:tav tm="100000">
+                                          <p:val>
+                                            <p:strVal val="#ppt_x"/>
+                                          </p:val>
+                                        </p:tav>
+                                      </p:tavLst>
+                                    </p:anim>
+                                    <p:anim calcmode="lin" valueType="num">
+                                      <p:cBhvr additive="base">
+                                        <p:cTn id="14" dur="500" fill="hold"/>
+                                        <p:tgtEl>
+                                          <p:spTgt spid="5"/>
+                                        </p:tgtEl>
+                                        <p:attrNameLst>
+                                          <p:attrName>ppt_y</p:attrName>
+                                        </p:attrNameLst>
+                                      </p:cBhvr>
+                                      <p:tavLst>
+                                        <p:tav tm="0">
+                                          <p:val>
+                                            <p:strVal val="1+#ppt_h/2"/>
+                                          </p:val>
+                                        </p:tav>
+                                        <p:tav tm="100000">
+                                          <p:val>
+                                            <p:strVal val="#ppt_y"/>
+                                          </p:val>
+                                        </p:tav>
+                                      </p:tavLst>
+                                    </p:anim>
+                                  </p:childTnLst>
+                                </p:cTn>
+                              </p:par>
+                            </p:childTnLst>
+                          </p:cTn>
+                        </p:par>
+                      </p:childTnLst>
+                    </p:cTn>
+                  </p:par>
+                </p:childTnLst>
+              </p:cTn>
+              <p:prevCondLst>
+                <p:cond evt="onPrev" delay="0">
+                  <p:tgtEl>
+                    <p:sldTgt/>
+                  </p:tgtEl>
+                </p:cond>
+              </p:prevCondLst>
+              <p:nextCondLst>
+                <p:cond evt="onNext" delay="0">
+                  <p:tgtEl>
+                    <p:sldTgt/>
+                  </p:tgtEl>
+                </p:cond>
+              </p:nextCondLst>
+            </p:seq>
+          </p:childTnLst>
+        </p:cTn>
+      </p:par>
+    </p:tnLst>
+  </p:timing>
 </p:sld>
 </file>
 
@@ -7765,6 +13651,92 @@
   <p:clrMapOvr>
     <a:masterClrMapping/>
   </p:clrMapOvr>
+  <p:timing>
+    <p:tnLst>
+      <p:par>
+        <p:cTn id="1" dur="indefinite" restart="never" nodeType="tmRoot">
+          <p:childTnLst>
+            <p:seq concurrent="1" nextAc="seek">
+              <p:cTn id="2" dur="indefinite" nodeType="mainSeq">
+                <p:childTnLst>
+                  <p:par>
+                    <p:cTn id="3" fill="hold">
+                      <p:stCondLst>
+                        <p:cond delay="indefinite"/>
+                      </p:stCondLst>
+                      <p:childTnLst>
+                        <p:par>
+                          <p:cTn id="4" fill="hold">
+                            <p:stCondLst>
+                              <p:cond delay="0"/>
+                            </p:stCondLst>
+                            <p:childTnLst>
+                              <p:par>
+                                <p:cTn id="5" presetID="9" presetClass="entr" presetSubtype="0" fill="hold" grpId="0" nodeType="clickEffect">
+                                  <p:stCondLst>
+                                    <p:cond delay="0"/>
+                                  </p:stCondLst>
+                                  <p:childTnLst>
+                                    <p:set>
+                                      <p:cBhvr>
+                                        <p:cTn id="6" dur="1" fill="hold">
+                                          <p:stCondLst>
+                                            <p:cond delay="0"/>
+                                          </p:stCondLst>
+                                        </p:cTn>
+                                        <p:tgtEl>
+                                          <p:spTgt spid="4"/>
+                                        </p:tgtEl>
+                                        <p:attrNameLst>
+                                          <p:attrName>style.visibility</p:attrName>
+                                        </p:attrNameLst>
+                                      </p:cBhvr>
+                                      <p:to>
+                                        <p:strVal val="visible"/>
+                                      </p:to>
+                                    </p:set>
+                                    <p:animEffect transition="in" filter="dissolve">
+                                      <p:cBhvr>
+                                        <p:cTn id="7" dur="500"/>
+                                        <p:tgtEl>
+                                          <p:spTgt spid="4"/>
+                                        </p:tgtEl>
+                                      </p:cBhvr>
+                                    </p:animEffect>
+                                  </p:childTnLst>
+                                </p:cTn>
+                              </p:par>
+                            </p:childTnLst>
+                          </p:cTn>
+                        </p:par>
+                      </p:childTnLst>
+                    </p:cTn>
+                  </p:par>
+                </p:childTnLst>
+              </p:cTn>
+              <p:prevCondLst>
+                <p:cond evt="onPrev" delay="0">
+                  <p:tgtEl>
+                    <p:sldTgt/>
+                  </p:tgtEl>
+                </p:cond>
+              </p:prevCondLst>
+              <p:nextCondLst>
+                <p:cond evt="onNext" delay="0">
+                  <p:tgtEl>
+                    <p:sldTgt/>
+                  </p:tgtEl>
+                </p:cond>
+              </p:nextCondLst>
+            </p:seq>
+          </p:childTnLst>
+        </p:cTn>
+      </p:par>
+    </p:tnLst>
+    <p:bldLst>
+      <p:bldP spid="4" grpId="0" animBg="1"/>
+    </p:bldLst>
+  </p:timing>
 </p:sld>
 </file>
 
